--- a/presentations/01-uvod-ku-pythonu.en.pptx
+++ b/presentations/01-uvod-ku-pythonu.en.pptx
@@ -31,10 +31,9 @@
     <p:sldId id="279" r:id="rId25"/>
     <p:sldId id="280" r:id="rId26"/>
     <p:sldId id="281" r:id="rId27"/>
-    <p:sldId id="282" r:id="rId28"/>
   </p:sldIdLst>
   <p:notesMasterIdLst>
-    <p:notesMasterId r:id="rId29"/>
+    <p:notesMasterId r:id="rId28"/>
   </p:notesMasterIdLst>
   <p:sldSz cx="12192000" cy="6858000"/>
   <p:notesSz cx="6858000" cy="12192000"/>
@@ -2136,94 +2135,6 @@
             <a:fld id="{F7021451-1387-4CA6-816F-3879F97B5CBC}" type="slidenum">
               <a:rPr lang="en-US"/>
               <a:t>26</a:t>
-            </a:fld>
-            <a:endParaRPr lang="en-US"/>
-          </a:p>
-        </p:txBody>
-      </p:sp>
-    </p:spTree>
-    <p:extLst>
-      <p:ext uri="{BB962C8B-B14F-4D97-AF65-F5344CB8AC3E}">
-        <p14:creationId xmlns:p14="http://schemas.microsoft.com/office/powerpoint/2010/main" val="1024086991"/>
-      </p:ext>
-    </p:extLst>
-  </p:cSld>
-  <p:clrMapOvr>
-    <a:masterClrMapping/>
-  </p:clrMapOvr>
-</p:notes>
-</file>
-
-<file path=ppt/notesSlides/notesSlide27.xml><?xml version="1.0" encoding="utf-8"?>
-<p:notes xmlns:a="http://schemas.openxmlformats.org/drawingml/2006/main" xmlns:r="http://schemas.openxmlformats.org/officeDocument/2006/relationships" xmlns:p="http://schemas.openxmlformats.org/presentationml/2006/main">
-  <p:cSld>
-    <p:spTree>
-      <p:nvGrpSpPr>
-        <p:cNvPr id="1" name=""/>
-        <p:cNvGrpSpPr/>
-        <p:nvPr/>
-      </p:nvGrpSpPr>
-      <p:grpSpPr>
-        <a:xfrm>
-          <a:off x="0" y="0"/>
-          <a:ext cx="0" cy="0"/>
-          <a:chOff x="0" y="0"/>
-          <a:chExt cx="0" cy="0"/>
-        </a:xfrm>
-      </p:grpSpPr>
-      <p:sp>
-        <p:nvSpPr>
-          <p:cNvPr id="2" name="Slide Image Placeholder 1"/>
-          <p:cNvSpPr>
-            <a:spLocks noGrp="1" noRot="1" noChangeAspect="1"/>
-          </p:cNvSpPr>
-          <p:nvPr>
-            <p:ph type="sldImg"/>
-          </p:nvPr>
-        </p:nvSpPr>
-        <p:spPr/>
-      </p:sp>
-      <p:sp>
-        <p:nvSpPr>
-          <p:cNvPr id="3" name="Notes Placeholder 2"/>
-          <p:cNvSpPr>
-            <a:spLocks noGrp="1"/>
-          </p:cNvSpPr>
-          <p:nvPr>
-            <p:ph type="body" idx="1"/>
-          </p:nvPr>
-        </p:nvSpPr>
-        <p:spPr/>
-        <p:txBody>
-          <a:bodyPr/>
-          <a:lstStyle/>
-          <a:p>
-            <a:r>
-              <a:rPr lang="en-US" dirty="0"/>
-              <a:t/>
-            </a:r>
-            <a:endParaRPr lang="en-US" dirty="0"/>
-          </a:p>
-        </p:txBody>
-      </p:sp>
-      <p:sp>
-        <p:nvSpPr>
-          <p:cNvPr id="4" name="Slide Number Placeholder 3"/>
-          <p:cNvSpPr>
-            <a:spLocks noGrp="1"/>
-          </p:cNvSpPr>
-          <p:nvPr>
-            <p:ph type="sldNum" sz="quarter" idx="10"/>
-          </p:nvPr>
-        </p:nvSpPr>
-        <p:spPr/>
-        <p:txBody>
-          <a:bodyPr/>
-          <a:lstStyle/>
-          <a:p>
-            <a:fld id="{F7021451-1387-4CA6-816F-3879F97B5CBC}" type="slidenum">
-              <a:rPr lang="en-US"/>
-              <a:t>27</a:t>
             </a:fld>
             <a:endParaRPr lang="en-US"/>
           </a:p>
@@ -3479,7 +3390,7 @@
                 <a:ea typeface="Consolas" pitchFamily="34" charset="-122"/>
                 <a:cs typeface="Consolas" pitchFamily="34" charset="-120"/>
               </a:rPr>
-              <a:t>01 / 27</a:t>
+              <a:t>01 / 26</a:t>
             </a:r>
             <a:endParaRPr lang="en-US" sz="800" dirty="0"/>
           </a:p>
@@ -3705,7 +3616,7 @@
                 <a:ea typeface="Consolas" pitchFamily="34" charset="-122"/>
                 <a:cs typeface="Consolas" pitchFamily="34" charset="-120"/>
               </a:rPr>
-              <a:t>10 / 27</a:t>
+              <a:t>10 / 26</a:t>
             </a:r>
             <a:endParaRPr lang="en-US" sz="780" dirty="0"/>
           </a:p>
@@ -3767,8 +3678,8 @@
           </p:nvPr>
         </p:nvGraphicFramePr>
         <p:xfrm>
-          <a:off x="658368" y="1828800"/>
-          <a:ext cx="10899648" cy="3566160"/>
+          <a:off x="658368" y="2359152"/>
+          <a:ext cx="10899648" cy="3017520"/>
         </p:xfrm>
         <a:graphic>
           <a:graphicData uri="http://schemas.openxmlformats.org/drawingml/2006/table">
@@ -3779,7 +3690,7 @@
                 <a:gridCol w="4846320"/>
                 <a:gridCol w="4224528"/>
               </a:tblGrid>
-              <a:tr h="566928">
+              <a:tr h="676656">
                 <a:tc>
                   <a:txBody>
                     <a:bodyPr/>
@@ -3789,7 +3700,7 @@
                         <a:buNone/>
                       </a:pPr>
                       <a:r>
-                        <a:rPr lang="en-US" sz="1500" dirty="0">
+                        <a:rPr lang="en-US" sz="1620" dirty="0">
                           <a:solidFill>
                             <a:srgbClr val="18212B"/>
                           </a:solidFill>
@@ -3797,9 +3708,9 @@
                           <a:ea typeface="Aptos" pitchFamily="34" charset="-122"/>
                           <a:cs typeface="Aptos" pitchFamily="34" charset="-120"/>
                         </a:rPr>
-                        <a:t>Structure</a:t>
+                        <a:t>list</a:t>
                       </a:r>
-                      <a:endParaRPr lang="en-US" sz="1500" dirty="0">
+                      <a:endParaRPr lang="en-US" sz="1620" dirty="0">
                         <a:latin typeface="Aptos" charset="0"/>
                         <a:ea typeface="Aptos" charset="0"/>
                         <a:cs typeface="Aptos" charset="0"/>
@@ -3857,7 +3768,7 @@
                         <a:buNone/>
                       </a:pPr>
                       <a:r>
-                        <a:rPr lang="en-US" sz="1500" dirty="0">
+                        <a:rPr lang="en-US" sz="1620" dirty="0">
                           <a:solidFill>
                             <a:srgbClr val="18212B"/>
                           </a:solidFill>
@@ -3865,9 +3776,9 @@
                           <a:ea typeface="Aptos" pitchFamily="34" charset="-122"/>
                           <a:cs typeface="Aptos" pitchFamily="34" charset="-120"/>
                         </a:rPr>
-                        <a:t>When we need</a:t>
+                        <a:t>order and duplicates</a:t>
                       </a:r>
-                      <a:endParaRPr lang="en-US" sz="1500" dirty="0">
+                      <a:endParaRPr lang="en-US" sz="1620" dirty="0">
                         <a:latin typeface="Aptos" charset="0"/>
                         <a:ea typeface="Aptos" charset="0"/>
                         <a:cs typeface="Aptos" charset="0"/>
@@ -3925,7 +3836,7 @@
                         <a:buNone/>
                       </a:pPr>
                       <a:r>
-                        <a:rPr lang="en-US" sz="1500" dirty="0">
+                        <a:rPr lang="en-US" sz="1620" dirty="0">
                           <a:solidFill>
                             <a:srgbClr val="18212B"/>
                           </a:solidFill>
@@ -3933,9 +3844,9 @@
                           <a:ea typeface="Aptos" pitchFamily="34" charset="-122"/>
                           <a:cs typeface="Aptos" pitchFamily="34" charset="-120"/>
                         </a:rPr>
-                        <a:t>Example</a:t>
+                        <a:t>processed files</a:t>
                       </a:r>
-                      <a:endParaRPr lang="en-US" sz="1500" dirty="0">
+                      <a:endParaRPr lang="en-US" sz="1620" dirty="0">
                         <a:latin typeface="Aptos" charset="0"/>
                         <a:ea typeface="Aptos" charset="0"/>
                         <a:cs typeface="Aptos" charset="0"/>
@@ -3985,7 +3896,7 @@
                   </a:tcPr>
                 </a:tc>
               </a:tr>
-              <a:tr h="566928">
+              <a:tr h="676656">
                 <a:tc>
                   <a:txBody>
                     <a:bodyPr/>
@@ -3995,7 +3906,7 @@
                         <a:buNone/>
                       </a:pPr>
                       <a:r>
-                        <a:rPr lang="en-US" sz="1500" dirty="0">
+                        <a:rPr lang="en-US" sz="1620" dirty="0">
                           <a:solidFill>
                             <a:srgbClr val="18212B"/>
                           </a:solidFill>
@@ -4003,9 +3914,9 @@
                           <a:ea typeface="Aptos" pitchFamily="34" charset="-122"/>
                           <a:cs typeface="Aptos" pitchFamily="34" charset="-120"/>
                         </a:rPr>
-                        <a:t>list</a:t>
+                        <a:t>tuple</a:t>
                       </a:r>
-                      <a:endParaRPr lang="en-US" sz="1500" dirty="0">
+                      <a:endParaRPr lang="en-US" sz="1620" dirty="0">
                         <a:latin typeface="Aptos" charset="0"/>
                         <a:ea typeface="Aptos" charset="0"/>
                         <a:cs typeface="Aptos" charset="0"/>
@@ -4063,7 +3974,7 @@
                         <a:buNone/>
                       </a:pPr>
                       <a:r>
-                        <a:rPr lang="en-US" sz="1500" dirty="0">
+                        <a:rPr lang="en-US" sz="1620" dirty="0">
                           <a:solidFill>
                             <a:srgbClr val="18212B"/>
                           </a:solidFill>
@@ -4071,9 +3982,9 @@
                           <a:ea typeface="Aptos" pitchFamily="34" charset="-122"/>
                           <a:cs typeface="Aptos" pitchFamily="34" charset="-120"/>
                         </a:rPr>
-                        <a:t>order and duplicates</a:t>
+                        <a:t>a fixed record</a:t>
                       </a:r>
-                      <a:endParaRPr lang="en-US" sz="1500" dirty="0">
+                      <a:endParaRPr lang="en-US" sz="1620" dirty="0">
                         <a:latin typeface="Aptos" charset="0"/>
                         <a:ea typeface="Aptos" charset="0"/>
                         <a:cs typeface="Aptos" charset="0"/>
@@ -4131,7 +4042,7 @@
                         <a:buNone/>
                       </a:pPr>
                       <a:r>
-                        <a:rPr lang="en-US" sz="1500" dirty="0">
+                        <a:rPr lang="en-US" sz="1620" dirty="0">
                           <a:solidFill>
                             <a:srgbClr val="18212B"/>
                           </a:solidFill>
@@ -4139,9 +4050,9 @@
                           <a:ea typeface="Aptos" pitchFamily="34" charset="-122"/>
                           <a:cs typeface="Aptos" pitchFamily="34" charset="-120"/>
                         </a:rPr>
-                        <a:t>processed files</a:t>
+                        <a:t>(x, y) coordinates</a:t>
                       </a:r>
-                      <a:endParaRPr lang="en-US" sz="1500" dirty="0">
+                      <a:endParaRPr lang="en-US" sz="1620" dirty="0">
                         <a:latin typeface="Aptos" charset="0"/>
                         <a:ea typeface="Aptos" charset="0"/>
                         <a:cs typeface="Aptos" charset="0"/>
@@ -4191,7 +4102,7 @@
                   </a:tcPr>
                 </a:tc>
               </a:tr>
-              <a:tr h="566928">
+              <a:tr h="676656">
                 <a:tc>
                   <a:txBody>
                     <a:bodyPr/>
@@ -4201,7 +4112,7 @@
                         <a:buNone/>
                       </a:pPr>
                       <a:r>
-                        <a:rPr lang="en-US" sz="1500" dirty="0">
+                        <a:rPr lang="en-US" sz="1620" dirty="0">
                           <a:solidFill>
                             <a:srgbClr val="18212B"/>
                           </a:solidFill>
@@ -4209,9 +4120,9 @@
                           <a:ea typeface="Aptos" pitchFamily="34" charset="-122"/>
                           <a:cs typeface="Aptos" pitchFamily="34" charset="-120"/>
                         </a:rPr>
-                        <a:t>tuple</a:t>
+                        <a:t>set</a:t>
                       </a:r>
-                      <a:endParaRPr lang="en-US" sz="1500" dirty="0">
+                      <a:endParaRPr lang="en-US" sz="1620" dirty="0">
                         <a:latin typeface="Aptos" charset="0"/>
                         <a:ea typeface="Aptos" charset="0"/>
                         <a:cs typeface="Aptos" charset="0"/>
@@ -4269,7 +4180,7 @@
                         <a:buNone/>
                       </a:pPr>
                       <a:r>
-                        <a:rPr lang="en-US" sz="1500" dirty="0">
+                        <a:rPr lang="en-US" sz="1620" dirty="0">
                           <a:solidFill>
                             <a:srgbClr val="18212B"/>
                           </a:solidFill>
@@ -4277,9 +4188,9 @@
                           <a:ea typeface="Aptos" pitchFamily="34" charset="-122"/>
                           <a:cs typeface="Aptos" pitchFamily="34" charset="-120"/>
                         </a:rPr>
-                        <a:t>a fixed record</a:t>
+                        <a:t>unique values or fast membership</a:t>
                       </a:r>
-                      <a:endParaRPr lang="en-US" sz="1500" dirty="0">
+                      <a:endParaRPr lang="en-US" sz="1620" dirty="0">
                         <a:latin typeface="Aptos" charset="0"/>
                         <a:ea typeface="Aptos" charset="0"/>
                         <a:cs typeface="Aptos" charset="0"/>
@@ -4337,7 +4248,7 @@
                         <a:buNone/>
                       </a:pPr>
                       <a:r>
-                        <a:rPr lang="en-US" sz="1500" dirty="0">
+                        <a:rPr lang="en-US" sz="1620" dirty="0">
                           <a:solidFill>
                             <a:srgbClr val="18212B"/>
                           </a:solidFill>
@@ -4345,9 +4256,9 @@
                           <a:ea typeface="Aptos" pitchFamily="34" charset="-122"/>
                           <a:cs typeface="Aptos" pitchFamily="34" charset="-120"/>
                         </a:rPr>
-                        <a:t>(x, y) coordinates</a:t>
+                        <a:t>permissions</a:t>
                       </a:r>
-                      <a:endParaRPr lang="en-US" sz="1500" dirty="0">
+                      <a:endParaRPr lang="en-US" sz="1620" dirty="0">
                         <a:latin typeface="Aptos" charset="0"/>
                         <a:ea typeface="Aptos" charset="0"/>
                         <a:cs typeface="Aptos" charset="0"/>
@@ -4397,7 +4308,7 @@
                   </a:tcPr>
                 </a:tc>
               </a:tr>
-              <a:tr h="566928">
+              <a:tr h="676656">
                 <a:tc>
                   <a:txBody>
                     <a:bodyPr/>
@@ -4407,7 +4318,7 @@
                         <a:buNone/>
                       </a:pPr>
                       <a:r>
-                        <a:rPr lang="en-US" sz="1500" dirty="0">
+                        <a:rPr lang="en-US" sz="1620" dirty="0">
                           <a:solidFill>
                             <a:srgbClr val="18212B"/>
                           </a:solidFill>
@@ -4415,9 +4326,9 @@
                           <a:ea typeface="Aptos" pitchFamily="34" charset="-122"/>
                           <a:cs typeface="Aptos" pitchFamily="34" charset="-120"/>
                         </a:rPr>
-                        <a:t>set</a:t>
+                        <a:t>dict</a:t>
                       </a:r>
-                      <a:endParaRPr lang="en-US" sz="1500" dirty="0">
+                      <a:endParaRPr lang="en-US" sz="1620" dirty="0">
                         <a:latin typeface="Aptos" charset="0"/>
                         <a:ea typeface="Aptos" charset="0"/>
                         <a:cs typeface="Aptos" charset="0"/>
@@ -4475,7 +4386,7 @@
                         <a:buNone/>
                       </a:pPr>
                       <a:r>
-                        <a:rPr lang="en-US" sz="1500" dirty="0">
+                        <a:rPr lang="en-US" sz="1620" dirty="0">
                           <a:solidFill>
                             <a:srgbClr val="18212B"/>
                           </a:solidFill>
@@ -4483,9 +4394,9 @@
                           <a:ea typeface="Aptos" pitchFamily="34" charset="-122"/>
                           <a:cs typeface="Aptos" pitchFamily="34" charset="-120"/>
                         </a:rPr>
-                        <a:t>unique values or fast membership</a:t>
+                        <a:t>a value by key</a:t>
                       </a:r>
-                      <a:endParaRPr lang="en-US" sz="1500" dirty="0">
+                      <a:endParaRPr lang="en-US" sz="1620" dirty="0">
                         <a:latin typeface="Aptos" charset="0"/>
                         <a:ea typeface="Aptos" charset="0"/>
                         <a:cs typeface="Aptos" charset="0"/>
@@ -4543,213 +4454,7 @@
                         <a:buNone/>
                       </a:pPr>
                       <a:r>
-                        <a:rPr lang="en-US" sz="1500" dirty="0">
-                          <a:solidFill>
-                            <a:srgbClr val="18212B"/>
-                          </a:solidFill>
-                          <a:latin typeface="Aptos" pitchFamily="34" charset="0"/>
-                          <a:ea typeface="Aptos" pitchFamily="34" charset="-122"/>
-                          <a:cs typeface="Aptos" pitchFamily="34" charset="-120"/>
-                        </a:rPr>
-                        <a:t>permissions</a:t>
-                      </a:r>
-                      <a:endParaRPr lang="en-US" sz="1500" dirty="0">
-                        <a:latin typeface="Aptos" charset="0"/>
-                        <a:ea typeface="Aptos" charset="0"/>
-                        <a:cs typeface="Aptos" charset="0"/>
-                      </a:endParaRPr>
-                    </a:p>
-                  </a:txBody>
-                  <a:tcPr marL="91440" marR="91440" marT="91440" marB="91440" anchor="mid">
-                    <a:lnL w="5715" cap="flat" cmpd="sng" algn="ctr">
-                      <a:solidFill>
-                        <a:srgbClr val="D8E0E6"/>
-                      </a:solidFill>
-                      <a:prstDash val="solid"/>
-                      <a:round/>
-                      <a:headEnd type="none" w="med" len="med"/>
-                      <a:tailEnd type="none" w="med" len="med"/>
-                    </a:lnL>
-                    <a:lnR w="5715" cap="flat" cmpd="sng" algn="ctr">
-                      <a:solidFill>
-                        <a:srgbClr val="D8E0E6"/>
-                      </a:solidFill>
-                      <a:prstDash val="solid"/>
-                      <a:round/>
-                      <a:headEnd type="none" w="med" len="med"/>
-                      <a:tailEnd type="none" w="med" len="med"/>
-                    </a:lnR>
-                    <a:lnT w="5715" cap="flat" cmpd="sng" algn="ctr">
-                      <a:solidFill>
-                        <a:srgbClr val="D8E0E6"/>
-                      </a:solidFill>
-                      <a:prstDash val="solid"/>
-                      <a:round/>
-                      <a:headEnd type="none" w="med" len="med"/>
-                      <a:tailEnd type="none" w="med" len="med"/>
-                    </a:lnT>
-                    <a:lnB w="5715" cap="flat" cmpd="sng" algn="ctr">
-                      <a:solidFill>
-                        <a:srgbClr val="D8E0E6"/>
-                      </a:solidFill>
-                      <a:prstDash val="solid"/>
-                      <a:round/>
-                      <a:headEnd type="none" w="med" len="med"/>
-                      <a:tailEnd type="none" w="med" len="med"/>
-                    </a:lnB>
-                    <a:solidFill>
-                      <a:srgbClr val="FFFFFF"/>
-                    </a:solidFill>
-                  </a:tcPr>
-                </a:tc>
-              </a:tr>
-              <a:tr h="566928">
-                <a:tc>
-                  <a:txBody>
-                    <a:bodyPr/>
-                    <a:lstStyle/>
-                    <a:p>
-                      <a:pPr indent="0" marL="0">
-                        <a:buNone/>
-                      </a:pPr>
-                      <a:r>
-                        <a:rPr lang="en-US" sz="1500" dirty="0">
-                          <a:solidFill>
-                            <a:srgbClr val="18212B"/>
-                          </a:solidFill>
-                          <a:latin typeface="Aptos" pitchFamily="34" charset="0"/>
-                          <a:ea typeface="Aptos" pitchFamily="34" charset="-122"/>
-                          <a:cs typeface="Aptos" pitchFamily="34" charset="-120"/>
-                        </a:rPr>
-                        <a:t>dict</a:t>
-                      </a:r>
-                      <a:endParaRPr lang="en-US" sz="1500" dirty="0">
-                        <a:latin typeface="Aptos" charset="0"/>
-                        <a:ea typeface="Aptos" charset="0"/>
-                        <a:cs typeface="Aptos" charset="0"/>
-                      </a:endParaRPr>
-                    </a:p>
-                  </a:txBody>
-                  <a:tcPr marL="91440" marR="91440" marT="91440" marB="91440" anchor="mid">
-                    <a:lnL w="5715" cap="flat" cmpd="sng" algn="ctr">
-                      <a:solidFill>
-                        <a:srgbClr val="D8E0E6"/>
-                      </a:solidFill>
-                      <a:prstDash val="solid"/>
-                      <a:round/>
-                      <a:headEnd type="none" w="med" len="med"/>
-                      <a:tailEnd type="none" w="med" len="med"/>
-                    </a:lnL>
-                    <a:lnR w="5715" cap="flat" cmpd="sng" algn="ctr">
-                      <a:solidFill>
-                        <a:srgbClr val="D8E0E6"/>
-                      </a:solidFill>
-                      <a:prstDash val="solid"/>
-                      <a:round/>
-                      <a:headEnd type="none" w="med" len="med"/>
-                      <a:tailEnd type="none" w="med" len="med"/>
-                    </a:lnR>
-                    <a:lnT w="5715" cap="flat" cmpd="sng" algn="ctr">
-                      <a:solidFill>
-                        <a:srgbClr val="D8E0E6"/>
-                      </a:solidFill>
-                      <a:prstDash val="solid"/>
-                      <a:round/>
-                      <a:headEnd type="none" w="med" len="med"/>
-                      <a:tailEnd type="none" w="med" len="med"/>
-                    </a:lnT>
-                    <a:lnB w="5715" cap="flat" cmpd="sng" algn="ctr">
-                      <a:solidFill>
-                        <a:srgbClr val="D8E0E6"/>
-                      </a:solidFill>
-                      <a:prstDash val="solid"/>
-                      <a:round/>
-                      <a:headEnd type="none" w="med" len="med"/>
-                      <a:tailEnd type="none" w="med" len="med"/>
-                    </a:lnB>
-                    <a:solidFill>
-                      <a:srgbClr val="FFFFFF"/>
-                    </a:solidFill>
-                  </a:tcPr>
-                </a:tc>
-                <a:tc>
-                  <a:txBody>
-                    <a:bodyPr/>
-                    <a:lstStyle/>
-                    <a:p>
-                      <a:pPr indent="0" marL="0">
-                        <a:buNone/>
-                      </a:pPr>
-                      <a:r>
-                        <a:rPr lang="en-US" sz="1500" dirty="0">
-                          <a:solidFill>
-                            <a:srgbClr val="18212B"/>
-                          </a:solidFill>
-                          <a:latin typeface="Aptos" pitchFamily="34" charset="0"/>
-                          <a:ea typeface="Aptos" pitchFamily="34" charset="-122"/>
-                          <a:cs typeface="Aptos" pitchFamily="34" charset="-120"/>
-                        </a:rPr>
-                        <a:t>a value by key</a:t>
-                      </a:r>
-                      <a:endParaRPr lang="en-US" sz="1500" dirty="0">
-                        <a:latin typeface="Aptos" charset="0"/>
-                        <a:ea typeface="Aptos" charset="0"/>
-                        <a:cs typeface="Aptos" charset="0"/>
-                      </a:endParaRPr>
-                    </a:p>
-                  </a:txBody>
-                  <a:tcPr marL="91440" marR="91440" marT="91440" marB="91440" anchor="mid">
-                    <a:lnL w="5715" cap="flat" cmpd="sng" algn="ctr">
-                      <a:solidFill>
-                        <a:srgbClr val="D8E0E6"/>
-                      </a:solidFill>
-                      <a:prstDash val="solid"/>
-                      <a:round/>
-                      <a:headEnd type="none" w="med" len="med"/>
-                      <a:tailEnd type="none" w="med" len="med"/>
-                    </a:lnL>
-                    <a:lnR w="5715" cap="flat" cmpd="sng" algn="ctr">
-                      <a:solidFill>
-                        <a:srgbClr val="D8E0E6"/>
-                      </a:solidFill>
-                      <a:prstDash val="solid"/>
-                      <a:round/>
-                      <a:headEnd type="none" w="med" len="med"/>
-                      <a:tailEnd type="none" w="med" len="med"/>
-                    </a:lnR>
-                    <a:lnT w="5715" cap="flat" cmpd="sng" algn="ctr">
-                      <a:solidFill>
-                        <a:srgbClr val="D8E0E6"/>
-                      </a:solidFill>
-                      <a:prstDash val="solid"/>
-                      <a:round/>
-                      <a:headEnd type="none" w="med" len="med"/>
-                      <a:tailEnd type="none" w="med" len="med"/>
-                    </a:lnT>
-                    <a:lnB w="5715" cap="flat" cmpd="sng" algn="ctr">
-                      <a:solidFill>
-                        <a:srgbClr val="D8E0E6"/>
-                      </a:solidFill>
-                      <a:prstDash val="solid"/>
-                      <a:round/>
-                      <a:headEnd type="none" w="med" len="med"/>
-                      <a:tailEnd type="none" w="med" len="med"/>
-                    </a:lnB>
-                    <a:solidFill>
-                      <a:srgbClr val="FFFFFF"/>
-                    </a:solidFill>
-                  </a:tcPr>
-                </a:tc>
-                <a:tc>
-                  <a:txBody>
-                    <a:bodyPr/>
-                    <a:lstStyle/>
-                    <a:p>
-                      <a:pPr indent="0" marL="0">
-                        <a:buNone/>
-                      </a:pPr>
-                      <a:r>
-                        <a:rPr lang="en-US" sz="1500" dirty="0">
+                        <a:rPr lang="en-US" sz="1620" dirty="0">
                           <a:solidFill>
                             <a:srgbClr val="18212B"/>
                           </a:solidFill>
@@ -4759,7 +4464,7 @@
                         </a:rPr>
                         <a:t>id → user</a:t>
                       </a:r>
-                      <a:endParaRPr lang="en-US" sz="1500" dirty="0">
+                      <a:endParaRPr lang="en-US" sz="1620" dirty="0">
                         <a:latin typeface="Aptos" charset="0"/>
                         <a:ea typeface="Aptos" charset="0"/>
                         <a:cs typeface="Aptos" charset="0"/>
@@ -5181,7 +4886,7 @@
                 <a:ea typeface="Consolas" pitchFamily="34" charset="-122"/>
                 <a:cs typeface="Consolas" pitchFamily="34" charset="-120"/>
               </a:rPr>
-              <a:t>11 / 27</a:t>
+              <a:t>11 / 26</a:t>
             </a:r>
             <a:endParaRPr lang="en-US" sz="780" dirty="0"/>
           </a:p>
@@ -5738,7 +5443,7 @@
                 <a:ea typeface="Consolas" pitchFamily="34" charset="-122"/>
                 <a:cs typeface="Consolas" pitchFamily="34" charset="-120"/>
               </a:rPr>
-              <a:t>12 / 27</a:t>
+              <a:t>12 / 26</a:t>
             </a:r>
             <a:endParaRPr lang="en-US" sz="780" dirty="0"/>
           </a:p>
@@ -6258,7 +5963,7 @@
                 <a:ea typeface="Consolas" pitchFamily="34" charset="-122"/>
                 <a:cs typeface="Consolas" pitchFamily="34" charset="-120"/>
               </a:rPr>
-              <a:t>13 / 27</a:t>
+              <a:t>13 / 26</a:t>
             </a:r>
             <a:endParaRPr lang="en-US" sz="780" dirty="0"/>
           </a:p>
@@ -6795,7 +6500,7 @@
                 <a:ea typeface="Consolas" pitchFamily="34" charset="-122"/>
                 <a:cs typeface="Consolas" pitchFamily="34" charset="-120"/>
               </a:rPr>
-              <a:t>14 / 27</a:t>
+              <a:t>14 / 26</a:t>
             </a:r>
             <a:endParaRPr lang="en-US" sz="780" dirty="0"/>
           </a:p>
@@ -6809,8 +6514,8 @@
         </p:nvSpPr>
         <p:spPr>
           <a:xfrm>
-            <a:off x="749808" y="1481328"/>
-            <a:ext cx="10287000" cy="1554480"/>
+            <a:off x="658368" y="914400"/>
+            <a:ext cx="10881360" cy="713232"/>
           </a:xfrm>
           <a:prstGeom prst="rect">
             <a:avLst/>
@@ -6828,7 +6533,7 @@
               <a:buNone/>
             </a:pPr>
             <a:r>
-              <a:rPr lang="en-US" sz="3300" b="1" dirty="0">
+              <a:rPr lang="en-US" sz="2850" b="1" dirty="0">
                 <a:solidFill>
                   <a:srgbClr val="16324F"/>
                 </a:solidFill>
@@ -6836,9 +6541,9 @@
                 <a:ea typeface="Aptos Display" pitchFamily="34" charset="-122"/>
                 <a:cs typeface="Aptos Display" pitchFamily="34" charset="-120"/>
               </a:rPr>
-              <a:t>A comprehension shortens one clear transformation. Not an entire algorithm.</a:t>
-            </a:r>
-            <a:endParaRPr lang="en-US" sz="3300" dirty="0"/>
+              <a:t>A comprehension shortens one clear transformation</a:t>
+            </a:r>
+            <a:endParaRPr lang="en-US" sz="2850" dirty="0"/>
           </a:p>
         </p:txBody>
       </p:sp>
@@ -6850,18 +6555,18 @@
         </p:nvSpPr>
         <p:spPr>
           <a:xfrm>
-            <a:off x="768096" y="3438144"/>
-            <a:ext cx="1280160" cy="91440"/>
+            <a:off x="658368" y="1828800"/>
+            <a:ext cx="5193792" cy="3255264"/>
           </a:xfrm>
           <a:prstGeom prst="rect">
             <a:avLst/>
           </a:prstGeom>
           <a:solidFill>
-            <a:srgbClr val="E0A03A"/>
+            <a:srgbClr val="17212B"/>
           </a:solidFill>
           <a:ln w="12700">
             <a:solidFill>
-              <a:srgbClr val="E0A03A"/>
+              <a:srgbClr val="243242"/>
             </a:solidFill>
             <a:prstDash val="solid"/>
           </a:ln>
@@ -6869,14 +6574,80 @@
       </p:sp>
       <p:sp>
         <p:nvSpPr>
-          <p:cNvPr id="10" name="Text 8"/>
-          <p:cNvSpPr/>
-          <p:nvPr/>
-        </p:nvSpPr>
-        <p:spPr>
-          <a:xfrm>
-            <a:off x="768096" y="3858768"/>
-            <a:ext cx="9006840" cy="804672"/>
+          <p:cNvPr id="10" name="Shape 8"/>
+          <p:cNvSpPr/>
+          <p:nvPr/>
+        </p:nvSpPr>
+        <p:spPr>
+          <a:xfrm>
+            <a:off x="658368" y="1828800"/>
+            <a:ext cx="5193792" cy="347472"/>
+          </a:xfrm>
+          <a:prstGeom prst="rect">
+            <a:avLst/>
+          </a:prstGeom>
+          <a:solidFill>
+            <a:srgbClr val="223044"/>
+          </a:solidFill>
+          <a:ln w="12700">
+            <a:solidFill>
+              <a:srgbClr val="223044"/>
+            </a:solidFill>
+            <a:prstDash val="solid"/>
+          </a:ln>
+        </p:spPr>
+      </p:sp>
+      <p:sp>
+        <p:nvSpPr>
+          <p:cNvPr id="11" name="Text 9"/>
+          <p:cNvSpPr/>
+          <p:nvPr/>
+        </p:nvSpPr>
+        <p:spPr>
+          <a:xfrm>
+            <a:off x="877824" y="1947672"/>
+            <a:ext cx="4754880" cy="155448"/>
+          </a:xfrm>
+          <a:prstGeom prst="rect">
+            <a:avLst/>
+          </a:prstGeom>
+          <a:noFill/>
+          <a:ln/>
+        </p:spPr>
+        <p:txBody>
+          <a:bodyPr wrap="square" lIns="0" tIns="0" rIns="0" bIns="0" rtlCol="0" anchor="ctr">
+            <a:normAutofit/>
+          </a:bodyPr>
+          <a:lstStyle/>
+          <a:p>
+            <a:pPr algn="l" indent="0" marL="0">
+              <a:buNone/>
+            </a:pPr>
+            <a:r>
+              <a:rPr lang="en-US" sz="810" b="1" spc="30" kern="0" dirty="0">
+                <a:solidFill>
+                  <a:srgbClr val="8FD3FF"/>
+                </a:solidFill>
+                <a:latin typeface="Consolas" pitchFamily="34" charset="0"/>
+                <a:ea typeface="Consolas" pitchFamily="34" charset="-122"/>
+                <a:cs typeface="Consolas" pitchFamily="34" charset="-120"/>
+              </a:rPr>
+              <a:t>READABLE LOOP</a:t>
+            </a:r>
+            <a:endParaRPr lang="en-US" sz="810" dirty="0"/>
+          </a:p>
+        </p:txBody>
+      </p:sp>
+      <p:sp>
+        <p:nvSpPr>
+          <p:cNvPr id="12" name="Text 10"/>
+          <p:cNvSpPr/>
+          <p:nvPr/>
+        </p:nvSpPr>
+        <p:spPr>
+          <a:xfrm>
+            <a:off x="877824" y="2487168"/>
+            <a:ext cx="4718304" cy="2322576"/>
           </a:xfrm>
           <a:prstGeom prst="rect">
             <a:avLst/>
@@ -6894,7 +6665,299 @@
               <a:buNone/>
             </a:pPr>
             <a:r>
-              <a:rPr lang="en-US" sz="2100" dirty="0">
+              <a:rPr lang="en-US" sz="1620" dirty="0">
+                <a:solidFill>
+                  <a:srgbClr val="F4F7FA"/>
+                </a:solidFill>
+                <a:latin typeface="Consolas" pitchFamily="34" charset="0"/>
+                <a:ea typeface="Consolas" pitchFamily="34" charset="-122"/>
+                <a:cs typeface="Consolas" pitchFamily="34" charset="-120"/>
+              </a:rPr>
+              <a:t>passed = []</a:t>
+            </a:r>
+            <a:endParaRPr lang="en-US" sz="1620" dirty="0"/>
+          </a:p>
+          <a:p>
+            <a:pPr algn="l" indent="0" marL="0">
+              <a:buNone/>
+            </a:pPr>
+            <a:r>
+              <a:rPr lang="en-US" sz="1620" dirty="0">
+                <a:solidFill>
+                  <a:srgbClr val="F4F7FA"/>
+                </a:solidFill>
+                <a:latin typeface="Consolas" pitchFamily="34" charset="0"/>
+                <a:ea typeface="Consolas" pitchFamily="34" charset="-122"/>
+                <a:cs typeface="Consolas" pitchFamily="34" charset="-120"/>
+              </a:rPr>
+              <a:t>for score in scores:</a:t>
+            </a:r>
+            <a:endParaRPr lang="en-US" sz="1620" dirty="0"/>
+          </a:p>
+          <a:p>
+            <a:pPr algn="l" indent="0" marL="0">
+              <a:buNone/>
+            </a:pPr>
+            <a:r>
+              <a:rPr lang="en-US" sz="1620" dirty="0">
+                <a:solidFill>
+                  <a:srgbClr val="F4F7FA"/>
+                </a:solidFill>
+                <a:latin typeface="Consolas" pitchFamily="34" charset="0"/>
+                <a:ea typeface="Consolas" pitchFamily="34" charset="-122"/>
+                <a:cs typeface="Consolas" pitchFamily="34" charset="-120"/>
+              </a:rPr>
+              <a:t>    if score &gt;= 51:</a:t>
+            </a:r>
+            <a:endParaRPr lang="en-US" sz="1620" dirty="0"/>
+          </a:p>
+          <a:p>
+            <a:pPr algn="l" indent="0" marL="0">
+              <a:buNone/>
+            </a:pPr>
+            <a:r>
+              <a:rPr lang="en-US" sz="1620" dirty="0">
+                <a:solidFill>
+                  <a:srgbClr val="F4F7FA"/>
+                </a:solidFill>
+                <a:latin typeface="Consolas" pitchFamily="34" charset="0"/>
+                <a:ea typeface="Consolas" pitchFamily="34" charset="-122"/>
+                <a:cs typeface="Consolas" pitchFamily="34" charset="-120"/>
+              </a:rPr>
+              <a:t>        passed.append(score ** 2)</a:t>
+            </a:r>
+            <a:endParaRPr lang="en-US" sz="1620" dirty="0"/>
+          </a:p>
+        </p:txBody>
+      </p:sp>
+      <p:sp>
+        <p:nvSpPr>
+          <p:cNvPr id="13" name="Shape 11"/>
+          <p:cNvSpPr/>
+          <p:nvPr/>
+        </p:nvSpPr>
+        <p:spPr>
+          <a:xfrm>
+            <a:off x="6336792" y="1828800"/>
+            <a:ext cx="5193792" cy="3255264"/>
+          </a:xfrm>
+          <a:prstGeom prst="rect">
+            <a:avLst/>
+          </a:prstGeom>
+          <a:solidFill>
+            <a:srgbClr val="17212B"/>
+          </a:solidFill>
+          <a:ln w="12700">
+            <a:solidFill>
+              <a:srgbClr val="243242"/>
+            </a:solidFill>
+            <a:prstDash val="solid"/>
+          </a:ln>
+        </p:spPr>
+      </p:sp>
+      <p:sp>
+        <p:nvSpPr>
+          <p:cNvPr id="14" name="Shape 12"/>
+          <p:cNvSpPr/>
+          <p:nvPr/>
+        </p:nvSpPr>
+        <p:spPr>
+          <a:xfrm>
+            <a:off x="6336792" y="1828800"/>
+            <a:ext cx="5193792" cy="347472"/>
+          </a:xfrm>
+          <a:prstGeom prst="rect">
+            <a:avLst/>
+          </a:prstGeom>
+          <a:solidFill>
+            <a:srgbClr val="223044"/>
+          </a:solidFill>
+          <a:ln w="12700">
+            <a:solidFill>
+              <a:srgbClr val="223044"/>
+            </a:solidFill>
+            <a:prstDash val="solid"/>
+          </a:ln>
+        </p:spPr>
+      </p:sp>
+      <p:sp>
+        <p:nvSpPr>
+          <p:cNvPr id="15" name="Text 13"/>
+          <p:cNvSpPr/>
+          <p:nvPr/>
+        </p:nvSpPr>
+        <p:spPr>
+          <a:xfrm>
+            <a:off x="6556248" y="1947672"/>
+            <a:ext cx="4754880" cy="155448"/>
+          </a:xfrm>
+          <a:prstGeom prst="rect">
+            <a:avLst/>
+          </a:prstGeom>
+          <a:noFill/>
+          <a:ln/>
+        </p:spPr>
+        <p:txBody>
+          <a:bodyPr wrap="square" lIns="0" tIns="0" rIns="0" bIns="0" rtlCol="0" anchor="ctr">
+            <a:normAutofit/>
+          </a:bodyPr>
+          <a:lstStyle/>
+          <a:p>
+            <a:pPr algn="l" indent="0" marL="0">
+              <a:buNone/>
+            </a:pPr>
+            <a:r>
+              <a:rPr lang="en-US" sz="810" b="1" spc="30" kern="0" dirty="0">
+                <a:solidFill>
+                  <a:srgbClr val="8FD3FF"/>
+                </a:solidFill>
+                <a:latin typeface="Consolas" pitchFamily="34" charset="0"/>
+                <a:ea typeface="Consolas" pitchFamily="34" charset="-122"/>
+                <a:cs typeface="Consolas" pitchFamily="34" charset="-120"/>
+              </a:rPr>
+              <a:t>CLEAR COMPREHENSION</a:t>
+            </a:r>
+            <a:endParaRPr lang="en-US" sz="810" dirty="0"/>
+          </a:p>
+        </p:txBody>
+      </p:sp>
+      <p:sp>
+        <p:nvSpPr>
+          <p:cNvPr id="16" name="Text 14"/>
+          <p:cNvSpPr/>
+          <p:nvPr/>
+        </p:nvSpPr>
+        <p:spPr>
+          <a:xfrm>
+            <a:off x="6556248" y="2487168"/>
+            <a:ext cx="4718304" cy="2322576"/>
+          </a:xfrm>
+          <a:prstGeom prst="rect">
+            <a:avLst/>
+          </a:prstGeom>
+          <a:noFill/>
+          <a:ln/>
+        </p:spPr>
+        <p:txBody>
+          <a:bodyPr wrap="square" lIns="0" tIns="0" rIns="0" bIns="0" rtlCol="0" anchor="t">
+            <a:normAutofit/>
+          </a:bodyPr>
+          <a:lstStyle/>
+          <a:p>
+            <a:pPr algn="l" indent="0" marL="0">
+              <a:buNone/>
+            </a:pPr>
+            <a:r>
+              <a:rPr lang="en-US" sz="1620" dirty="0">
+                <a:solidFill>
+                  <a:srgbClr val="F4F7FA"/>
+                </a:solidFill>
+                <a:latin typeface="Consolas" pitchFamily="34" charset="0"/>
+                <a:ea typeface="Consolas" pitchFamily="34" charset="-122"/>
+                <a:cs typeface="Consolas" pitchFamily="34" charset="-120"/>
+              </a:rPr>
+              <a:t>passed = [</a:t>
+            </a:r>
+            <a:endParaRPr lang="en-US" sz="1620" dirty="0"/>
+          </a:p>
+          <a:p>
+            <a:pPr algn="l" indent="0" marL="0">
+              <a:buNone/>
+            </a:pPr>
+            <a:r>
+              <a:rPr lang="en-US" sz="1620" dirty="0">
+                <a:solidFill>
+                  <a:srgbClr val="F4F7FA"/>
+                </a:solidFill>
+                <a:latin typeface="Consolas" pitchFamily="34" charset="0"/>
+                <a:ea typeface="Consolas" pitchFamily="34" charset="-122"/>
+                <a:cs typeface="Consolas" pitchFamily="34" charset="-120"/>
+              </a:rPr>
+              <a:t>    score ** 2</a:t>
+            </a:r>
+            <a:endParaRPr lang="en-US" sz="1620" dirty="0"/>
+          </a:p>
+          <a:p>
+            <a:pPr algn="l" indent="0" marL="0">
+              <a:buNone/>
+            </a:pPr>
+            <a:r>
+              <a:rPr lang="en-US" sz="1620" dirty="0">
+                <a:solidFill>
+                  <a:srgbClr val="F4F7FA"/>
+                </a:solidFill>
+                <a:latin typeface="Consolas" pitchFamily="34" charset="0"/>
+                <a:ea typeface="Consolas" pitchFamily="34" charset="-122"/>
+                <a:cs typeface="Consolas" pitchFamily="34" charset="-120"/>
+              </a:rPr>
+              <a:t>    for score in scores</a:t>
+            </a:r>
+            <a:endParaRPr lang="en-US" sz="1620" dirty="0"/>
+          </a:p>
+          <a:p>
+            <a:pPr algn="l" indent="0" marL="0">
+              <a:buNone/>
+            </a:pPr>
+            <a:r>
+              <a:rPr lang="en-US" sz="1620" dirty="0">
+                <a:solidFill>
+                  <a:srgbClr val="F4F7FA"/>
+                </a:solidFill>
+                <a:latin typeface="Consolas" pitchFamily="34" charset="0"/>
+                <a:ea typeface="Consolas" pitchFamily="34" charset="-122"/>
+                <a:cs typeface="Consolas" pitchFamily="34" charset="-120"/>
+              </a:rPr>
+              <a:t>    if score &gt;= 51</a:t>
+            </a:r>
+            <a:endParaRPr lang="en-US" sz="1620" dirty="0"/>
+          </a:p>
+          <a:p>
+            <a:pPr algn="l" indent="0" marL="0">
+              <a:buNone/>
+            </a:pPr>
+            <a:r>
+              <a:rPr lang="en-US" sz="1620" dirty="0">
+                <a:solidFill>
+                  <a:srgbClr val="F4F7FA"/>
+                </a:solidFill>
+                <a:latin typeface="Consolas" pitchFamily="34" charset="0"/>
+                <a:ea typeface="Consolas" pitchFamily="34" charset="-122"/>
+                <a:cs typeface="Consolas" pitchFamily="34" charset="-120"/>
+              </a:rPr>
+              <a:t>]</a:t>
+            </a:r>
+            <a:endParaRPr lang="en-US" sz="1620" dirty="0"/>
+          </a:p>
+        </p:txBody>
+      </p:sp>
+      <p:sp>
+        <p:nvSpPr>
+          <p:cNvPr id="17" name="Text 15"/>
+          <p:cNvSpPr/>
+          <p:nvPr/>
+        </p:nvSpPr>
+        <p:spPr>
+          <a:xfrm>
+            <a:off x="749808" y="5486400"/>
+            <a:ext cx="10332720" cy="411480"/>
+          </a:xfrm>
+          <a:prstGeom prst="rect">
+            <a:avLst/>
+          </a:prstGeom>
+          <a:noFill/>
+          <a:ln/>
+        </p:spPr>
+        <p:txBody>
+          <a:bodyPr wrap="square" lIns="0" tIns="0" rIns="0" bIns="0" rtlCol="0" anchor="t">
+            <a:normAutofit/>
+          </a:bodyPr>
+          <a:lstStyle/>
+          <a:p>
+            <a:pPr algn="l" indent="0" marL="0">
+              <a:buNone/>
+            </a:pPr>
+            <a:r>
+              <a:rPr lang="en-US" sz="1800" dirty="0">
                 <a:solidFill>
                   <a:srgbClr val="5E6B78"/>
                 </a:solidFill>
@@ -6902,9 +6965,9 @@
                 <a:ea typeface="Aptos" pitchFamily="34" charset="-122"/>
                 <a:cs typeface="Aptos" pitchFamily="34" charset="-120"/>
               </a:rPr>
-              <a:t>The procedure must be readable first. Only then consider a shorter form.</a:t>
-            </a:r>
-            <a:endParaRPr lang="en-US" sz="2100" dirty="0"/>
+              <a:t>If several nested rules must be followed at once, use named intermediate values and a loop.</a:t>
+            </a:r>
+            <a:endParaRPr lang="en-US" sz="1800" dirty="0"/>
           </a:p>
         </p:txBody>
       </p:sp>
@@ -7128,7 +7191,7 @@
                 <a:ea typeface="Consolas" pitchFamily="34" charset="-122"/>
                 <a:cs typeface="Consolas" pitchFamily="34" charset="-120"/>
               </a:rPr>
-              <a:t>15 / 27</a:t>
+              <a:t>15 / 26</a:t>
             </a:r>
             <a:endParaRPr lang="en-US" sz="780" dirty="0"/>
           </a:p>
@@ -7169,7 +7232,7 @@
                 <a:ea typeface="Aptos Display" pitchFamily="34" charset="-122"/>
                 <a:cs typeface="Aptos Display" pitchFamily="34" charset="-120"/>
               </a:rPr>
-              <a:t>From a loop to a comprehension</a:t>
+              <a:t>A shorter form is not always better</a:t>
             </a:r>
             <a:endParaRPr lang="en-US" sz="2850" dirty="0"/>
           </a:p>
@@ -7177,92 +7240,14 @@
       </p:sp>
       <p:sp>
         <p:nvSpPr>
-          <p:cNvPr id="9" name="Text 7"/>
-          <p:cNvSpPr/>
-          <p:nvPr/>
-        </p:nvSpPr>
-        <p:spPr>
-          <a:xfrm>
-            <a:off x="749808" y="1920240"/>
-            <a:ext cx="4160520" cy="3886200"/>
-          </a:xfrm>
-          <a:prstGeom prst="rect">
-            <a:avLst/>
-          </a:prstGeom>
-          <a:noFill/>
-          <a:ln/>
-        </p:spPr>
-        <p:txBody>
-          <a:bodyPr wrap="square" lIns="508" tIns="508" rIns="508" bIns="508" rtlCol="0" anchor="t">
-            <a:normAutofit/>
-          </a:bodyPr>
-          <a:lstStyle/>
-          <a:p>
-            <a:pPr marL="228600" indent="-228600">
-              <a:buSzPct val="100000"/>
-              <a:buChar char="•"/>
-            </a:pPr>
-            <a:r>
-              <a:rPr lang="en-US" sz="1650" dirty="0">
-                <a:solidFill>
-                  <a:srgbClr val="18212B"/>
-                </a:solidFill>
-                <a:latin typeface="Aptos" pitchFamily="34" charset="0"/>
-                <a:ea typeface="Aptos" pitchFamily="34" charset="-122"/>
-                <a:cs typeface="Aptos" pitchFamily="34" charset="-120"/>
-              </a:rPr>
-              <a:t>input: all results</a:t>
-            </a:r>
-            <a:endParaRPr lang="en-US" sz="1650" dirty="0"/>
-          </a:p>
-          <a:p>
-            <a:pPr marL="228600" indent="-228600">
-              <a:buSzPct val="100000"/>
-              <a:buChar char="•"/>
-            </a:pPr>
-            <a:r>
-              <a:rPr lang="en-US" sz="1650" dirty="0">
-                <a:solidFill>
-                  <a:srgbClr val="18212B"/>
-                </a:solidFill>
-                <a:latin typeface="Aptos" pitchFamily="34" charset="0"/>
-                <a:ea typeface="Aptos" pitchFamily="34" charset="-122"/>
-                <a:cs typeface="Aptos" pitchFamily="34" charset="-120"/>
-              </a:rPr>
-              <a:t>selection: passing only</a:t>
-            </a:r>
-            <a:endParaRPr lang="en-US" sz="1650" dirty="0"/>
-          </a:p>
-          <a:p>
-            <a:pPr marL="228600" indent="-228600">
-              <a:buSzPct val="100000"/>
-              <a:buChar char="•"/>
-            </a:pPr>
-            <a:r>
-              <a:rPr lang="en-US" sz="1650" dirty="0">
-                <a:solidFill>
-                  <a:srgbClr val="18212B"/>
-                </a:solidFill>
-                <a:latin typeface="Aptos" pitchFamily="34" charset="0"/>
-                <a:ea typeface="Aptos" pitchFamily="34" charset="-122"/>
-                <a:cs typeface="Aptos" pitchFamily="34" charset="-120"/>
-              </a:rPr>
-              <a:t>transformation: square</a:t>
-            </a:r>
-            <a:endParaRPr lang="en-US" sz="1650" dirty="0"/>
-          </a:p>
-        </p:txBody>
-      </p:sp>
-      <p:sp>
-        <p:nvSpPr>
-          <p:cNvPr id="10" name="Shape 8"/>
-          <p:cNvSpPr/>
-          <p:nvPr/>
-        </p:nvSpPr>
-        <p:spPr>
-          <a:xfrm>
-            <a:off x="5413248" y="1792224"/>
-            <a:ext cx="5925312" cy="4160520"/>
+          <p:cNvPr id="9" name="Shape 7"/>
+          <p:cNvSpPr/>
+          <p:nvPr/>
+        </p:nvSpPr>
+        <p:spPr>
+          <a:xfrm>
+            <a:off x="658368" y="1755648"/>
+            <a:ext cx="10899648" cy="4096512"/>
           </a:xfrm>
           <a:prstGeom prst="rect">
             <a:avLst/>
@@ -7280,14 +7265,14 @@
       </p:sp>
       <p:sp>
         <p:nvSpPr>
-          <p:cNvPr id="11" name="Shape 9"/>
-          <p:cNvSpPr/>
-          <p:nvPr/>
-        </p:nvSpPr>
-        <p:spPr>
-          <a:xfrm>
-            <a:off x="5413248" y="1792224"/>
-            <a:ext cx="5925312" cy="329184"/>
+          <p:cNvPr id="10" name="Shape 8"/>
+          <p:cNvSpPr/>
+          <p:nvPr/>
+        </p:nvSpPr>
+        <p:spPr>
+          <a:xfrm>
+            <a:off x="658368" y="1755648"/>
+            <a:ext cx="10899648" cy="347472"/>
           </a:xfrm>
           <a:prstGeom prst="rect">
             <a:avLst/>
@@ -7305,14 +7290,14 @@
       </p:sp>
       <p:sp>
         <p:nvSpPr>
-          <p:cNvPr id="12" name="Text 10"/>
-          <p:cNvSpPr/>
-          <p:nvPr/>
-        </p:nvSpPr>
-        <p:spPr>
-          <a:xfrm>
-            <a:off x="5641848" y="1901952"/>
-            <a:ext cx="5394960" cy="146304"/>
+          <p:cNvPr id="11" name="Text 9"/>
+          <p:cNvSpPr/>
+          <p:nvPr/>
+        </p:nvSpPr>
+        <p:spPr>
+          <a:xfrm>
+            <a:off x="896112" y="1874520"/>
+            <a:ext cx="9966960" cy="146304"/>
           </a:xfrm>
           <a:prstGeom prst="rect">
             <a:avLst/>
@@ -7330,7 +7315,7 @@
               <a:buNone/>
             </a:pPr>
             <a:r>
-              <a:rPr lang="en-US" sz="810" b="1" spc="35" kern="0" dirty="0">
+              <a:rPr lang="en-US" sz="820" b="1" spc="35" kern="0" dirty="0">
                 <a:solidFill>
                   <a:srgbClr val="8FD3FF"/>
                 </a:solidFill>
@@ -7340,20 +7325,20 @@
               </a:rPr>
               <a:t>python</a:t>
             </a:r>
-            <a:endParaRPr lang="en-US" sz="810" dirty="0"/>
-          </a:p>
-        </p:txBody>
-      </p:sp>
-      <p:sp>
-        <p:nvSpPr>
-          <p:cNvPr id="13" name="Text 11"/>
-          <p:cNvSpPr/>
-          <p:nvPr/>
-        </p:nvSpPr>
-        <p:spPr>
-          <a:xfrm>
-            <a:off x="5641848" y="2331720"/>
-            <a:ext cx="5340096" cy="3182112"/>
+            <a:endParaRPr lang="en-US" sz="820" dirty="0"/>
+          </a:p>
+        </p:txBody>
+      </p:sp>
+      <p:sp>
+        <p:nvSpPr>
+          <p:cNvPr id="12" name="Text 10"/>
+          <p:cNvSpPr/>
+          <p:nvPr/>
+        </p:nvSpPr>
+        <p:spPr>
+          <a:xfrm>
+            <a:off x="896112" y="2304288"/>
+            <a:ext cx="9921240" cy="3127248"/>
           </a:xfrm>
           <a:prstGeom prst="rect">
             <a:avLst/>
@@ -7371,7 +7356,7 @@
               <a:buNone/>
             </a:pPr>
             <a:r>
-              <a:rPr lang="en-US" sz="1520" dirty="0">
+              <a:rPr lang="en-US" sz="1500" dirty="0">
                 <a:solidFill>
                   <a:srgbClr val="F4F7FA"/>
                 </a:solidFill>
@@ -7379,22 +7364,16 @@
                 <a:ea typeface="Consolas" pitchFamily="34" charset="-122"/>
                 <a:cs typeface="Consolas" pitchFamily="34" charset="-120"/>
               </a:rPr>
-              <a:t>scores = [72, 91, 45, 88]</a:t>
-            </a:r>
-            <a:endParaRPr lang="en-US" sz="1520" dirty="0"/>
-          </a:p>
-          <a:p>
-            <a:pPr algn="l" indent="0" marL="0">
-              <a:buNone/>
-            </a:pPr>
-            <a:endParaRPr lang="en-US" sz="1520" dirty="0"/>
-          </a:p>
-          <a:p>
-            <a:pPr algn="l" indent="0" marL="0">
-              <a:buNone/>
-            </a:pPr>
-            <a:r>
-              <a:rPr lang="en-US" sz="1520" dirty="0">
+              <a:t># Čitateľ musí naraz sledovať tri vnorené kroky.</a:t>
+            </a:r>
+            <a:endParaRPr lang="en-US" sz="1500" dirty="0"/>
+          </a:p>
+          <a:p>
+            <a:pPr algn="l" indent="0" marL="0">
+              <a:buNone/>
+            </a:pPr>
+            <a:r>
+              <a:rPr lang="en-US" sz="1500" dirty="0">
                 <a:solidFill>
                   <a:srgbClr val="F4F7FA"/>
                 </a:solidFill>
@@ -7402,16 +7381,16 @@
                 <a:ea typeface="Consolas" pitchFamily="34" charset="-122"/>
                 <a:cs typeface="Consolas" pitchFamily="34" charset="-120"/>
               </a:rPr>
-              <a:t>passed = []</a:t>
-            </a:r>
-            <a:endParaRPr lang="en-US" sz="1520" dirty="0"/>
-          </a:p>
-          <a:p>
-            <a:pPr algn="l" indent="0" marL="0">
-              <a:buNone/>
-            </a:pPr>
-            <a:r>
-              <a:rPr lang="en-US" sz="1520" dirty="0">
+              <a:t>report = {</a:t>
+            </a:r>
+            <a:endParaRPr lang="en-US" sz="1500" dirty="0"/>
+          </a:p>
+          <a:p>
+            <a:pPr algn="l" indent="0" marL="0">
+              <a:buNone/>
+            </a:pPr>
+            <a:r>
+              <a:rPr lang="en-US" sz="1500" dirty="0">
                 <a:solidFill>
                   <a:srgbClr val="F4F7FA"/>
                 </a:solidFill>
@@ -7419,16 +7398,16 @@
                 <a:ea typeface="Consolas" pitchFamily="34" charset="-122"/>
                 <a:cs typeface="Consolas" pitchFamily="34" charset="-120"/>
               </a:rPr>
-              <a:t>for score in scores:</a:t>
-            </a:r>
-            <a:endParaRPr lang="en-US" sz="1520" dirty="0"/>
-          </a:p>
-          <a:p>
-            <a:pPr algn="l" indent="0" marL="0">
-              <a:buNone/>
-            </a:pPr>
-            <a:r>
-              <a:rPr lang="en-US" sz="1520" dirty="0">
+              <a:t>    course: sorted({result.student for result in results</a:t>
+            </a:r>
+            <a:endParaRPr lang="en-US" sz="1500" dirty="0"/>
+          </a:p>
+          <a:p>
+            <a:pPr algn="l" indent="0" marL="0">
+              <a:buNone/>
+            </a:pPr>
+            <a:r>
+              <a:rPr lang="en-US" sz="1500" dirty="0">
                 <a:solidFill>
                   <a:srgbClr val="F4F7FA"/>
                 </a:solidFill>
@@ -7436,16 +7415,16 @@
                 <a:ea typeface="Consolas" pitchFamily="34" charset="-122"/>
                 <a:cs typeface="Consolas" pitchFamily="34" charset="-120"/>
               </a:rPr>
-              <a:t>    if score &gt;= 51:</a:t>
-            </a:r>
-            <a:endParaRPr lang="en-US" sz="1520" dirty="0"/>
-          </a:p>
-          <a:p>
-            <a:pPr algn="l" indent="0" marL="0">
-              <a:buNone/>
-            </a:pPr>
-            <a:r>
-              <a:rPr lang="en-US" sz="1520" dirty="0">
+              <a:t>                    if result.course == course and result.points &gt;= 51})</a:t>
+            </a:r>
+            <a:endParaRPr lang="en-US" sz="1500" dirty="0"/>
+          </a:p>
+          <a:p>
+            <a:pPr algn="l" indent="0" marL="0">
+              <a:buNone/>
+            </a:pPr>
+            <a:r>
+              <a:rPr lang="en-US" sz="1500" dirty="0">
                 <a:solidFill>
                   <a:srgbClr val="F4F7FA"/>
                 </a:solidFill>
@@ -7453,22 +7432,16 @@
                 <a:ea typeface="Consolas" pitchFamily="34" charset="-122"/>
                 <a:cs typeface="Consolas" pitchFamily="34" charset="-120"/>
               </a:rPr>
-              <a:t>        passed.append(score ** 2)</a:t>
-            </a:r>
-            <a:endParaRPr lang="en-US" sz="1520" dirty="0"/>
-          </a:p>
-          <a:p>
-            <a:pPr algn="l" indent="0" marL="0">
-              <a:buNone/>
-            </a:pPr>
-            <a:endParaRPr lang="en-US" sz="1520" dirty="0"/>
-          </a:p>
-          <a:p>
-            <a:pPr algn="l" indent="0" marL="0">
-              <a:buNone/>
-            </a:pPr>
-            <a:r>
-              <a:rPr lang="en-US" sz="1520" dirty="0">
+              <a:t>    for course in {result.course for result in results}</a:t>
+            </a:r>
+            <a:endParaRPr lang="en-US" sz="1500" dirty="0"/>
+          </a:p>
+          <a:p>
+            <a:pPr algn="l" indent="0" marL="0">
+              <a:buNone/>
+            </a:pPr>
+            <a:r>
+              <a:rPr lang="en-US" sz="1500" dirty="0">
                 <a:solidFill>
                   <a:srgbClr val="F4F7FA"/>
                 </a:solidFill>
@@ -7476,7 +7449,71 @@
                 <a:ea typeface="Consolas" pitchFamily="34" charset="-122"/>
                 <a:cs typeface="Consolas" pitchFamily="34" charset="-120"/>
               </a:rPr>
-              <a:t># [score ** 2 for score in scores if score &gt;= 51]</a:t>
+              <a:t>}</a:t>
+            </a:r>
+            <a:endParaRPr lang="en-US" sz="1500" dirty="0"/>
+          </a:p>
+          <a:p>
+            <a:pPr algn="l" indent="0" marL="0">
+              <a:buNone/>
+            </a:pPr>
+            <a:endParaRPr lang="en-US" sz="1500" dirty="0"/>
+          </a:p>
+          <a:p>
+            <a:pPr algn="l" indent="0" marL="0">
+              <a:buNone/>
+            </a:pPr>
+            <a:r>
+              <a:rPr lang="en-US" sz="1500" dirty="0">
+                <a:solidFill>
+                  <a:srgbClr val="F4F7FA"/>
+                </a:solidFill>
+                <a:latin typeface="Consolas" pitchFamily="34" charset="0"/>
+                <a:ea typeface="Consolas" pitchFamily="34" charset="-122"/>
+                <a:cs typeface="Consolas" pitchFamily="34" charset="-120"/>
+              </a:rPr>
+              <a:t># Pri zložitejšom pravidle radšej použite pomenované medzivýsledky a cyklus.</a:t>
+            </a:r>
+            <a:endParaRPr lang="en-US" sz="1500" dirty="0"/>
+          </a:p>
+        </p:txBody>
+      </p:sp>
+      <p:sp>
+        <p:nvSpPr>
+          <p:cNvPr id="13" name="Text 11"/>
+          <p:cNvSpPr/>
+          <p:nvPr/>
+        </p:nvSpPr>
+        <p:spPr>
+          <a:xfrm>
+            <a:off x="768096" y="6053328"/>
+            <a:ext cx="9921240" cy="256032"/>
+          </a:xfrm>
+          <a:prstGeom prst="rect">
+            <a:avLst/>
+          </a:prstGeom>
+          <a:noFill/>
+          <a:ln/>
+        </p:spPr>
+        <p:txBody>
+          <a:bodyPr wrap="square" lIns="0" tIns="0" rIns="0" bIns="0" rtlCol="0" anchor="t">
+            <a:normAutofit/>
+          </a:bodyPr>
+          <a:lstStyle/>
+          <a:p>
+            <a:pPr algn="l" indent="0" marL="0">
+              <a:buNone/>
+            </a:pPr>
+            <a:r>
+              <a:rPr lang="en-US" sz="1520" dirty="0">
+                <a:solidFill>
+                  <a:srgbClr val="5E6B78"/>
+                </a:solidFill>
+                <a:latin typeface="Aptos" pitchFamily="34" charset="0"/>
+                <a:ea typeface="Aptos" pitchFamily="34" charset="-122"/>
+                <a:cs typeface="Aptos" pitchFamily="34" charset="-120"/>
+              </a:rPr>
+              <a:t>A comprehension is not a measure of Python code quality. Readability takes priority over compactness.</a:t>
             </a:r>
             <a:endParaRPr lang="en-US" sz="1520" dirty="0"/>
           </a:p>
@@ -7702,7 +7739,7 @@
                 <a:ea typeface="Consolas" pitchFamily="34" charset="-122"/>
                 <a:cs typeface="Consolas" pitchFamily="34" charset="-120"/>
               </a:rPr>
-              <a:t>16 / 27</a:t>
+              <a:t>16 / 26</a:t>
             </a:r>
             <a:endParaRPr lang="en-US" sz="780" dirty="0"/>
           </a:p>
@@ -7743,7 +7780,7 @@
                 <a:ea typeface="Aptos Display" pitchFamily="34" charset="-122"/>
                 <a:cs typeface="Aptos Display" pitchFamily="34" charset="-120"/>
               </a:rPr>
-              <a:t>A shorter form is not always better</a:t>
+              <a:t>A function is a contract</a:t>
             </a:r>
             <a:endParaRPr lang="en-US" sz="2850" dirty="0"/>
           </a:p>
@@ -7751,24 +7788,65 @@
       </p:sp>
       <p:sp>
         <p:nvSpPr>
-          <p:cNvPr id="9" name="Shape 7"/>
-          <p:cNvSpPr/>
-          <p:nvPr/>
-        </p:nvSpPr>
-        <p:spPr>
-          <a:xfrm>
-            <a:off x="658368" y="1755648"/>
-            <a:ext cx="10899648" cy="4096512"/>
+          <p:cNvPr id="9" name="Text 7"/>
+          <p:cNvSpPr/>
+          <p:nvPr/>
+        </p:nvSpPr>
+        <p:spPr>
+          <a:xfrm>
+            <a:off x="694944" y="1700784"/>
+            <a:ext cx="9784080" cy="420624"/>
+          </a:xfrm>
+          <a:prstGeom prst="rect">
+            <a:avLst/>
+          </a:prstGeom>
+          <a:noFill/>
+          <a:ln/>
+        </p:spPr>
+        <p:txBody>
+          <a:bodyPr wrap="square" lIns="0" tIns="0" rIns="0" bIns="0" rtlCol="0" anchor="t">
+            <a:normAutofit/>
+          </a:bodyPr>
+          <a:lstStyle/>
+          <a:p>
+            <a:pPr algn="l" indent="0" marL="0">
+              <a:buNone/>
+            </a:pPr>
+            <a:r>
+              <a:rPr lang="en-US" sz="1850" dirty="0">
+                <a:solidFill>
+                  <a:srgbClr val="5E6B78"/>
+                </a:solidFill>
+                <a:latin typeface="Aptos" pitchFamily="34" charset="0"/>
+                <a:ea typeface="Aptos" pitchFamily="34" charset="-122"/>
+                <a:cs typeface="Aptos" pitchFamily="34" charset="-120"/>
+              </a:rPr>
+              <a:t>A good signature shows what data a function accepts, what it returns and when it can fail.</a:t>
+            </a:r>
+            <a:endParaRPr lang="en-US" sz="1850" dirty="0"/>
+          </a:p>
+        </p:txBody>
+      </p:sp>
+      <p:sp>
+        <p:nvSpPr>
+          <p:cNvPr id="10" name="Shape 8"/>
+          <p:cNvSpPr/>
+          <p:nvPr/>
+        </p:nvSpPr>
+        <p:spPr>
+          <a:xfrm>
+            <a:off x="731520" y="3017520"/>
+            <a:ext cx="1920240" cy="786384"/>
           </a:xfrm>
           <a:prstGeom prst="rect">
             <a:avLst/>
           </a:prstGeom>
           <a:solidFill>
-            <a:srgbClr val="17212B"/>
+            <a:srgbClr val="F3F6F8"/>
           </a:solidFill>
           <a:ln w="12700">
             <a:solidFill>
-              <a:srgbClr val="243242"/>
+              <a:srgbClr val="D8E0E6"/>
             </a:solidFill>
             <a:prstDash val="solid"/>
           </a:ln>
@@ -7776,24 +7854,82 @@
       </p:sp>
       <p:sp>
         <p:nvSpPr>
-          <p:cNvPr id="10" name="Shape 8"/>
-          <p:cNvSpPr/>
-          <p:nvPr/>
-        </p:nvSpPr>
-        <p:spPr>
-          <a:xfrm>
-            <a:off x="658368" y="1755648"/>
-            <a:ext cx="10899648" cy="347472"/>
-          </a:xfrm>
-          <a:prstGeom prst="rect">
+          <p:cNvPr id="11" name="Text 9"/>
+          <p:cNvSpPr/>
+          <p:nvPr/>
+        </p:nvSpPr>
+        <p:spPr>
+          <a:xfrm>
+            <a:off x="841248" y="3182112"/>
+            <a:ext cx="1700784" cy="384048"/>
+          </a:xfrm>
+          <a:prstGeom prst="rect">
+            <a:avLst/>
+          </a:prstGeom>
+          <a:noFill/>
+          <a:ln/>
+        </p:spPr>
+        <p:txBody>
+          <a:bodyPr wrap="square" lIns="0" tIns="0" rIns="0" bIns="0" rtlCol="0" anchor="ctr">
+            <a:normAutofit/>
+          </a:bodyPr>
+          <a:lstStyle/>
+          <a:p>
+            <a:pPr algn="ctr" indent="0" marL="0">
+              <a:buNone/>
+            </a:pPr>
+            <a:r>
+              <a:rPr lang="en-US" sz="1550" b="1" dirty="0">
+                <a:solidFill>
+                  <a:srgbClr val="16324F"/>
+                </a:solidFill>
+                <a:latin typeface="Aptos" pitchFamily="34" charset="0"/>
+                <a:ea typeface="Aptos" pitchFamily="34" charset="-122"/>
+                <a:cs typeface="Aptos" pitchFamily="34" charset="-120"/>
+              </a:rPr>
+              <a:t>input</a:t>
+            </a:r>
+            <a:endParaRPr lang="en-US" sz="1550" dirty="0"/>
+          </a:p>
+          <a:p>
+            <a:pPr algn="ctr" indent="0" marL="0">
+              <a:buNone/>
+            </a:pPr>
+            <a:r>
+              <a:rPr lang="en-US" sz="1550" b="1" dirty="0">
+                <a:solidFill>
+                  <a:srgbClr val="16324F"/>
+                </a:solidFill>
+                <a:latin typeface="Aptos" pitchFamily="34" charset="0"/>
+                <a:ea typeface="Aptos" pitchFamily="34" charset="-122"/>
+                <a:cs typeface="Aptos" pitchFamily="34" charset="-120"/>
+              </a:rPr>
+              <a:t>parameters</a:t>
+            </a:r>
+            <a:endParaRPr lang="en-US" sz="1550" dirty="0"/>
+          </a:p>
+        </p:txBody>
+      </p:sp>
+      <p:sp>
+        <p:nvSpPr>
+          <p:cNvPr id="12" name="Shape 10"/>
+          <p:cNvSpPr/>
+          <p:nvPr/>
+        </p:nvSpPr>
+        <p:spPr>
+          <a:xfrm>
+            <a:off x="2926080" y="3273552"/>
+            <a:ext cx="182880" cy="256032"/>
+          </a:xfrm>
+          <a:prstGeom prst="chevron">
             <a:avLst/>
           </a:prstGeom>
           <a:solidFill>
-            <a:srgbClr val="223044"/>
+            <a:srgbClr val="1877B9"/>
           </a:solidFill>
           <a:ln w="12700">
             <a:solidFill>
-              <a:srgbClr val="223044"/>
+              <a:srgbClr val="1877B9"/>
             </a:solidFill>
             <a:prstDash val="solid"/>
           </a:ln>
@@ -7801,14 +7937,39 @@
       </p:sp>
       <p:sp>
         <p:nvSpPr>
-          <p:cNvPr id="11" name="Text 9"/>
-          <p:cNvSpPr/>
-          <p:nvPr/>
-        </p:nvSpPr>
-        <p:spPr>
-          <a:xfrm>
-            <a:off x="896112" y="1874520"/>
-            <a:ext cx="9966960" cy="146304"/>
+          <p:cNvPr id="13" name="Shape 11"/>
+          <p:cNvSpPr/>
+          <p:nvPr/>
+        </p:nvSpPr>
+        <p:spPr>
+          <a:xfrm>
+            <a:off x="3246120" y="3017520"/>
+            <a:ext cx="1920240" cy="786384"/>
+          </a:xfrm>
+          <a:prstGeom prst="rect">
+            <a:avLst/>
+          </a:prstGeom>
+          <a:solidFill>
+            <a:srgbClr val="F3F6F8"/>
+          </a:solidFill>
+          <a:ln w="12700">
+            <a:solidFill>
+              <a:srgbClr val="D8E0E6"/>
+            </a:solidFill>
+            <a:prstDash val="solid"/>
+          </a:ln>
+        </p:spPr>
+      </p:sp>
+      <p:sp>
+        <p:nvSpPr>
+          <p:cNvPr id="14" name="Text 12"/>
+          <p:cNvSpPr/>
+          <p:nvPr/>
+        </p:nvSpPr>
+        <p:spPr>
+          <a:xfrm>
+            <a:off x="3355848" y="3182112"/>
+            <a:ext cx="1700784" cy="384048"/>
           </a:xfrm>
           <a:prstGeom prst="rect">
             <a:avLst/>
@@ -7822,213 +7983,296 @@
           </a:bodyPr>
           <a:lstStyle/>
           <a:p>
-            <a:pPr algn="l" indent="0" marL="0">
-              <a:buNone/>
-            </a:pPr>
-            <a:r>
-              <a:rPr lang="en-US" sz="820" b="1" spc="35" kern="0" dirty="0">
-                <a:solidFill>
-                  <a:srgbClr val="8FD3FF"/>
-                </a:solidFill>
-                <a:latin typeface="Consolas" pitchFamily="34" charset="0"/>
-                <a:ea typeface="Consolas" pitchFamily="34" charset="-122"/>
-                <a:cs typeface="Consolas" pitchFamily="34" charset="-120"/>
-              </a:rPr>
-              <a:t>python</a:t>
-            </a:r>
-            <a:endParaRPr lang="en-US" sz="820" dirty="0"/>
-          </a:p>
-        </p:txBody>
-      </p:sp>
-      <p:sp>
-        <p:nvSpPr>
-          <p:cNvPr id="12" name="Text 10"/>
-          <p:cNvSpPr/>
-          <p:nvPr/>
-        </p:nvSpPr>
-        <p:spPr>
-          <a:xfrm>
-            <a:off x="896112" y="2304288"/>
-            <a:ext cx="9921240" cy="3127248"/>
-          </a:xfrm>
-          <a:prstGeom prst="rect">
-            <a:avLst/>
-          </a:prstGeom>
-          <a:noFill/>
-          <a:ln/>
-        </p:spPr>
-        <p:txBody>
-          <a:bodyPr wrap="square" lIns="0" tIns="0" rIns="0" bIns="0" rtlCol="0" anchor="t">
-            <a:normAutofit/>
-          </a:bodyPr>
-          <a:lstStyle/>
-          <a:p>
-            <a:pPr algn="l" indent="0" marL="0">
-              <a:buNone/>
-            </a:pPr>
-            <a:r>
-              <a:rPr lang="en-US" sz="1500" dirty="0">
-                <a:solidFill>
-                  <a:srgbClr val="F4F7FA"/>
-                </a:solidFill>
-                <a:latin typeface="Consolas" pitchFamily="34" charset="0"/>
-                <a:ea typeface="Consolas" pitchFamily="34" charset="-122"/>
-                <a:cs typeface="Consolas" pitchFamily="34" charset="-120"/>
-              </a:rPr>
-              <a:t># Čitateľ musí naraz sledovať tri vnorené kroky.</a:t>
-            </a:r>
-            <a:endParaRPr lang="en-US" sz="1500" dirty="0"/>
-          </a:p>
-          <a:p>
-            <a:pPr algn="l" indent="0" marL="0">
-              <a:buNone/>
-            </a:pPr>
-            <a:r>
-              <a:rPr lang="en-US" sz="1500" dirty="0">
-                <a:solidFill>
-                  <a:srgbClr val="F4F7FA"/>
-                </a:solidFill>
-                <a:latin typeface="Consolas" pitchFamily="34" charset="0"/>
-                <a:ea typeface="Consolas" pitchFamily="34" charset="-122"/>
-                <a:cs typeface="Consolas" pitchFamily="34" charset="-120"/>
-              </a:rPr>
-              <a:t>report = {</a:t>
-            </a:r>
-            <a:endParaRPr lang="en-US" sz="1500" dirty="0"/>
-          </a:p>
-          <a:p>
-            <a:pPr algn="l" indent="0" marL="0">
-              <a:buNone/>
-            </a:pPr>
-            <a:r>
-              <a:rPr lang="en-US" sz="1500" dirty="0">
-                <a:solidFill>
-                  <a:srgbClr val="F4F7FA"/>
-                </a:solidFill>
-                <a:latin typeface="Consolas" pitchFamily="34" charset="0"/>
-                <a:ea typeface="Consolas" pitchFamily="34" charset="-122"/>
-                <a:cs typeface="Consolas" pitchFamily="34" charset="-120"/>
-              </a:rPr>
-              <a:t>    course: sorted({result.student for result in results</a:t>
-            </a:r>
-            <a:endParaRPr lang="en-US" sz="1500" dirty="0"/>
-          </a:p>
-          <a:p>
-            <a:pPr algn="l" indent="0" marL="0">
-              <a:buNone/>
-            </a:pPr>
-            <a:r>
-              <a:rPr lang="en-US" sz="1500" dirty="0">
-                <a:solidFill>
-                  <a:srgbClr val="F4F7FA"/>
-                </a:solidFill>
-                <a:latin typeface="Consolas" pitchFamily="34" charset="0"/>
-                <a:ea typeface="Consolas" pitchFamily="34" charset="-122"/>
-                <a:cs typeface="Consolas" pitchFamily="34" charset="-120"/>
-              </a:rPr>
-              <a:t>                    if result.course == course and result.points &gt;= 51})</a:t>
-            </a:r>
-            <a:endParaRPr lang="en-US" sz="1500" dirty="0"/>
-          </a:p>
-          <a:p>
-            <a:pPr algn="l" indent="0" marL="0">
-              <a:buNone/>
-            </a:pPr>
-            <a:r>
-              <a:rPr lang="en-US" sz="1500" dirty="0">
-                <a:solidFill>
-                  <a:srgbClr val="F4F7FA"/>
-                </a:solidFill>
-                <a:latin typeface="Consolas" pitchFamily="34" charset="0"/>
-                <a:ea typeface="Consolas" pitchFamily="34" charset="-122"/>
-                <a:cs typeface="Consolas" pitchFamily="34" charset="-120"/>
-              </a:rPr>
-              <a:t>    for course in {result.course for result in results}</a:t>
-            </a:r>
-            <a:endParaRPr lang="en-US" sz="1500" dirty="0"/>
-          </a:p>
-          <a:p>
-            <a:pPr algn="l" indent="0" marL="0">
-              <a:buNone/>
-            </a:pPr>
-            <a:r>
-              <a:rPr lang="en-US" sz="1500" dirty="0">
-                <a:solidFill>
-                  <a:srgbClr val="F4F7FA"/>
-                </a:solidFill>
-                <a:latin typeface="Consolas" pitchFamily="34" charset="0"/>
-                <a:ea typeface="Consolas" pitchFamily="34" charset="-122"/>
-                <a:cs typeface="Consolas" pitchFamily="34" charset="-120"/>
-              </a:rPr>
-              <a:t>}</a:t>
-            </a:r>
-            <a:endParaRPr lang="en-US" sz="1500" dirty="0"/>
-          </a:p>
-          <a:p>
-            <a:pPr algn="l" indent="0" marL="0">
-              <a:buNone/>
-            </a:pPr>
-            <a:endParaRPr lang="en-US" sz="1500" dirty="0"/>
-          </a:p>
-          <a:p>
-            <a:pPr algn="l" indent="0" marL="0">
-              <a:buNone/>
-            </a:pPr>
-            <a:r>
-              <a:rPr lang="en-US" sz="1500" dirty="0">
-                <a:solidFill>
-                  <a:srgbClr val="F4F7FA"/>
-                </a:solidFill>
-                <a:latin typeface="Consolas" pitchFamily="34" charset="0"/>
-                <a:ea typeface="Consolas" pitchFamily="34" charset="-122"/>
-                <a:cs typeface="Consolas" pitchFamily="34" charset="-120"/>
-              </a:rPr>
-              <a:t># Pri zložitejšom pravidle radšej použite pomenované medzivýsledky a cyklus.</a:t>
-            </a:r>
-            <a:endParaRPr lang="en-US" sz="1500" dirty="0"/>
-          </a:p>
-        </p:txBody>
-      </p:sp>
-      <p:sp>
-        <p:nvSpPr>
-          <p:cNvPr id="13" name="Text 11"/>
-          <p:cNvSpPr/>
-          <p:nvPr/>
-        </p:nvSpPr>
-        <p:spPr>
-          <a:xfrm>
-            <a:off x="768096" y="6053328"/>
-            <a:ext cx="9921240" cy="256032"/>
-          </a:xfrm>
-          <a:prstGeom prst="rect">
-            <a:avLst/>
-          </a:prstGeom>
-          <a:noFill/>
-          <a:ln/>
-        </p:spPr>
-        <p:txBody>
-          <a:bodyPr wrap="square" lIns="0" tIns="0" rIns="0" bIns="0" rtlCol="0" anchor="t">
-            <a:normAutofit/>
-          </a:bodyPr>
-          <a:lstStyle/>
-          <a:p>
-            <a:pPr algn="l" indent="0" marL="0">
-              <a:buNone/>
-            </a:pPr>
-            <a:r>
-              <a:rPr lang="en-US" sz="1520" dirty="0">
-                <a:solidFill>
-                  <a:srgbClr val="5E6B78"/>
+            <a:pPr algn="ctr" indent="0" marL="0">
+              <a:buNone/>
+            </a:pPr>
+            <a:r>
+              <a:rPr lang="en-US" sz="1550" b="1" dirty="0">
+                <a:solidFill>
+                  <a:srgbClr val="16324F"/>
                 </a:solidFill>
                 <a:latin typeface="Aptos" pitchFamily="34" charset="0"/>
                 <a:ea typeface="Aptos" pitchFamily="34" charset="-122"/>
                 <a:cs typeface="Aptos" pitchFamily="34" charset="-120"/>
               </a:rPr>
-              <a:t>A comprehension is not a measure of Python code quality. Readability takes priority over compactness.</a:t>
-            </a:r>
-            <a:endParaRPr lang="en-US" sz="1520" dirty="0"/>
-          </a:p>
-        </p:txBody>
+              <a:t>validation</a:t>
+            </a:r>
+            <a:endParaRPr lang="en-US" sz="1550" dirty="0"/>
+          </a:p>
+        </p:txBody>
+      </p:sp>
+      <p:sp>
+        <p:nvSpPr>
+          <p:cNvPr id="15" name="Shape 13"/>
+          <p:cNvSpPr/>
+          <p:nvPr/>
+        </p:nvSpPr>
+        <p:spPr>
+          <a:xfrm>
+            <a:off x="5440680" y="3273552"/>
+            <a:ext cx="182880" cy="256032"/>
+          </a:xfrm>
+          <a:prstGeom prst="chevron">
+            <a:avLst/>
+          </a:prstGeom>
+          <a:solidFill>
+            <a:srgbClr val="1877B9"/>
+          </a:solidFill>
+          <a:ln w="12700">
+            <a:solidFill>
+              <a:srgbClr val="1877B9"/>
+            </a:solidFill>
+            <a:prstDash val="solid"/>
+          </a:ln>
+        </p:spPr>
+      </p:sp>
+      <p:sp>
+        <p:nvSpPr>
+          <p:cNvPr id="16" name="Shape 14"/>
+          <p:cNvSpPr/>
+          <p:nvPr/>
+        </p:nvSpPr>
+        <p:spPr>
+          <a:xfrm>
+            <a:off x="5760720" y="3017520"/>
+            <a:ext cx="1920240" cy="786384"/>
+          </a:xfrm>
+          <a:prstGeom prst="rect">
+            <a:avLst/>
+          </a:prstGeom>
+          <a:solidFill>
+            <a:srgbClr val="F3F6F8"/>
+          </a:solidFill>
+          <a:ln w="12700">
+            <a:solidFill>
+              <a:srgbClr val="D8E0E6"/>
+            </a:solidFill>
+            <a:prstDash val="solid"/>
+          </a:ln>
+        </p:spPr>
+      </p:sp>
+      <p:sp>
+        <p:nvSpPr>
+          <p:cNvPr id="17" name="Text 15"/>
+          <p:cNvSpPr/>
+          <p:nvPr/>
+        </p:nvSpPr>
+        <p:spPr>
+          <a:xfrm>
+            <a:off x="5870448" y="3182112"/>
+            <a:ext cx="1700784" cy="384048"/>
+          </a:xfrm>
+          <a:prstGeom prst="rect">
+            <a:avLst/>
+          </a:prstGeom>
+          <a:noFill/>
+          <a:ln/>
+        </p:spPr>
+        <p:txBody>
+          <a:bodyPr wrap="square" lIns="0" tIns="0" rIns="0" bIns="0" rtlCol="0" anchor="ctr">
+            <a:normAutofit/>
+          </a:bodyPr>
+          <a:lstStyle/>
+          <a:p>
+            <a:pPr algn="ctr" indent="0" marL="0">
+              <a:buNone/>
+            </a:pPr>
+            <a:r>
+              <a:rPr lang="en-US" sz="1550" b="1" dirty="0">
+                <a:solidFill>
+                  <a:srgbClr val="16324F"/>
+                </a:solidFill>
+                <a:latin typeface="Aptos" pitchFamily="34" charset="0"/>
+                <a:ea typeface="Aptos" pitchFamily="34" charset="-122"/>
+                <a:cs typeface="Aptos" pitchFamily="34" charset="-120"/>
+              </a:rPr>
+              <a:t>processing</a:t>
+            </a:r>
+            <a:endParaRPr lang="en-US" sz="1550" dirty="0"/>
+          </a:p>
+        </p:txBody>
+      </p:sp>
+      <p:sp>
+        <p:nvSpPr>
+          <p:cNvPr id="18" name="Shape 16"/>
+          <p:cNvSpPr/>
+          <p:nvPr/>
+        </p:nvSpPr>
+        <p:spPr>
+          <a:xfrm>
+            <a:off x="8366760" y="2395728"/>
+            <a:ext cx="2423160" cy="786384"/>
+          </a:xfrm>
+          <a:prstGeom prst="rect">
+            <a:avLst/>
+          </a:prstGeom>
+          <a:solidFill>
+            <a:srgbClr val="EAF3F7"/>
+          </a:solidFill>
+          <a:ln w="12700">
+            <a:solidFill>
+              <a:srgbClr val="9DCCDD"/>
+            </a:solidFill>
+            <a:prstDash val="solid"/>
+          </a:ln>
+        </p:spPr>
+      </p:sp>
+      <p:sp>
+        <p:nvSpPr>
+          <p:cNvPr id="19" name="Text 17"/>
+          <p:cNvSpPr/>
+          <p:nvPr/>
+        </p:nvSpPr>
+        <p:spPr>
+          <a:xfrm>
+            <a:off x="8476488" y="2560320"/>
+            <a:ext cx="2203704" cy="384048"/>
+          </a:xfrm>
+          <a:prstGeom prst="rect">
+            <a:avLst/>
+          </a:prstGeom>
+          <a:noFill/>
+          <a:ln/>
+        </p:spPr>
+        <p:txBody>
+          <a:bodyPr wrap="square" lIns="0" tIns="0" rIns="0" bIns="0" rtlCol="0" anchor="ctr">
+            <a:normAutofit/>
+          </a:bodyPr>
+          <a:lstStyle/>
+          <a:p>
+            <a:pPr algn="ctr" indent="0" marL="0">
+              <a:buNone/>
+            </a:pPr>
+            <a:r>
+              <a:rPr lang="en-US" sz="1550" b="1" dirty="0">
+                <a:solidFill>
+                  <a:srgbClr val="16324F"/>
+                </a:solidFill>
+                <a:latin typeface="Aptos" pitchFamily="34" charset="0"/>
+                <a:ea typeface="Aptos" pitchFamily="34" charset="-122"/>
+                <a:cs typeface="Aptos" pitchFamily="34" charset="-120"/>
+              </a:rPr>
+              <a:t>return value</a:t>
+            </a:r>
+            <a:endParaRPr lang="en-US" sz="1550" dirty="0"/>
+          </a:p>
+        </p:txBody>
+      </p:sp>
+      <p:sp>
+        <p:nvSpPr>
+          <p:cNvPr id="20" name="Shape 18"/>
+          <p:cNvSpPr/>
+          <p:nvPr/>
+        </p:nvSpPr>
+        <p:spPr>
+          <a:xfrm>
+            <a:off x="8366760" y="3877056"/>
+            <a:ext cx="2423160" cy="786384"/>
+          </a:xfrm>
+          <a:prstGeom prst="rect">
+            <a:avLst/>
+          </a:prstGeom>
+          <a:solidFill>
+            <a:srgbClr val="EAF3F7"/>
+          </a:solidFill>
+          <a:ln w="12700">
+            <a:solidFill>
+              <a:srgbClr val="9DCCDD"/>
+            </a:solidFill>
+            <a:prstDash val="solid"/>
+          </a:ln>
+        </p:spPr>
+      </p:sp>
+      <p:sp>
+        <p:nvSpPr>
+          <p:cNvPr id="21" name="Text 19"/>
+          <p:cNvSpPr/>
+          <p:nvPr/>
+        </p:nvSpPr>
+        <p:spPr>
+          <a:xfrm>
+            <a:off x="8476488" y="4041648"/>
+            <a:ext cx="2203704" cy="384048"/>
+          </a:xfrm>
+          <a:prstGeom prst="rect">
+            <a:avLst/>
+          </a:prstGeom>
+          <a:noFill/>
+          <a:ln/>
+        </p:spPr>
+        <p:txBody>
+          <a:bodyPr wrap="square" lIns="0" tIns="0" rIns="0" bIns="0" rtlCol="0" anchor="ctr">
+            <a:normAutofit/>
+          </a:bodyPr>
+          <a:lstStyle/>
+          <a:p>
+            <a:pPr algn="ctr" indent="0" marL="0">
+              <a:buNone/>
+            </a:pPr>
+            <a:r>
+              <a:rPr lang="en-US" sz="1550" b="1" dirty="0">
+                <a:solidFill>
+                  <a:srgbClr val="16324F"/>
+                </a:solidFill>
+                <a:latin typeface="Aptos" pitchFamily="34" charset="0"/>
+                <a:ea typeface="Aptos" pitchFamily="34" charset="-122"/>
+                <a:cs typeface="Aptos" pitchFamily="34" charset="-120"/>
+              </a:rPr>
+              <a:t>specific exception</a:t>
+            </a:r>
+            <a:endParaRPr lang="en-US" sz="1550" dirty="0"/>
+          </a:p>
+        </p:txBody>
+      </p:sp>
+      <p:sp>
+        <p:nvSpPr>
+          <p:cNvPr id="22" name="Shape 20"/>
+          <p:cNvSpPr/>
+          <p:nvPr/>
+        </p:nvSpPr>
+        <p:spPr>
+          <a:xfrm>
+            <a:off x="7936992" y="2670048"/>
+            <a:ext cx="201168" cy="228600"/>
+          </a:xfrm>
+          <a:prstGeom prst="chevron">
+            <a:avLst/>
+          </a:prstGeom>
+          <a:solidFill>
+            <a:srgbClr val="1877B9"/>
+          </a:solidFill>
+          <a:ln w="12700">
+            <a:solidFill>
+              <a:srgbClr val="1877B9"/>
+            </a:solidFill>
+            <a:prstDash val="solid"/>
+          </a:ln>
+        </p:spPr>
+      </p:sp>
+      <p:sp>
+        <p:nvSpPr>
+          <p:cNvPr id="23" name="Shape 21"/>
+          <p:cNvSpPr/>
+          <p:nvPr/>
+        </p:nvSpPr>
+        <p:spPr>
+          <a:xfrm>
+            <a:off x="7936992" y="4151376"/>
+            <a:ext cx="201168" cy="228600"/>
+          </a:xfrm>
+          <a:prstGeom prst="chevron">
+            <a:avLst/>
+          </a:prstGeom>
+          <a:solidFill>
+            <a:srgbClr val="1877B9"/>
+          </a:solidFill>
+          <a:ln w="12700">
+            <a:solidFill>
+              <a:srgbClr val="1877B9"/>
+            </a:solidFill>
+            <a:prstDash val="solid"/>
+          </a:ln>
+        </p:spPr>
       </p:sp>
     </p:spTree>
   </p:cSld>
@@ -8250,7 +8494,7 @@
                 <a:ea typeface="Consolas" pitchFamily="34" charset="-122"/>
                 <a:cs typeface="Consolas" pitchFamily="34" charset="-120"/>
               </a:rPr>
-              <a:t>17 / 27</a:t>
+              <a:t>17 / 26</a:t>
             </a:r>
             <a:endParaRPr lang="en-US" sz="780" dirty="0"/>
           </a:p>
@@ -8291,7 +8535,7 @@
                 <a:ea typeface="Aptos Display" pitchFamily="34" charset="-122"/>
                 <a:cs typeface="Aptos Display" pitchFamily="34" charset="-120"/>
               </a:rPr>
-              <a:t>A function is a contract</a:t>
+              <a:t>Type hints complement the contract</a:t>
             </a:r>
             <a:endParaRPr lang="en-US" sz="2850" dirty="0"/>
           </a:p>
@@ -8299,65 +8543,24 @@
       </p:sp>
       <p:sp>
         <p:nvSpPr>
-          <p:cNvPr id="9" name="Text 7"/>
-          <p:cNvSpPr/>
-          <p:nvPr/>
-        </p:nvSpPr>
-        <p:spPr>
-          <a:xfrm>
-            <a:off x="694944" y="1691640"/>
-            <a:ext cx="9509760" cy="411480"/>
-          </a:xfrm>
-          <a:prstGeom prst="rect">
-            <a:avLst/>
-          </a:prstGeom>
-          <a:noFill/>
-          <a:ln/>
-        </p:spPr>
-        <p:txBody>
-          <a:bodyPr wrap="square" lIns="0" tIns="0" rIns="0" bIns="0" rtlCol="0" anchor="t">
-            <a:normAutofit/>
-          </a:bodyPr>
-          <a:lstStyle/>
-          <a:p>
-            <a:pPr algn="l" indent="0" marL="0">
-              <a:buNone/>
-            </a:pPr>
-            <a:r>
-              <a:rPr lang="en-US" sz="1800" dirty="0">
-                <a:solidFill>
-                  <a:srgbClr val="5E6B78"/>
-                </a:solidFill>
-                <a:latin typeface="Aptos" pitchFamily="34" charset="0"/>
-                <a:ea typeface="Aptos" pitchFamily="34" charset="-122"/>
-                <a:cs typeface="Aptos" pitchFamily="34" charset="-120"/>
-              </a:rPr>
-              <a:t>A good signature shows what data a function accepts, what it returns and when it can fail.</a:t>
-            </a:r>
-            <a:endParaRPr lang="en-US" sz="1800" dirty="0"/>
-          </a:p>
-        </p:txBody>
-      </p:sp>
-      <p:sp>
-        <p:nvSpPr>
-          <p:cNvPr id="10" name="Shape 8"/>
-          <p:cNvSpPr/>
-          <p:nvPr/>
-        </p:nvSpPr>
-        <p:spPr>
-          <a:xfrm>
-            <a:off x="694944" y="2834640"/>
-            <a:ext cx="2400300" cy="1042416"/>
+          <p:cNvPr id="9" name="Shape 7"/>
+          <p:cNvSpPr/>
+          <p:nvPr/>
+        </p:nvSpPr>
+        <p:spPr>
+          <a:xfrm>
+            <a:off x="658368" y="1828800"/>
+            <a:ext cx="6903720" cy="4069080"/>
           </a:xfrm>
           <a:prstGeom prst="rect">
             <a:avLst/>
           </a:prstGeom>
           <a:solidFill>
-            <a:srgbClr val="F3F6F8"/>
+            <a:srgbClr val="17212B"/>
           </a:solidFill>
           <a:ln w="12700">
             <a:solidFill>
-              <a:srgbClr val="D8E0E6"/>
+              <a:srgbClr val="243242"/>
             </a:solidFill>
             <a:prstDash val="solid"/>
           </a:ln>
@@ -8365,14 +8568,39 @@
       </p:sp>
       <p:sp>
         <p:nvSpPr>
+          <p:cNvPr id="10" name="Shape 8"/>
+          <p:cNvSpPr/>
+          <p:nvPr/>
+        </p:nvSpPr>
+        <p:spPr>
+          <a:xfrm>
+            <a:off x="658368" y="1828800"/>
+            <a:ext cx="6903720" cy="347472"/>
+          </a:xfrm>
+          <a:prstGeom prst="rect">
+            <a:avLst/>
+          </a:prstGeom>
+          <a:solidFill>
+            <a:srgbClr val="223044"/>
+          </a:solidFill>
+          <a:ln w="12700">
+            <a:solidFill>
+              <a:srgbClr val="223044"/>
+            </a:solidFill>
+            <a:prstDash val="solid"/>
+          </a:ln>
+        </p:spPr>
+      </p:sp>
+      <p:sp>
+        <p:nvSpPr>
           <p:cNvPr id="11" name="Text 9"/>
           <p:cNvSpPr/>
           <p:nvPr/>
         </p:nvSpPr>
         <p:spPr>
           <a:xfrm>
-            <a:off x="804672" y="3063240"/>
-            <a:ext cx="2180844" cy="548640"/>
+            <a:off x="868680" y="1947672"/>
+            <a:ext cx="6309360" cy="146304"/>
           </a:xfrm>
           <a:prstGeom prst="rect">
             <a:avLst/>
@@ -8386,41 +8614,131 @@
           </a:bodyPr>
           <a:lstStyle/>
           <a:p>
-            <a:pPr algn="ctr" indent="0" marL="0">
-              <a:buNone/>
-            </a:pPr>
-            <a:r>
-              <a:rPr lang="en-US" sz="1700" b="1" dirty="0">
-                <a:solidFill>
-                  <a:srgbClr val="16324F"/>
-                </a:solidFill>
-                <a:latin typeface="Aptos" pitchFamily="34" charset="0"/>
-                <a:ea typeface="Aptos" pitchFamily="34" charset="-122"/>
-                <a:cs typeface="Aptos" pitchFamily="34" charset="-120"/>
-              </a:rPr>
-              <a:t>parameters</a:t>
-            </a:r>
-            <a:endParaRPr lang="en-US" sz="1700" dirty="0"/>
-          </a:p>
-        </p:txBody>
-      </p:sp>
-      <p:sp>
-        <p:nvSpPr>
-          <p:cNvPr id="12" name="Shape 10"/>
-          <p:cNvSpPr/>
-          <p:nvPr/>
-        </p:nvSpPr>
-        <p:spPr>
-          <a:xfrm>
-            <a:off x="3232404" y="3209544"/>
-            <a:ext cx="182880" cy="292608"/>
-          </a:xfrm>
-          <a:prstGeom prst="chevron">
-            <a:avLst/>
-          </a:prstGeom>
-          <a:solidFill>
-            <a:srgbClr val="1877B9"/>
-          </a:solidFill>
+            <a:pPr algn="l" indent="0" marL="0">
+              <a:buNone/>
+            </a:pPr>
+            <a:r>
+              <a:rPr lang="en-US" sz="820" b="1" spc="35" kern="0" dirty="0">
+                <a:solidFill>
+                  <a:srgbClr val="8FD3FF"/>
+                </a:solidFill>
+                <a:latin typeface="Consolas" pitchFamily="34" charset="0"/>
+                <a:ea typeface="Consolas" pitchFamily="34" charset="-122"/>
+                <a:cs typeface="Consolas" pitchFamily="34" charset="-120"/>
+              </a:rPr>
+              <a:t>python</a:t>
+            </a:r>
+            <a:endParaRPr lang="en-US" sz="820" dirty="0"/>
+          </a:p>
+        </p:txBody>
+      </p:sp>
+      <p:sp>
+        <p:nvSpPr>
+          <p:cNvPr id="12" name="Text 10"/>
+          <p:cNvSpPr/>
+          <p:nvPr/>
+        </p:nvSpPr>
+        <p:spPr>
+          <a:xfrm>
+            <a:off x="877824" y="2359152"/>
+            <a:ext cx="6382512" cy="3246120"/>
+          </a:xfrm>
+          <a:prstGeom prst="rect">
+            <a:avLst/>
+          </a:prstGeom>
+          <a:noFill/>
+          <a:ln/>
+        </p:spPr>
+        <p:txBody>
+          <a:bodyPr wrap="square" lIns="0" tIns="0" rIns="0" bIns="0" rtlCol="0" anchor="t">
+            <a:normAutofit/>
+          </a:bodyPr>
+          <a:lstStyle/>
+          <a:p>
+            <a:pPr algn="l" indent="0" marL="0">
+              <a:buNone/>
+            </a:pPr>
+            <a:r>
+              <a:rPr lang="en-US" sz="1600" dirty="0">
+                <a:solidFill>
+                  <a:srgbClr val="F4F7FA"/>
+                </a:solidFill>
+                <a:latin typeface="Consolas" pitchFamily="34" charset="0"/>
+                <a:ea typeface="Consolas" pitchFamily="34" charset="-122"/>
+                <a:cs typeface="Consolas" pitchFamily="34" charset="-120"/>
+              </a:rPr>
+              <a:t>def average(values: list[float]) -&gt; float:</a:t>
+            </a:r>
+            <a:endParaRPr lang="en-US" sz="1600" dirty="0"/>
+          </a:p>
+          <a:p>
+            <a:pPr algn="l" indent="0" marL="0">
+              <a:buNone/>
+            </a:pPr>
+            <a:r>
+              <a:rPr lang="en-US" sz="1600" dirty="0">
+                <a:solidFill>
+                  <a:srgbClr val="F4F7FA"/>
+                </a:solidFill>
+                <a:latin typeface="Consolas" pitchFamily="34" charset="0"/>
+                <a:ea typeface="Consolas" pitchFamily="34" charset="-122"/>
+                <a:cs typeface="Consolas" pitchFamily="34" charset="-120"/>
+              </a:rPr>
+              <a:t>    if not values:</a:t>
+            </a:r>
+            <a:endParaRPr lang="en-US" sz="1600" dirty="0"/>
+          </a:p>
+          <a:p>
+            <a:pPr algn="l" indent="0" marL="0">
+              <a:buNone/>
+            </a:pPr>
+            <a:r>
+              <a:rPr lang="en-US" sz="1600" dirty="0">
+                <a:solidFill>
+                  <a:srgbClr val="F4F7FA"/>
+                </a:solidFill>
+                <a:latin typeface="Consolas" pitchFamily="34" charset="0"/>
+                <a:ea typeface="Consolas" pitchFamily="34" charset="-122"/>
+                <a:cs typeface="Consolas" pitchFamily="34" charset="-120"/>
+              </a:rPr>
+              <a:t>        raise ValueError("values must not be empty")</a:t>
+            </a:r>
+            <a:endParaRPr lang="en-US" sz="1600" dirty="0"/>
+          </a:p>
+          <a:p>
+            <a:pPr algn="l" indent="0" marL="0">
+              <a:buNone/>
+            </a:pPr>
+            <a:r>
+              <a:rPr lang="en-US" sz="1600" dirty="0">
+                <a:solidFill>
+                  <a:srgbClr val="F4F7FA"/>
+                </a:solidFill>
+                <a:latin typeface="Consolas" pitchFamily="34" charset="0"/>
+                <a:ea typeface="Consolas" pitchFamily="34" charset="-122"/>
+                <a:cs typeface="Consolas" pitchFamily="34" charset="-120"/>
+              </a:rPr>
+              <a:t>    return sum(values) / len(values)</a:t>
+            </a:r>
+            <a:endParaRPr lang="en-US" sz="1600" dirty="0"/>
+          </a:p>
+        </p:txBody>
+      </p:sp>
+      <p:sp>
+        <p:nvSpPr>
+          <p:cNvPr id="13" name="Shape 11"/>
+          <p:cNvSpPr/>
+          <p:nvPr/>
+        </p:nvSpPr>
+        <p:spPr>
+          <a:xfrm>
+            <a:off x="7936992" y="1883664"/>
+            <a:ext cx="0" cy="3639312"/>
+          </a:xfrm>
+          <a:prstGeom prst="line">
+            <a:avLst/>
+          </a:prstGeom>
+          <a:noFill/>
           <a:ln w="12700">
             <a:solidFill>
               <a:srgbClr val="1877B9"/>
@@ -8431,249 +8749,42 @@
       </p:sp>
       <p:sp>
         <p:nvSpPr>
-          <p:cNvPr id="13" name="Shape 11"/>
-          <p:cNvSpPr/>
-          <p:nvPr/>
-        </p:nvSpPr>
-        <p:spPr>
-          <a:xfrm>
-            <a:off x="3506724" y="2834640"/>
-            <a:ext cx="2400300" cy="1042416"/>
-          </a:xfrm>
-          <a:prstGeom prst="rect">
-            <a:avLst/>
-          </a:prstGeom>
-          <a:solidFill>
-            <a:srgbClr val="EAF3F7"/>
-          </a:solidFill>
-          <a:ln w="12700">
-            <a:solidFill>
-              <a:srgbClr val="9DCCDD"/>
-            </a:solidFill>
-            <a:prstDash val="solid"/>
-          </a:ln>
-        </p:spPr>
-      </p:sp>
-      <p:sp>
-        <p:nvSpPr>
           <p:cNvPr id="14" name="Text 12"/>
           <p:cNvSpPr/>
           <p:nvPr/>
         </p:nvSpPr>
         <p:spPr>
           <a:xfrm>
-            <a:off x="3616452" y="3063240"/>
-            <a:ext cx="2180844" cy="548640"/>
-          </a:xfrm>
-          <a:prstGeom prst="rect">
-            <a:avLst/>
-          </a:prstGeom>
-          <a:noFill/>
-          <a:ln/>
-        </p:spPr>
-        <p:txBody>
-          <a:bodyPr wrap="square" lIns="0" tIns="0" rIns="0" bIns="0" rtlCol="0" anchor="ctr">
-            <a:normAutofit/>
-          </a:bodyPr>
-          <a:lstStyle/>
-          <a:p>
-            <a:pPr algn="ctr" indent="0" marL="0">
-              <a:buNone/>
-            </a:pPr>
-            <a:r>
-              <a:rPr lang="en-US" sz="1700" b="1" dirty="0">
-                <a:solidFill>
-                  <a:srgbClr val="16324F"/>
+            <a:off x="8229600" y="2084832"/>
+            <a:ext cx="2816352" cy="2514600"/>
+          </a:xfrm>
+          <a:prstGeom prst="rect">
+            <a:avLst/>
+          </a:prstGeom>
+          <a:noFill/>
+          <a:ln/>
+        </p:spPr>
+        <p:txBody>
+          <a:bodyPr wrap="square" lIns="0" tIns="0" rIns="0" bIns="0" rtlCol="0" anchor="t">
+            <a:normAutofit/>
+          </a:bodyPr>
+          <a:lstStyle/>
+          <a:p>
+            <a:pPr algn="l" indent="0" marL="0">
+              <a:buNone/>
+            </a:pPr>
+            <a:r>
+              <a:rPr lang="en-US" sz="1720" dirty="0">
+                <a:solidFill>
+                  <a:srgbClr val="5E6B78"/>
                 </a:solidFill>
                 <a:latin typeface="Aptos" pitchFamily="34" charset="0"/>
                 <a:ea typeface="Aptos" pitchFamily="34" charset="-122"/>
                 <a:cs typeface="Aptos" pitchFamily="34" charset="-120"/>
               </a:rPr>
-              <a:t>processing</a:t>
-            </a:r>
-            <a:endParaRPr lang="en-US" sz="1700" dirty="0"/>
-          </a:p>
-        </p:txBody>
-      </p:sp>
-      <p:sp>
-        <p:nvSpPr>
-          <p:cNvPr id="15" name="Shape 13"/>
-          <p:cNvSpPr/>
-          <p:nvPr/>
-        </p:nvSpPr>
-        <p:spPr>
-          <a:xfrm>
-            <a:off x="6044184" y="3209544"/>
-            <a:ext cx="182880" cy="292608"/>
-          </a:xfrm>
-          <a:prstGeom prst="chevron">
-            <a:avLst/>
-          </a:prstGeom>
-          <a:solidFill>
-            <a:srgbClr val="1877B9"/>
-          </a:solidFill>
-          <a:ln w="12700">
-            <a:solidFill>
-              <a:srgbClr val="1877B9"/>
-            </a:solidFill>
-            <a:prstDash val="solid"/>
-          </a:ln>
-        </p:spPr>
-      </p:sp>
-      <p:sp>
-        <p:nvSpPr>
-          <p:cNvPr id="16" name="Shape 14"/>
-          <p:cNvSpPr/>
-          <p:nvPr/>
-        </p:nvSpPr>
-        <p:spPr>
-          <a:xfrm>
-            <a:off x="6318504" y="2834640"/>
-            <a:ext cx="2400300" cy="1042416"/>
-          </a:xfrm>
-          <a:prstGeom prst="rect">
-            <a:avLst/>
-          </a:prstGeom>
-          <a:solidFill>
-            <a:srgbClr val="F3F6F8"/>
-          </a:solidFill>
-          <a:ln w="12700">
-            <a:solidFill>
-              <a:srgbClr val="D8E0E6"/>
-            </a:solidFill>
-            <a:prstDash val="solid"/>
-          </a:ln>
-        </p:spPr>
-      </p:sp>
-      <p:sp>
-        <p:nvSpPr>
-          <p:cNvPr id="17" name="Text 15"/>
-          <p:cNvSpPr/>
-          <p:nvPr/>
-        </p:nvSpPr>
-        <p:spPr>
-          <a:xfrm>
-            <a:off x="6428232" y="3063240"/>
-            <a:ext cx="2180844" cy="548640"/>
-          </a:xfrm>
-          <a:prstGeom prst="rect">
-            <a:avLst/>
-          </a:prstGeom>
-          <a:noFill/>
-          <a:ln/>
-        </p:spPr>
-        <p:txBody>
-          <a:bodyPr wrap="square" lIns="0" tIns="0" rIns="0" bIns="0" rtlCol="0" anchor="ctr">
-            <a:normAutofit/>
-          </a:bodyPr>
-          <a:lstStyle/>
-          <a:p>
-            <a:pPr algn="ctr" indent="0" marL="0">
-              <a:buNone/>
-            </a:pPr>
-            <a:r>
-              <a:rPr lang="en-US" sz="1700" b="1" dirty="0">
-                <a:solidFill>
-                  <a:srgbClr val="16324F"/>
-                </a:solidFill>
-                <a:latin typeface="Aptos" pitchFamily="34" charset="0"/>
-                <a:ea typeface="Aptos" pitchFamily="34" charset="-122"/>
-                <a:cs typeface="Aptos" pitchFamily="34" charset="-120"/>
-              </a:rPr>
-              <a:t>return value</a:t>
-            </a:r>
-            <a:endParaRPr lang="en-US" sz="1700" dirty="0"/>
-          </a:p>
-        </p:txBody>
-      </p:sp>
-      <p:sp>
-        <p:nvSpPr>
-          <p:cNvPr id="18" name="Shape 16"/>
-          <p:cNvSpPr/>
-          <p:nvPr/>
-        </p:nvSpPr>
-        <p:spPr>
-          <a:xfrm>
-            <a:off x="8855964" y="3209544"/>
-            <a:ext cx="182880" cy="292608"/>
-          </a:xfrm>
-          <a:prstGeom prst="chevron">
-            <a:avLst/>
-          </a:prstGeom>
-          <a:solidFill>
-            <a:srgbClr val="1877B9"/>
-          </a:solidFill>
-          <a:ln w="12700">
-            <a:solidFill>
-              <a:srgbClr val="1877B9"/>
-            </a:solidFill>
-            <a:prstDash val="solid"/>
-          </a:ln>
-        </p:spPr>
-      </p:sp>
-      <p:sp>
-        <p:nvSpPr>
-          <p:cNvPr id="19" name="Shape 17"/>
-          <p:cNvSpPr/>
-          <p:nvPr/>
-        </p:nvSpPr>
-        <p:spPr>
-          <a:xfrm>
-            <a:off x="9130284" y="2834640"/>
-            <a:ext cx="2400300" cy="1042416"/>
-          </a:xfrm>
-          <a:prstGeom prst="rect">
-            <a:avLst/>
-          </a:prstGeom>
-          <a:solidFill>
-            <a:srgbClr val="EAF3F7"/>
-          </a:solidFill>
-          <a:ln w="12700">
-            <a:solidFill>
-              <a:srgbClr val="9DCCDD"/>
-            </a:solidFill>
-            <a:prstDash val="solid"/>
-          </a:ln>
-        </p:spPr>
-      </p:sp>
-      <p:sp>
-        <p:nvSpPr>
-          <p:cNvPr id="20" name="Text 18"/>
-          <p:cNvSpPr/>
-          <p:nvPr/>
-        </p:nvSpPr>
-        <p:spPr>
-          <a:xfrm>
-            <a:off x="9240012" y="3063240"/>
-            <a:ext cx="2180844" cy="548640"/>
-          </a:xfrm>
-          <a:prstGeom prst="rect">
-            <a:avLst/>
-          </a:prstGeom>
-          <a:noFill/>
-          <a:ln/>
-        </p:spPr>
-        <p:txBody>
-          <a:bodyPr wrap="square" lIns="0" tIns="0" rIns="0" bIns="0" rtlCol="0" anchor="ctr">
-            <a:normAutofit/>
-          </a:bodyPr>
-          <a:lstStyle/>
-          <a:p>
-            <a:pPr algn="ctr" indent="0" marL="0">
-              <a:buNone/>
-            </a:pPr>
-            <a:r>
-              <a:rPr lang="en-US" sz="1700" b="1" dirty="0">
-                <a:solidFill>
-                  <a:srgbClr val="16324F"/>
-                </a:solidFill>
-                <a:latin typeface="Aptos" pitchFamily="34" charset="0"/>
-                <a:ea typeface="Aptos" pitchFamily="34" charset="-122"/>
-                <a:cs typeface="Aptos" pitchFamily="34" charset="-120"/>
-              </a:rPr>
-              <a:t>exception for invalid input</a:t>
-            </a:r>
-            <a:endParaRPr lang="en-US" sz="1700" dirty="0"/>
+              <a:t>Type hints help the reader, IDE and static checking. They do not enforce types at runtime by themselves.</a:t>
+            </a:r>
+            <a:endParaRPr lang="en-US" sz="1720" dirty="0"/>
           </a:p>
         </p:txBody>
       </p:sp>
@@ -8897,7 +9008,7 @@
                 <a:ea typeface="Consolas" pitchFamily="34" charset="-122"/>
                 <a:cs typeface="Consolas" pitchFamily="34" charset="-120"/>
               </a:rPr>
-              <a:t>18 / 27</a:t>
+              <a:t>18 / 26</a:t>
             </a:r>
             <a:endParaRPr lang="en-US" sz="780" dirty="0"/>
           </a:p>
@@ -8938,7 +9049,7 @@
                 <a:ea typeface="Aptos Display" pitchFamily="34" charset="-122"/>
                 <a:cs typeface="Aptos Display" pitchFamily="34" charset="-120"/>
               </a:rPr>
-              <a:t>Type hints complement the contract</a:t>
+              <a:t>A mutable default argument is shared state</a:t>
             </a:r>
             <a:endParaRPr lang="en-US" sz="2850" dirty="0"/>
           </a:p>
@@ -8946,14 +9057,92 @@
       </p:sp>
       <p:sp>
         <p:nvSpPr>
-          <p:cNvPr id="9" name="Shape 7"/>
-          <p:cNvSpPr/>
-          <p:nvPr/>
-        </p:nvSpPr>
-        <p:spPr>
-          <a:xfrm>
-            <a:off x="658368" y="1828800"/>
-            <a:ext cx="6903720" cy="4069080"/>
+          <p:cNvPr id="9" name="Text 7"/>
+          <p:cNvSpPr/>
+          <p:nvPr/>
+        </p:nvSpPr>
+        <p:spPr>
+          <a:xfrm>
+            <a:off x="749808" y="1920240"/>
+            <a:ext cx="4160520" cy="3886200"/>
+          </a:xfrm>
+          <a:prstGeom prst="rect">
+            <a:avLst/>
+          </a:prstGeom>
+          <a:noFill/>
+          <a:ln/>
+        </p:spPr>
+        <p:txBody>
+          <a:bodyPr wrap="square" lIns="508" tIns="508" rIns="508" bIns="508" rtlCol="0" anchor="t">
+            <a:normAutofit/>
+          </a:bodyPr>
+          <a:lstStyle/>
+          <a:p>
+            <a:pPr marL="228600" indent="-228600">
+              <a:buSzPct val="100000"/>
+              <a:buChar char="•"/>
+            </a:pPr>
+            <a:r>
+              <a:rPr lang="en-US" sz="1650" dirty="0">
+                <a:solidFill>
+                  <a:srgbClr val="18212B"/>
+                </a:solidFill>
+                <a:latin typeface="Aptos" pitchFamily="34" charset="0"/>
+                <a:ea typeface="Aptos" pitchFamily="34" charset="-122"/>
+                <a:cs typeface="Aptos" pitchFamily="34" charset="-120"/>
+              </a:rPr>
+              <a:t>a default value is created when the function is defined</a:t>
+            </a:r>
+            <a:endParaRPr lang="en-US" sz="1650" dirty="0"/>
+          </a:p>
+          <a:p>
+            <a:pPr marL="228600" indent="-228600">
+              <a:buSzPct val="100000"/>
+              <a:buChar char="•"/>
+            </a:pPr>
+            <a:r>
+              <a:rPr lang="en-US" sz="1650" dirty="0">
+                <a:solidFill>
+                  <a:srgbClr val="18212B"/>
+                </a:solidFill>
+                <a:latin typeface="Aptos" pitchFamily="34" charset="0"/>
+                <a:ea typeface="Aptos" pitchFamily="34" charset="-122"/>
+                <a:cs typeface="Aptos" pitchFamily="34" charset="-120"/>
+              </a:rPr>
+              <a:t>a list or dict is then shared between calls</a:t>
+            </a:r>
+            <a:endParaRPr lang="en-US" sz="1650" dirty="0"/>
+          </a:p>
+          <a:p>
+            <a:pPr marL="228600" indent="-228600">
+              <a:buSzPct val="100000"/>
+              <a:buChar char="•"/>
+            </a:pPr>
+            <a:r>
+              <a:rPr lang="en-US" sz="1650" dirty="0">
+                <a:solidFill>
+                  <a:srgbClr val="18212B"/>
+                </a:solidFill>
+                <a:latin typeface="Aptos" pitchFamily="34" charset="0"/>
+                <a:ea typeface="Aptos" pitchFamily="34" charset="-122"/>
+                <a:cs typeface="Aptos" pitchFamily="34" charset="-120"/>
+              </a:rPr>
+              <a:t>None creates a new object only inside the function</a:t>
+            </a:r>
+            <a:endParaRPr lang="en-US" sz="1650" dirty="0"/>
+          </a:p>
+        </p:txBody>
+      </p:sp>
+      <p:sp>
+        <p:nvSpPr>
+          <p:cNvPr id="10" name="Shape 8"/>
+          <p:cNvSpPr/>
+          <p:nvPr/>
+        </p:nvSpPr>
+        <p:spPr>
+          <a:xfrm>
+            <a:off x="5413248" y="1792224"/>
+            <a:ext cx="5925312" cy="4160520"/>
           </a:xfrm>
           <a:prstGeom prst="rect">
             <a:avLst/>
@@ -8971,14 +9160,14 @@
       </p:sp>
       <p:sp>
         <p:nvSpPr>
-          <p:cNvPr id="10" name="Shape 8"/>
-          <p:cNvSpPr/>
-          <p:nvPr/>
-        </p:nvSpPr>
-        <p:spPr>
-          <a:xfrm>
-            <a:off x="658368" y="1828800"/>
-            <a:ext cx="6903720" cy="347472"/>
+          <p:cNvPr id="11" name="Shape 9"/>
+          <p:cNvSpPr/>
+          <p:nvPr/>
+        </p:nvSpPr>
+        <p:spPr>
+          <a:xfrm>
+            <a:off x="5413248" y="1792224"/>
+            <a:ext cx="5925312" cy="329184"/>
           </a:xfrm>
           <a:prstGeom prst="rect">
             <a:avLst/>
@@ -8996,14 +9185,14 @@
       </p:sp>
       <p:sp>
         <p:nvSpPr>
-          <p:cNvPr id="11" name="Text 9"/>
-          <p:cNvSpPr/>
-          <p:nvPr/>
-        </p:nvSpPr>
-        <p:spPr>
-          <a:xfrm>
-            <a:off x="868680" y="1947672"/>
-            <a:ext cx="6309360" cy="146304"/>
+          <p:cNvPr id="12" name="Text 10"/>
+          <p:cNvSpPr/>
+          <p:nvPr/>
+        </p:nvSpPr>
+        <p:spPr>
+          <a:xfrm>
+            <a:off x="5641848" y="1901952"/>
+            <a:ext cx="5394960" cy="146304"/>
           </a:xfrm>
           <a:prstGeom prst="rect">
             <a:avLst/>
@@ -9021,7 +9210,7 @@
               <a:buNone/>
             </a:pPr>
             <a:r>
-              <a:rPr lang="en-US" sz="820" b="1" spc="35" kern="0" dirty="0">
+              <a:rPr lang="en-US" sz="810" b="1" spc="35" kern="0" dirty="0">
                 <a:solidFill>
                   <a:srgbClr val="8FD3FF"/>
                 </a:solidFill>
@@ -9031,20 +9220,20 @@
               </a:rPr>
               <a:t>python</a:t>
             </a:r>
-            <a:endParaRPr lang="en-US" sz="820" dirty="0"/>
-          </a:p>
-        </p:txBody>
-      </p:sp>
-      <p:sp>
-        <p:nvSpPr>
-          <p:cNvPr id="12" name="Text 10"/>
-          <p:cNvSpPr/>
-          <p:nvPr/>
-        </p:nvSpPr>
-        <p:spPr>
-          <a:xfrm>
-            <a:off x="877824" y="2359152"/>
-            <a:ext cx="6382512" cy="3246120"/>
+            <a:endParaRPr lang="en-US" sz="810" dirty="0"/>
+          </a:p>
+        </p:txBody>
+      </p:sp>
+      <p:sp>
+        <p:nvSpPr>
+          <p:cNvPr id="13" name="Text 11"/>
+          <p:cNvSpPr/>
+          <p:nvPr/>
+        </p:nvSpPr>
+        <p:spPr>
+          <a:xfrm>
+            <a:off x="5641848" y="2331720"/>
+            <a:ext cx="5340096" cy="3182112"/>
           </a:xfrm>
           <a:prstGeom prst="rect">
             <a:avLst/>
@@ -9062,7 +9251,7 @@
               <a:buNone/>
             </a:pPr>
             <a:r>
-              <a:rPr lang="en-US" sz="1600" dirty="0">
+              <a:rPr lang="en-US" sz="1520" dirty="0">
                 <a:solidFill>
                   <a:srgbClr val="F4F7FA"/>
                 </a:solidFill>
@@ -9070,16 +9259,16 @@
                 <a:ea typeface="Consolas" pitchFamily="34" charset="-122"/>
                 <a:cs typeface="Consolas" pitchFamily="34" charset="-120"/>
               </a:rPr>
-              <a:t>def average(values: list[float]) -&gt; float:</a:t>
-            </a:r>
-            <a:endParaRPr lang="en-US" sz="1600" dirty="0"/>
-          </a:p>
-          <a:p>
-            <a:pPr algn="l" indent="0" marL="0">
-              <a:buNone/>
-            </a:pPr>
-            <a:r>
-              <a:rPr lang="en-US" sz="1600" dirty="0">
+              <a:t>def add_student(</a:t>
+            </a:r>
+            <a:endParaRPr lang="en-US" sz="1520" dirty="0"/>
+          </a:p>
+          <a:p>
+            <a:pPr algn="l" indent="0" marL="0">
+              <a:buNone/>
+            </a:pPr>
+            <a:r>
+              <a:rPr lang="en-US" sz="1520" dirty="0">
                 <a:solidFill>
                   <a:srgbClr val="F4F7FA"/>
                 </a:solidFill>
@@ -9087,16 +9276,16 @@
                 <a:ea typeface="Consolas" pitchFamily="34" charset="-122"/>
                 <a:cs typeface="Consolas" pitchFamily="34" charset="-120"/>
               </a:rPr>
-              <a:t>    if not values:</a:t>
-            </a:r>
-            <a:endParaRPr lang="en-US" sz="1600" dirty="0"/>
-          </a:p>
-          <a:p>
-            <a:pPr algn="l" indent="0" marL="0">
-              <a:buNone/>
-            </a:pPr>
-            <a:r>
-              <a:rPr lang="en-US" sz="1600" dirty="0">
+              <a:t>    name: str, students: list[str] | None = None</a:t>
+            </a:r>
+            <a:endParaRPr lang="en-US" sz="1520" dirty="0"/>
+          </a:p>
+          <a:p>
+            <a:pPr algn="l" indent="0" marL="0">
+              <a:buNone/>
+            </a:pPr>
+            <a:r>
+              <a:rPr lang="en-US" sz="1520" dirty="0">
                 <a:solidFill>
                   <a:srgbClr val="F4F7FA"/>
                 </a:solidFill>
@@ -9104,16 +9293,16 @@
                 <a:ea typeface="Consolas" pitchFamily="34" charset="-122"/>
                 <a:cs typeface="Consolas" pitchFamily="34" charset="-120"/>
               </a:rPr>
-              <a:t>        raise ValueError("values must not be empty")</a:t>
-            </a:r>
-            <a:endParaRPr lang="en-US" sz="1600" dirty="0"/>
-          </a:p>
-          <a:p>
-            <a:pPr algn="l" indent="0" marL="0">
-              <a:buNone/>
-            </a:pPr>
-            <a:r>
-              <a:rPr lang="en-US" sz="1600" dirty="0">
+              <a:t>) -&gt; list[str]:</a:t>
+            </a:r>
+            <a:endParaRPr lang="en-US" sz="1520" dirty="0"/>
+          </a:p>
+          <a:p>
+            <a:pPr algn="l" indent="0" marL="0">
+              <a:buNone/>
+            </a:pPr>
+            <a:r>
+              <a:rPr lang="en-US" sz="1520" dirty="0">
                 <a:solidFill>
                   <a:srgbClr val="F4F7FA"/>
                 </a:solidFill>
@@ -9121,73 +9310,60 @@
                 <a:ea typeface="Consolas" pitchFamily="34" charset="-122"/>
                 <a:cs typeface="Consolas" pitchFamily="34" charset="-120"/>
               </a:rPr>
-              <a:t>    return sum(values) / len(values)</a:t>
-            </a:r>
-            <a:endParaRPr lang="en-US" sz="1600" dirty="0"/>
-          </a:p>
-        </p:txBody>
-      </p:sp>
-      <p:sp>
-        <p:nvSpPr>
-          <p:cNvPr id="13" name="Shape 11"/>
-          <p:cNvSpPr/>
-          <p:nvPr/>
-        </p:nvSpPr>
-        <p:spPr>
-          <a:xfrm>
-            <a:off x="7936992" y="1883664"/>
-            <a:ext cx="0" cy="3639312"/>
-          </a:xfrm>
-          <a:prstGeom prst="line">
-            <a:avLst/>
-          </a:prstGeom>
-          <a:noFill/>
-          <a:ln w="12700">
-            <a:solidFill>
-              <a:srgbClr val="1877B9"/>
-            </a:solidFill>
-            <a:prstDash val="solid"/>
-          </a:ln>
-        </p:spPr>
-      </p:sp>
-      <p:sp>
-        <p:nvSpPr>
-          <p:cNvPr id="14" name="Text 12"/>
-          <p:cNvSpPr/>
-          <p:nvPr/>
-        </p:nvSpPr>
-        <p:spPr>
-          <a:xfrm>
-            <a:off x="8229600" y="2084832"/>
-            <a:ext cx="2816352" cy="2514600"/>
-          </a:xfrm>
-          <a:prstGeom prst="rect">
-            <a:avLst/>
-          </a:prstGeom>
-          <a:noFill/>
-          <a:ln/>
-        </p:spPr>
-        <p:txBody>
-          <a:bodyPr wrap="square" lIns="0" tIns="0" rIns="0" bIns="0" rtlCol="0" anchor="t">
-            <a:normAutofit/>
-          </a:bodyPr>
-          <a:lstStyle/>
-          <a:p>
-            <a:pPr algn="l" indent="0" marL="0">
-              <a:buNone/>
-            </a:pPr>
-            <a:r>
-              <a:rPr lang="en-US" sz="1720" dirty="0">
-                <a:solidFill>
-                  <a:srgbClr val="5E6B78"/>
-                </a:solidFill>
-                <a:latin typeface="Aptos" pitchFamily="34" charset="0"/>
-                <a:ea typeface="Aptos" pitchFamily="34" charset="-122"/>
-                <a:cs typeface="Aptos" pitchFamily="34" charset="-120"/>
-              </a:rPr>
-              <a:t>Type hints help the reader, IDE and static checking. They do not enforce types at runtime by themselves.</a:t>
-            </a:r>
-            <a:endParaRPr lang="en-US" sz="1720" dirty="0"/>
+              <a:t>    if students is None:</a:t>
+            </a:r>
+            <a:endParaRPr lang="en-US" sz="1520" dirty="0"/>
+          </a:p>
+          <a:p>
+            <a:pPr algn="l" indent="0" marL="0">
+              <a:buNone/>
+            </a:pPr>
+            <a:r>
+              <a:rPr lang="en-US" sz="1520" dirty="0">
+                <a:solidFill>
+                  <a:srgbClr val="F4F7FA"/>
+                </a:solidFill>
+                <a:latin typeface="Consolas" pitchFamily="34" charset="0"/>
+                <a:ea typeface="Consolas" pitchFamily="34" charset="-122"/>
+                <a:cs typeface="Consolas" pitchFamily="34" charset="-120"/>
+              </a:rPr>
+              <a:t>        students = []</a:t>
+            </a:r>
+            <a:endParaRPr lang="en-US" sz="1520" dirty="0"/>
+          </a:p>
+          <a:p>
+            <a:pPr algn="l" indent="0" marL="0">
+              <a:buNone/>
+            </a:pPr>
+            <a:r>
+              <a:rPr lang="en-US" sz="1520" dirty="0">
+                <a:solidFill>
+                  <a:srgbClr val="F4F7FA"/>
+                </a:solidFill>
+                <a:latin typeface="Consolas" pitchFamily="34" charset="0"/>
+                <a:ea typeface="Consolas" pitchFamily="34" charset="-122"/>
+                <a:cs typeface="Consolas" pitchFamily="34" charset="-120"/>
+              </a:rPr>
+              <a:t>    students.append(name)</a:t>
+            </a:r>
+            <a:endParaRPr lang="en-US" sz="1520" dirty="0"/>
+          </a:p>
+          <a:p>
+            <a:pPr algn="l" indent="0" marL="0">
+              <a:buNone/>
+            </a:pPr>
+            <a:r>
+              <a:rPr lang="en-US" sz="1520" dirty="0">
+                <a:solidFill>
+                  <a:srgbClr val="F4F7FA"/>
+                </a:solidFill>
+                <a:latin typeface="Consolas" pitchFamily="34" charset="0"/>
+                <a:ea typeface="Consolas" pitchFamily="34" charset="-122"/>
+                <a:cs typeface="Consolas" pitchFamily="34" charset="-120"/>
+              </a:rPr>
+              <a:t>    return students</a:t>
+            </a:r>
+            <a:endParaRPr lang="en-US" sz="1520" dirty="0"/>
           </a:p>
         </p:txBody>
       </p:sp>
@@ -9411,7 +9587,7 @@
                 <a:ea typeface="Consolas" pitchFamily="34" charset="-122"/>
                 <a:cs typeface="Consolas" pitchFamily="34" charset="-120"/>
               </a:rPr>
-              <a:t>19 / 27</a:t>
+              <a:t>19 / 26</a:t>
             </a:r>
             <a:endParaRPr lang="en-US" sz="780" dirty="0"/>
           </a:p>
@@ -9452,7 +9628,7 @@
                 <a:ea typeface="Aptos Display" pitchFamily="34" charset="-122"/>
                 <a:cs typeface="Aptos Display" pitchFamily="34" charset="-120"/>
               </a:rPr>
-              <a:t>A mutable default argument is shared state</a:t>
+              <a:t>An anonymous record or a data model?</a:t>
             </a:r>
             <a:endParaRPr lang="en-US" sz="2850" dirty="0"/>
           </a:p>
@@ -9460,14 +9636,78 @@
       </p:sp>
       <p:sp>
         <p:nvSpPr>
-          <p:cNvPr id="9" name="Text 7"/>
-          <p:cNvSpPr/>
-          <p:nvPr/>
-        </p:nvSpPr>
-        <p:spPr>
-          <a:xfrm>
-            <a:off x="749808" y="1920240"/>
-            <a:ext cx="4160520" cy="3886200"/>
+          <p:cNvPr id="9" name="Shape 7"/>
+          <p:cNvSpPr/>
+          <p:nvPr/>
+        </p:nvSpPr>
+        <p:spPr>
+          <a:xfrm>
+            <a:off x="713232" y="1883664"/>
+            <a:ext cx="5010912" cy="0"/>
+          </a:xfrm>
+          <a:prstGeom prst="line">
+            <a:avLst/>
+          </a:prstGeom>
+          <a:noFill/>
+          <a:ln w="12700">
+            <a:solidFill>
+              <a:srgbClr val="167C80"/>
+            </a:solidFill>
+            <a:prstDash val="solid"/>
+          </a:ln>
+        </p:spPr>
+      </p:sp>
+      <p:sp>
+        <p:nvSpPr>
+          <p:cNvPr id="10" name="Text 8"/>
+          <p:cNvSpPr/>
+          <p:nvPr/>
+        </p:nvSpPr>
+        <p:spPr>
+          <a:xfrm>
+            <a:off x="713232" y="2139696"/>
+            <a:ext cx="5010912" cy="365760"/>
+          </a:xfrm>
+          <a:prstGeom prst="rect">
+            <a:avLst/>
+          </a:prstGeom>
+          <a:noFill/>
+          <a:ln/>
+        </p:spPr>
+        <p:txBody>
+          <a:bodyPr wrap="square" lIns="0" tIns="0" rIns="0" bIns="0" rtlCol="0" anchor="ctr">
+            <a:normAutofit/>
+          </a:bodyPr>
+          <a:lstStyle/>
+          <a:p>
+            <a:pPr algn="l" indent="0" marL="0">
+              <a:buNone/>
+            </a:pPr>
+            <a:r>
+              <a:rPr lang="en-US" sz="1950" b="1" dirty="0">
+                <a:solidFill>
+                  <a:srgbClr val="16324F"/>
+                </a:solidFill>
+                <a:latin typeface="Aptos" pitchFamily="34" charset="0"/>
+                <a:ea typeface="Aptos" pitchFamily="34" charset="-122"/>
+                <a:cs typeface="Aptos" pitchFamily="34" charset="-120"/>
+              </a:rPr>
+              <a:t>Tuple / dict</a:t>
+            </a:r>
+            <a:endParaRPr lang="en-US" sz="1950" dirty="0"/>
+          </a:p>
+        </p:txBody>
+      </p:sp>
+      <p:sp>
+        <p:nvSpPr>
+          <p:cNvPr id="11" name="Text 9"/>
+          <p:cNvSpPr/>
+          <p:nvPr/>
+        </p:nvSpPr>
+        <p:spPr>
+          <a:xfrm>
+            <a:off x="749808" y="2688336"/>
+            <a:ext cx="4919472" cy="3886200"/>
           </a:xfrm>
           <a:prstGeom prst="rect">
             <a:avLst/>
@@ -9486,7 +9726,7 @@
               <a:buChar char="•"/>
             </a:pPr>
             <a:r>
-              <a:rPr lang="en-US" sz="1650" dirty="0">
+              <a:rPr lang="en-US" sz="1620" dirty="0">
                 <a:solidFill>
                   <a:srgbClr val="18212B"/>
                 </a:solidFill>
@@ -9494,9 +9734,9 @@
                 <a:ea typeface="Aptos" pitchFamily="34" charset="-122"/>
                 <a:cs typeface="Aptos" pitchFamily="34" charset="-120"/>
               </a:rPr>
-              <a:t>a default value is created when the function is defined</a:t>
-            </a:r>
-            <a:endParaRPr lang="en-US" sz="1650" dirty="0"/>
+              <a:t>("Anna", "Python", 92)</a:t>
+            </a:r>
+            <a:endParaRPr lang="en-US" sz="1620" dirty="0"/>
           </a:p>
           <a:p>
             <a:pPr marL="228600" indent="-228600">
@@ -9504,7 +9744,7 @@
               <a:buChar char="•"/>
             </a:pPr>
             <a:r>
-              <a:rPr lang="en-US" sz="1650" dirty="0">
+              <a:rPr lang="en-US" sz="1620" dirty="0">
                 <a:solidFill>
                   <a:srgbClr val="18212B"/>
                 </a:solidFill>
@@ -9512,9 +9752,9 @@
                 <a:ea typeface="Aptos" pitchFamily="34" charset="-122"/>
                 <a:cs typeface="Aptos" pitchFamily="34" charset="-120"/>
               </a:rPr>
-              <a:t>a list or dict is then shared between calls</a:t>
-            </a:r>
-            <a:endParaRPr lang="en-US" sz="1650" dirty="0"/>
+              <a:t>we must remember the meaning of positions</a:t>
+            </a:r>
+            <a:endParaRPr lang="en-US" sz="1620" dirty="0"/>
           </a:p>
           <a:p>
             <a:pPr marL="228600" indent="-228600">
@@ -9522,7 +9762,7 @@
               <a:buChar char="•"/>
             </a:pPr>
             <a:r>
-              <a:rPr lang="en-US" sz="1650" dirty="0">
+              <a:rPr lang="en-US" sz="1620" dirty="0">
                 <a:solidFill>
                   <a:srgbClr val="18212B"/>
                 </a:solidFill>
@@ -9530,32 +9770,30 @@
                 <a:ea typeface="Aptos" pitchFamily="34" charset="-122"/>
                 <a:cs typeface="Aptos" pitchFamily="34" charset="-120"/>
               </a:rPr>
-              <a:t>None creates a new object only inside the function</a:t>
-            </a:r>
-            <a:endParaRPr lang="en-US" sz="1650" dirty="0"/>
-          </a:p>
-        </p:txBody>
-      </p:sp>
-      <p:sp>
-        <p:nvSpPr>
-          <p:cNvPr id="10" name="Shape 8"/>
-          <p:cNvSpPr/>
-          <p:nvPr/>
-        </p:nvSpPr>
-        <p:spPr>
-          <a:xfrm>
-            <a:off x="5413248" y="1792224"/>
-            <a:ext cx="5925312" cy="4160520"/>
-          </a:xfrm>
-          <a:prstGeom prst="rect">
-            <a:avLst/>
-          </a:prstGeom>
-          <a:solidFill>
-            <a:srgbClr val="17212B"/>
-          </a:solidFill>
+              <a:t>reasonable for a small local record</a:t>
+            </a:r>
+            <a:endParaRPr lang="en-US" sz="1620" dirty="0"/>
+          </a:p>
+        </p:txBody>
+      </p:sp>
+      <p:sp>
+        <p:nvSpPr>
+          <p:cNvPr id="12" name="Shape 10"/>
+          <p:cNvSpPr/>
+          <p:nvPr/>
+        </p:nvSpPr>
+        <p:spPr>
+          <a:xfrm>
+            <a:off x="6373368" y="1883664"/>
+            <a:ext cx="5010912" cy="0"/>
+          </a:xfrm>
+          <a:prstGeom prst="line">
+            <a:avLst/>
+          </a:prstGeom>
+          <a:noFill/>
           <a:ln w="12700">
             <a:solidFill>
-              <a:srgbClr val="243242"/>
+              <a:srgbClr val="E0A03A"/>
             </a:solidFill>
             <a:prstDash val="solid"/>
           </a:ln>
@@ -9563,39 +9801,14 @@
       </p:sp>
       <p:sp>
         <p:nvSpPr>
-          <p:cNvPr id="11" name="Shape 9"/>
-          <p:cNvSpPr/>
-          <p:nvPr/>
-        </p:nvSpPr>
-        <p:spPr>
-          <a:xfrm>
-            <a:off x="5413248" y="1792224"/>
-            <a:ext cx="5925312" cy="329184"/>
-          </a:xfrm>
-          <a:prstGeom prst="rect">
-            <a:avLst/>
-          </a:prstGeom>
-          <a:solidFill>
-            <a:srgbClr val="223044"/>
-          </a:solidFill>
-          <a:ln w="12700">
-            <a:solidFill>
-              <a:srgbClr val="223044"/>
-            </a:solidFill>
-            <a:prstDash val="solid"/>
-          </a:ln>
-        </p:spPr>
-      </p:sp>
-      <p:sp>
-        <p:nvSpPr>
-          <p:cNvPr id="12" name="Text 10"/>
-          <p:cNvSpPr/>
-          <p:nvPr/>
-        </p:nvSpPr>
-        <p:spPr>
-          <a:xfrm>
-            <a:off x="5641848" y="1901952"/>
-            <a:ext cx="5394960" cy="146304"/>
+          <p:cNvPr id="13" name="Text 11"/>
+          <p:cNvSpPr/>
+          <p:nvPr/>
+        </p:nvSpPr>
+        <p:spPr>
+          <a:xfrm>
+            <a:off x="6373368" y="2139696"/>
+            <a:ext cx="5010912" cy="365760"/>
           </a:xfrm>
           <a:prstGeom prst="rect">
             <a:avLst/>
@@ -9613,160 +9826,95 @@
               <a:buNone/>
             </a:pPr>
             <a:r>
-              <a:rPr lang="en-US" sz="810" b="1" spc="35" kern="0" dirty="0">
-                <a:solidFill>
-                  <a:srgbClr val="8FD3FF"/>
-                </a:solidFill>
-                <a:latin typeface="Consolas" pitchFamily="34" charset="0"/>
-                <a:ea typeface="Consolas" pitchFamily="34" charset="-122"/>
-                <a:cs typeface="Consolas" pitchFamily="34" charset="-120"/>
-              </a:rPr>
-              <a:t>python</a:t>
-            </a:r>
-            <a:endParaRPr lang="en-US" sz="810" dirty="0"/>
-          </a:p>
-        </p:txBody>
-      </p:sp>
-      <p:sp>
-        <p:nvSpPr>
-          <p:cNvPr id="13" name="Text 11"/>
-          <p:cNvSpPr/>
-          <p:nvPr/>
-        </p:nvSpPr>
-        <p:spPr>
-          <a:xfrm>
-            <a:off x="5641848" y="2331720"/>
-            <a:ext cx="5340096" cy="3182112"/>
-          </a:xfrm>
-          <a:prstGeom prst="rect">
-            <a:avLst/>
-          </a:prstGeom>
-          <a:noFill/>
-          <a:ln/>
-        </p:spPr>
-        <p:txBody>
-          <a:bodyPr wrap="square" lIns="0" tIns="0" rIns="0" bIns="0" rtlCol="0" anchor="t">
-            <a:normAutofit/>
-          </a:bodyPr>
-          <a:lstStyle/>
-          <a:p>
-            <a:pPr algn="l" indent="0" marL="0">
-              <a:buNone/>
-            </a:pPr>
-            <a:r>
-              <a:rPr lang="en-US" sz="1520" dirty="0">
-                <a:solidFill>
-                  <a:srgbClr val="F4F7FA"/>
-                </a:solidFill>
-                <a:latin typeface="Consolas" pitchFamily="34" charset="0"/>
-                <a:ea typeface="Consolas" pitchFamily="34" charset="-122"/>
-                <a:cs typeface="Consolas" pitchFamily="34" charset="-120"/>
-              </a:rPr>
-              <a:t>def add_student(</a:t>
-            </a:r>
-            <a:endParaRPr lang="en-US" sz="1520" dirty="0"/>
-          </a:p>
-          <a:p>
-            <a:pPr algn="l" indent="0" marL="0">
-              <a:buNone/>
-            </a:pPr>
-            <a:r>
-              <a:rPr lang="en-US" sz="1520" dirty="0">
-                <a:solidFill>
-                  <a:srgbClr val="F4F7FA"/>
-                </a:solidFill>
-                <a:latin typeface="Consolas" pitchFamily="34" charset="0"/>
-                <a:ea typeface="Consolas" pitchFamily="34" charset="-122"/>
-                <a:cs typeface="Consolas" pitchFamily="34" charset="-120"/>
-              </a:rPr>
-              <a:t>    name: str, students: list[str] | None = None</a:t>
-            </a:r>
-            <a:endParaRPr lang="en-US" sz="1520" dirty="0"/>
-          </a:p>
-          <a:p>
-            <a:pPr algn="l" indent="0" marL="0">
-              <a:buNone/>
-            </a:pPr>
-            <a:r>
-              <a:rPr lang="en-US" sz="1520" dirty="0">
-                <a:solidFill>
-                  <a:srgbClr val="F4F7FA"/>
-                </a:solidFill>
-                <a:latin typeface="Consolas" pitchFamily="34" charset="0"/>
-                <a:ea typeface="Consolas" pitchFamily="34" charset="-122"/>
-                <a:cs typeface="Consolas" pitchFamily="34" charset="-120"/>
-              </a:rPr>
-              <a:t>) -&gt; list[str]:</a:t>
-            </a:r>
-            <a:endParaRPr lang="en-US" sz="1520" dirty="0"/>
-          </a:p>
-          <a:p>
-            <a:pPr algn="l" indent="0" marL="0">
-              <a:buNone/>
-            </a:pPr>
-            <a:r>
-              <a:rPr lang="en-US" sz="1520" dirty="0">
-                <a:solidFill>
-                  <a:srgbClr val="F4F7FA"/>
-                </a:solidFill>
-                <a:latin typeface="Consolas" pitchFamily="34" charset="0"/>
-                <a:ea typeface="Consolas" pitchFamily="34" charset="-122"/>
-                <a:cs typeface="Consolas" pitchFamily="34" charset="-120"/>
-              </a:rPr>
-              <a:t>    if students is None:</a:t>
-            </a:r>
-            <a:endParaRPr lang="en-US" sz="1520" dirty="0"/>
-          </a:p>
-          <a:p>
-            <a:pPr algn="l" indent="0" marL="0">
-              <a:buNone/>
-            </a:pPr>
-            <a:r>
-              <a:rPr lang="en-US" sz="1520" dirty="0">
-                <a:solidFill>
-                  <a:srgbClr val="F4F7FA"/>
-                </a:solidFill>
-                <a:latin typeface="Consolas" pitchFamily="34" charset="0"/>
-                <a:ea typeface="Consolas" pitchFamily="34" charset="-122"/>
-                <a:cs typeface="Consolas" pitchFamily="34" charset="-120"/>
-              </a:rPr>
-              <a:t>        students = []</a:t>
-            </a:r>
-            <a:endParaRPr lang="en-US" sz="1520" dirty="0"/>
-          </a:p>
-          <a:p>
-            <a:pPr algn="l" indent="0" marL="0">
-              <a:buNone/>
-            </a:pPr>
-            <a:r>
-              <a:rPr lang="en-US" sz="1520" dirty="0">
-                <a:solidFill>
-                  <a:srgbClr val="F4F7FA"/>
-                </a:solidFill>
-                <a:latin typeface="Consolas" pitchFamily="34" charset="0"/>
-                <a:ea typeface="Consolas" pitchFamily="34" charset="-122"/>
-                <a:cs typeface="Consolas" pitchFamily="34" charset="-120"/>
-              </a:rPr>
-              <a:t>    students.append(name)</a:t>
-            </a:r>
-            <a:endParaRPr lang="en-US" sz="1520" dirty="0"/>
-          </a:p>
-          <a:p>
-            <a:pPr algn="l" indent="0" marL="0">
-              <a:buNone/>
-            </a:pPr>
-            <a:r>
-              <a:rPr lang="en-US" sz="1520" dirty="0">
-                <a:solidFill>
-                  <a:srgbClr val="F4F7FA"/>
-                </a:solidFill>
-                <a:latin typeface="Consolas" pitchFamily="34" charset="0"/>
-                <a:ea typeface="Consolas" pitchFamily="34" charset="-122"/>
-                <a:cs typeface="Consolas" pitchFamily="34" charset="-120"/>
-              </a:rPr>
-              <a:t>    return students</a:t>
-            </a:r>
-            <a:endParaRPr lang="en-US" sz="1520" dirty="0"/>
+              <a:rPr lang="en-US" sz="1950" b="1" dirty="0">
+                <a:solidFill>
+                  <a:srgbClr val="16324F"/>
+                </a:solidFill>
+                <a:latin typeface="Aptos" pitchFamily="34" charset="0"/>
+                <a:ea typeface="Aptos" pitchFamily="34" charset="-122"/>
+                <a:cs typeface="Aptos" pitchFamily="34" charset="-120"/>
+              </a:rPr>
+              <a:t>dataclass</a:t>
+            </a:r>
+            <a:endParaRPr lang="en-US" sz="1950" dirty="0"/>
+          </a:p>
+        </p:txBody>
+      </p:sp>
+      <p:sp>
+        <p:nvSpPr>
+          <p:cNvPr id="14" name="Text 12"/>
+          <p:cNvSpPr/>
+          <p:nvPr/>
+        </p:nvSpPr>
+        <p:spPr>
+          <a:xfrm>
+            <a:off x="6409944" y="2688336"/>
+            <a:ext cx="4919472" cy="3886200"/>
+          </a:xfrm>
+          <a:prstGeom prst="rect">
+            <a:avLst/>
+          </a:prstGeom>
+          <a:noFill/>
+          <a:ln/>
+        </p:spPr>
+        <p:txBody>
+          <a:bodyPr wrap="square" lIns="508" tIns="508" rIns="508" bIns="508" rtlCol="0" anchor="t">
+            <a:normAutofit/>
+          </a:bodyPr>
+          <a:lstStyle/>
+          <a:p>
+            <a:pPr marL="228600" indent="-228600">
+              <a:buSzPct val="100000"/>
+              <a:buChar char="•"/>
+            </a:pPr>
+            <a:r>
+              <a:rPr lang="en-US" sz="1620" dirty="0">
+                <a:solidFill>
+                  <a:srgbClr val="18212B"/>
+                </a:solidFill>
+                <a:latin typeface="Aptos" pitchFamily="34" charset="0"/>
+                <a:ea typeface="Aptos" pitchFamily="34" charset="-122"/>
+                <a:cs typeface="Aptos" pitchFamily="34" charset="-120"/>
+              </a:rPr>
+              <a:t>Result(student, course, points)</a:t>
+            </a:r>
+            <a:endParaRPr lang="en-US" sz="1620" dirty="0"/>
+          </a:p>
+          <a:p>
+            <a:pPr marL="228600" indent="-228600">
+              <a:buSzPct val="100000"/>
+              <a:buChar char="•"/>
+            </a:pPr>
+            <a:r>
+              <a:rPr lang="en-US" sz="1620" dirty="0">
+                <a:solidFill>
+                  <a:srgbClr val="18212B"/>
+                </a:solidFill>
+                <a:latin typeface="Aptos" pitchFamily="34" charset="0"/>
+                <a:ea typeface="Aptos" pitchFamily="34" charset="-122"/>
+                <a:cs typeface="Aptos" pitchFamily="34" charset="-120"/>
+              </a:rPr>
+              <a:t>attributes describe data</a:t>
+            </a:r>
+            <a:endParaRPr lang="en-US" sz="1620" dirty="0"/>
+          </a:p>
+          <a:p>
+            <a:pPr marL="228600" indent="-228600">
+              <a:buSzPct val="100000"/>
+              <a:buChar char="•"/>
+            </a:pPr>
+            <a:r>
+              <a:rPr lang="en-US" sz="1620" dirty="0">
+                <a:solidFill>
+                  <a:srgbClr val="18212B"/>
+                </a:solidFill>
+                <a:latin typeface="Aptos" pitchFamily="34" charset="0"/>
+                <a:ea typeface="Aptos" pitchFamily="34" charset="-122"/>
+                <a:cs typeface="Aptos" pitchFamily="34" charset="-120"/>
+              </a:rPr>
+              <a:t>a better interface for your program</a:t>
+            </a:r>
+            <a:endParaRPr lang="en-US" sz="1620" dirty="0"/>
           </a:p>
         </p:txBody>
       </p:sp>
@@ -9990,7 +10138,7 @@
                 <a:ea typeface="Consolas" pitchFamily="34" charset="-122"/>
                 <a:cs typeface="Consolas" pitchFamily="34" charset="-120"/>
               </a:rPr>
-              <a:t>02 / 27</a:t>
+              <a:t>02 / 26</a:t>
             </a:r>
             <a:endParaRPr lang="en-US" sz="780" dirty="0"/>
           </a:p>
@@ -10323,7 +10471,7 @@
                 <a:ea typeface="Consolas" pitchFamily="34" charset="-122"/>
                 <a:cs typeface="Consolas" pitchFamily="34" charset="-120"/>
               </a:rPr>
-              <a:t>20 / 27</a:t>
+              <a:t>20 / 26</a:t>
             </a:r>
             <a:endParaRPr lang="en-US" sz="780" dirty="0"/>
           </a:p>
@@ -10364,7 +10512,7 @@
                 <a:ea typeface="Aptos Display" pitchFamily="34" charset="-122"/>
                 <a:cs typeface="Aptos Display" pitchFamily="34" charset="-120"/>
               </a:rPr>
-              <a:t>An anonymous record or a data model?</a:t>
+              <a:t>dataclass names a domain object</a:t>
             </a:r>
             <a:endParaRPr lang="en-US" sz="2850" dirty="0"/>
           </a:p>
@@ -10378,16 +10526,18 @@
         </p:nvSpPr>
         <p:spPr>
           <a:xfrm>
-            <a:off x="713232" y="1883664"/>
-            <a:ext cx="5010912" cy="0"/>
-          </a:xfrm>
-          <a:prstGeom prst="line">
-            <a:avLst/>
-          </a:prstGeom>
-          <a:noFill/>
+            <a:off x="658368" y="1828800"/>
+            <a:ext cx="6903720" cy="4069080"/>
+          </a:xfrm>
+          <a:prstGeom prst="rect">
+            <a:avLst/>
+          </a:prstGeom>
+          <a:solidFill>
+            <a:srgbClr val="17212B"/>
+          </a:solidFill>
           <a:ln w="12700">
             <a:solidFill>
-              <a:srgbClr val="167C80"/>
+              <a:srgbClr val="243242"/>
             </a:solidFill>
             <a:prstDash val="solid"/>
           </a:ln>
@@ -10395,14 +10545,39 @@
       </p:sp>
       <p:sp>
         <p:nvSpPr>
-          <p:cNvPr id="10" name="Text 8"/>
-          <p:cNvSpPr/>
-          <p:nvPr/>
-        </p:nvSpPr>
-        <p:spPr>
-          <a:xfrm>
-            <a:off x="713232" y="2139696"/>
-            <a:ext cx="5010912" cy="365760"/>
+          <p:cNvPr id="10" name="Shape 8"/>
+          <p:cNvSpPr/>
+          <p:nvPr/>
+        </p:nvSpPr>
+        <p:spPr>
+          <a:xfrm>
+            <a:off x="658368" y="1828800"/>
+            <a:ext cx="6903720" cy="347472"/>
+          </a:xfrm>
+          <a:prstGeom prst="rect">
+            <a:avLst/>
+          </a:prstGeom>
+          <a:solidFill>
+            <a:srgbClr val="223044"/>
+          </a:solidFill>
+          <a:ln w="12700">
+            <a:solidFill>
+              <a:srgbClr val="223044"/>
+            </a:solidFill>
+            <a:prstDash val="solid"/>
+          </a:ln>
+        </p:spPr>
+      </p:sp>
+      <p:sp>
+        <p:nvSpPr>
+          <p:cNvPr id="11" name="Text 9"/>
+          <p:cNvSpPr/>
+          <p:nvPr/>
+        </p:nvSpPr>
+        <p:spPr>
+          <a:xfrm>
+            <a:off x="868680" y="1947672"/>
+            <a:ext cx="6309360" cy="146304"/>
           </a:xfrm>
           <a:prstGeom prst="rect">
             <a:avLst/>
@@ -10420,237 +10595,253 @@
               <a:buNone/>
             </a:pPr>
             <a:r>
-              <a:rPr lang="en-US" sz="1950" b="1" dirty="0">
-                <a:solidFill>
-                  <a:srgbClr val="16324F"/>
+              <a:rPr lang="en-US" sz="820" b="1" spc="35" kern="0" dirty="0">
+                <a:solidFill>
+                  <a:srgbClr val="8FD3FF"/>
+                </a:solidFill>
+                <a:latin typeface="Consolas" pitchFamily="34" charset="0"/>
+                <a:ea typeface="Consolas" pitchFamily="34" charset="-122"/>
+                <a:cs typeface="Consolas" pitchFamily="34" charset="-120"/>
+              </a:rPr>
+              <a:t>python</a:t>
+            </a:r>
+            <a:endParaRPr lang="en-US" sz="820" dirty="0"/>
+          </a:p>
+        </p:txBody>
+      </p:sp>
+      <p:sp>
+        <p:nvSpPr>
+          <p:cNvPr id="12" name="Text 10"/>
+          <p:cNvSpPr/>
+          <p:nvPr/>
+        </p:nvSpPr>
+        <p:spPr>
+          <a:xfrm>
+            <a:off x="877824" y="2359152"/>
+            <a:ext cx="6382512" cy="3246120"/>
+          </a:xfrm>
+          <a:prstGeom prst="rect">
+            <a:avLst/>
+          </a:prstGeom>
+          <a:noFill/>
+          <a:ln/>
+        </p:spPr>
+        <p:txBody>
+          <a:bodyPr wrap="square" lIns="0" tIns="0" rIns="0" bIns="0" rtlCol="0" anchor="t">
+            <a:normAutofit/>
+          </a:bodyPr>
+          <a:lstStyle/>
+          <a:p>
+            <a:pPr algn="l" indent="0" marL="0">
+              <a:buNone/>
+            </a:pPr>
+            <a:r>
+              <a:rPr lang="en-US" sz="1500" dirty="0">
+                <a:solidFill>
+                  <a:srgbClr val="F4F7FA"/>
+                </a:solidFill>
+                <a:latin typeface="Consolas" pitchFamily="34" charset="0"/>
+                <a:ea typeface="Consolas" pitchFamily="34" charset="-122"/>
+                <a:cs typeface="Consolas" pitchFamily="34" charset="-120"/>
+              </a:rPr>
+              <a:t>from dataclasses import dataclass</a:t>
+            </a:r>
+            <a:endParaRPr lang="en-US" sz="1500" dirty="0"/>
+          </a:p>
+          <a:p>
+            <a:pPr algn="l" indent="0" marL="0">
+              <a:buNone/>
+            </a:pPr>
+            <a:endParaRPr lang="en-US" sz="1500" dirty="0"/>
+          </a:p>
+          <a:p>
+            <a:pPr algn="l" indent="0" marL="0">
+              <a:buNone/>
+            </a:pPr>
+            <a:r>
+              <a:rPr lang="en-US" sz="1500" dirty="0">
+                <a:solidFill>
+                  <a:srgbClr val="F4F7FA"/>
+                </a:solidFill>
+                <a:latin typeface="Consolas" pitchFamily="34" charset="0"/>
+                <a:ea typeface="Consolas" pitchFamily="34" charset="-122"/>
+                <a:cs typeface="Consolas" pitchFamily="34" charset="-120"/>
+              </a:rPr>
+              <a:t>@dataclass</a:t>
+            </a:r>
+            <a:endParaRPr lang="en-US" sz="1500" dirty="0"/>
+          </a:p>
+          <a:p>
+            <a:pPr algn="l" indent="0" marL="0">
+              <a:buNone/>
+            </a:pPr>
+            <a:r>
+              <a:rPr lang="en-US" sz="1500" dirty="0">
+                <a:solidFill>
+                  <a:srgbClr val="F4F7FA"/>
+                </a:solidFill>
+                <a:latin typeface="Consolas" pitchFamily="34" charset="0"/>
+                <a:ea typeface="Consolas" pitchFamily="34" charset="-122"/>
+                <a:cs typeface="Consolas" pitchFamily="34" charset="-120"/>
+              </a:rPr>
+              <a:t>class Result:</a:t>
+            </a:r>
+            <a:endParaRPr lang="en-US" sz="1500" dirty="0"/>
+          </a:p>
+          <a:p>
+            <a:pPr algn="l" indent="0" marL="0">
+              <a:buNone/>
+            </a:pPr>
+            <a:r>
+              <a:rPr lang="en-US" sz="1500" dirty="0">
+                <a:solidFill>
+                  <a:srgbClr val="F4F7FA"/>
+                </a:solidFill>
+                <a:latin typeface="Consolas" pitchFamily="34" charset="0"/>
+                <a:ea typeface="Consolas" pitchFamily="34" charset="-122"/>
+                <a:cs typeface="Consolas" pitchFamily="34" charset="-120"/>
+              </a:rPr>
+              <a:t>    student: str</a:t>
+            </a:r>
+            <a:endParaRPr lang="en-US" sz="1500" dirty="0"/>
+          </a:p>
+          <a:p>
+            <a:pPr algn="l" indent="0" marL="0">
+              <a:buNone/>
+            </a:pPr>
+            <a:r>
+              <a:rPr lang="en-US" sz="1500" dirty="0">
+                <a:solidFill>
+                  <a:srgbClr val="F4F7FA"/>
+                </a:solidFill>
+                <a:latin typeface="Consolas" pitchFamily="34" charset="0"/>
+                <a:ea typeface="Consolas" pitchFamily="34" charset="-122"/>
+                <a:cs typeface="Consolas" pitchFamily="34" charset="-120"/>
+              </a:rPr>
+              <a:t>    course: str</a:t>
+            </a:r>
+            <a:endParaRPr lang="en-US" sz="1500" dirty="0"/>
+          </a:p>
+          <a:p>
+            <a:pPr algn="l" indent="0" marL="0">
+              <a:buNone/>
+            </a:pPr>
+            <a:r>
+              <a:rPr lang="en-US" sz="1500" dirty="0">
+                <a:solidFill>
+                  <a:srgbClr val="F4F7FA"/>
+                </a:solidFill>
+                <a:latin typeface="Consolas" pitchFamily="34" charset="0"/>
+                <a:ea typeface="Consolas" pitchFamily="34" charset="-122"/>
+                <a:cs typeface="Consolas" pitchFamily="34" charset="-120"/>
+              </a:rPr>
+              <a:t>    points: int</a:t>
+            </a:r>
+            <a:endParaRPr lang="en-US" sz="1500" dirty="0"/>
+          </a:p>
+          <a:p>
+            <a:pPr algn="l" indent="0" marL="0">
+              <a:buNone/>
+            </a:pPr>
+            <a:endParaRPr lang="en-US" sz="1500" dirty="0"/>
+          </a:p>
+          <a:p>
+            <a:pPr algn="l" indent="0" marL="0">
+              <a:buNone/>
+            </a:pPr>
+            <a:r>
+              <a:rPr lang="en-US" sz="1500" dirty="0">
+                <a:solidFill>
+                  <a:srgbClr val="F4F7FA"/>
+                </a:solidFill>
+                <a:latin typeface="Consolas" pitchFamily="34" charset="0"/>
+                <a:ea typeface="Consolas" pitchFamily="34" charset="-122"/>
+                <a:cs typeface="Consolas" pitchFamily="34" charset="-120"/>
+              </a:rPr>
+              <a:t>    def passed(self) -&gt; bool:</a:t>
+            </a:r>
+            <a:endParaRPr lang="en-US" sz="1500" dirty="0"/>
+          </a:p>
+          <a:p>
+            <a:pPr algn="l" indent="0" marL="0">
+              <a:buNone/>
+            </a:pPr>
+            <a:r>
+              <a:rPr lang="en-US" sz="1500" dirty="0">
+                <a:solidFill>
+                  <a:srgbClr val="F4F7FA"/>
+                </a:solidFill>
+                <a:latin typeface="Consolas" pitchFamily="34" charset="0"/>
+                <a:ea typeface="Consolas" pitchFamily="34" charset="-122"/>
+                <a:cs typeface="Consolas" pitchFamily="34" charset="-120"/>
+              </a:rPr>
+              <a:t>        return self.points &gt;= 51</a:t>
+            </a:r>
+            <a:endParaRPr lang="en-US" sz="1500" dirty="0"/>
+          </a:p>
+        </p:txBody>
+      </p:sp>
+      <p:sp>
+        <p:nvSpPr>
+          <p:cNvPr id="13" name="Shape 11"/>
+          <p:cNvSpPr/>
+          <p:nvPr/>
+        </p:nvSpPr>
+        <p:spPr>
+          <a:xfrm>
+            <a:off x="7936992" y="1883664"/>
+            <a:ext cx="0" cy="3639312"/>
+          </a:xfrm>
+          <a:prstGeom prst="line">
+            <a:avLst/>
+          </a:prstGeom>
+          <a:noFill/>
+          <a:ln w="12700">
+            <a:solidFill>
+              <a:srgbClr val="1877B9"/>
+            </a:solidFill>
+            <a:prstDash val="solid"/>
+          </a:ln>
+        </p:spPr>
+      </p:sp>
+      <p:sp>
+        <p:nvSpPr>
+          <p:cNvPr id="14" name="Text 12"/>
+          <p:cNvSpPr/>
+          <p:nvPr/>
+        </p:nvSpPr>
+        <p:spPr>
+          <a:xfrm>
+            <a:off x="8229600" y="2084832"/>
+            <a:ext cx="2816352" cy="2514600"/>
+          </a:xfrm>
+          <a:prstGeom prst="rect">
+            <a:avLst/>
+          </a:prstGeom>
+          <a:noFill/>
+          <a:ln/>
+        </p:spPr>
+        <p:txBody>
+          <a:bodyPr wrap="square" lIns="0" tIns="0" rIns="0" bIns="0" rtlCol="0" anchor="t">
+            <a:normAutofit/>
+          </a:bodyPr>
+          <a:lstStyle/>
+          <a:p>
+            <a:pPr algn="l" indent="0" marL="0">
+              <a:buNone/>
+            </a:pPr>
+            <a:r>
+              <a:rPr lang="en-US" sz="1720" dirty="0">
+                <a:solidFill>
+                  <a:srgbClr val="5E6B78"/>
                 </a:solidFill>
                 <a:latin typeface="Aptos" pitchFamily="34" charset="0"/>
                 <a:ea typeface="Aptos" pitchFamily="34" charset="-122"/>
                 <a:cs typeface="Aptos" pitchFamily="34" charset="-120"/>
               </a:rPr>
-              <a:t>Tuple / dict</a:t>
-            </a:r>
-            <a:endParaRPr lang="en-US" sz="1950" dirty="0"/>
-          </a:p>
-        </p:txBody>
-      </p:sp>
-      <p:sp>
-        <p:nvSpPr>
-          <p:cNvPr id="11" name="Text 9"/>
-          <p:cNvSpPr/>
-          <p:nvPr/>
-        </p:nvSpPr>
-        <p:spPr>
-          <a:xfrm>
-            <a:off x="749808" y="2688336"/>
-            <a:ext cx="4919472" cy="3886200"/>
-          </a:xfrm>
-          <a:prstGeom prst="rect">
-            <a:avLst/>
-          </a:prstGeom>
-          <a:noFill/>
-          <a:ln/>
-        </p:spPr>
-        <p:txBody>
-          <a:bodyPr wrap="square" lIns="508" tIns="508" rIns="508" bIns="508" rtlCol="0" anchor="t">
-            <a:normAutofit/>
-          </a:bodyPr>
-          <a:lstStyle/>
-          <a:p>
-            <a:pPr marL="228600" indent="-228600">
-              <a:buSzPct val="100000"/>
-              <a:buChar char="•"/>
-            </a:pPr>
-            <a:r>
-              <a:rPr lang="en-US" sz="1620" dirty="0">
-                <a:solidFill>
-                  <a:srgbClr val="18212B"/>
-                </a:solidFill>
-                <a:latin typeface="Aptos" pitchFamily="34" charset="0"/>
-                <a:ea typeface="Aptos" pitchFamily="34" charset="-122"/>
-                <a:cs typeface="Aptos" pitchFamily="34" charset="-120"/>
-              </a:rPr>
-              <a:t>("Anna", "Python", 92)</a:t>
-            </a:r>
-            <a:endParaRPr lang="en-US" sz="1620" dirty="0"/>
-          </a:p>
-          <a:p>
-            <a:pPr marL="228600" indent="-228600">
-              <a:buSzPct val="100000"/>
-              <a:buChar char="•"/>
-            </a:pPr>
-            <a:r>
-              <a:rPr lang="en-US" sz="1620" dirty="0">
-                <a:solidFill>
-                  <a:srgbClr val="18212B"/>
-                </a:solidFill>
-                <a:latin typeface="Aptos" pitchFamily="34" charset="0"/>
-                <a:ea typeface="Aptos" pitchFamily="34" charset="-122"/>
-                <a:cs typeface="Aptos" pitchFamily="34" charset="-120"/>
-              </a:rPr>
-              <a:t>we must remember the meaning of positions</a:t>
-            </a:r>
-            <a:endParaRPr lang="en-US" sz="1620" dirty="0"/>
-          </a:p>
-          <a:p>
-            <a:pPr marL="228600" indent="-228600">
-              <a:buSzPct val="100000"/>
-              <a:buChar char="•"/>
-            </a:pPr>
-            <a:r>
-              <a:rPr lang="en-US" sz="1620" dirty="0">
-                <a:solidFill>
-                  <a:srgbClr val="18212B"/>
-                </a:solidFill>
-                <a:latin typeface="Aptos" pitchFamily="34" charset="0"/>
-                <a:ea typeface="Aptos" pitchFamily="34" charset="-122"/>
-                <a:cs typeface="Aptos" pitchFamily="34" charset="-120"/>
-              </a:rPr>
-              <a:t>reasonable for a small local record</a:t>
-            </a:r>
-            <a:endParaRPr lang="en-US" sz="1620" dirty="0"/>
-          </a:p>
-        </p:txBody>
-      </p:sp>
-      <p:sp>
-        <p:nvSpPr>
-          <p:cNvPr id="12" name="Shape 10"/>
-          <p:cNvSpPr/>
-          <p:nvPr/>
-        </p:nvSpPr>
-        <p:spPr>
-          <a:xfrm>
-            <a:off x="6373368" y="1883664"/>
-            <a:ext cx="5010912" cy="0"/>
-          </a:xfrm>
-          <a:prstGeom prst="line">
-            <a:avLst/>
-          </a:prstGeom>
-          <a:noFill/>
-          <a:ln w="12700">
-            <a:solidFill>
-              <a:srgbClr val="E0A03A"/>
-            </a:solidFill>
-            <a:prstDash val="solid"/>
-          </a:ln>
-        </p:spPr>
-      </p:sp>
-      <p:sp>
-        <p:nvSpPr>
-          <p:cNvPr id="13" name="Text 11"/>
-          <p:cNvSpPr/>
-          <p:nvPr/>
-        </p:nvSpPr>
-        <p:spPr>
-          <a:xfrm>
-            <a:off x="6373368" y="2139696"/>
-            <a:ext cx="5010912" cy="365760"/>
-          </a:xfrm>
-          <a:prstGeom prst="rect">
-            <a:avLst/>
-          </a:prstGeom>
-          <a:noFill/>
-          <a:ln/>
-        </p:spPr>
-        <p:txBody>
-          <a:bodyPr wrap="square" lIns="0" tIns="0" rIns="0" bIns="0" rtlCol="0" anchor="ctr">
-            <a:normAutofit/>
-          </a:bodyPr>
-          <a:lstStyle/>
-          <a:p>
-            <a:pPr algn="l" indent="0" marL="0">
-              <a:buNone/>
-            </a:pPr>
-            <a:r>
-              <a:rPr lang="en-US" sz="1950" b="1" dirty="0">
-                <a:solidFill>
-                  <a:srgbClr val="16324F"/>
-                </a:solidFill>
-                <a:latin typeface="Aptos" pitchFamily="34" charset="0"/>
-                <a:ea typeface="Aptos" pitchFamily="34" charset="-122"/>
-                <a:cs typeface="Aptos" pitchFamily="34" charset="-120"/>
-              </a:rPr>
-              <a:t>dataclass</a:t>
-            </a:r>
-            <a:endParaRPr lang="en-US" sz="1950" dirty="0"/>
-          </a:p>
-        </p:txBody>
-      </p:sp>
-      <p:sp>
-        <p:nvSpPr>
-          <p:cNvPr id="14" name="Text 12"/>
-          <p:cNvSpPr/>
-          <p:nvPr/>
-        </p:nvSpPr>
-        <p:spPr>
-          <a:xfrm>
-            <a:off x="6409944" y="2688336"/>
-            <a:ext cx="4919472" cy="3886200"/>
-          </a:xfrm>
-          <a:prstGeom prst="rect">
-            <a:avLst/>
-          </a:prstGeom>
-          <a:noFill/>
-          <a:ln/>
-        </p:spPr>
-        <p:txBody>
-          <a:bodyPr wrap="square" lIns="508" tIns="508" rIns="508" bIns="508" rtlCol="0" anchor="t">
-            <a:normAutofit/>
-          </a:bodyPr>
-          <a:lstStyle/>
-          <a:p>
-            <a:pPr marL="228600" indent="-228600">
-              <a:buSzPct val="100000"/>
-              <a:buChar char="•"/>
-            </a:pPr>
-            <a:r>
-              <a:rPr lang="en-US" sz="1620" dirty="0">
-                <a:solidFill>
-                  <a:srgbClr val="18212B"/>
-                </a:solidFill>
-                <a:latin typeface="Aptos" pitchFamily="34" charset="0"/>
-                <a:ea typeface="Aptos" pitchFamily="34" charset="-122"/>
-                <a:cs typeface="Aptos" pitchFamily="34" charset="-120"/>
-              </a:rPr>
-              <a:t>Result(student, course, points)</a:t>
-            </a:r>
-            <a:endParaRPr lang="en-US" sz="1620" dirty="0"/>
-          </a:p>
-          <a:p>
-            <a:pPr marL="228600" indent="-228600">
-              <a:buSzPct val="100000"/>
-              <a:buChar char="•"/>
-            </a:pPr>
-            <a:r>
-              <a:rPr lang="en-US" sz="1620" dirty="0">
-                <a:solidFill>
-                  <a:srgbClr val="18212B"/>
-                </a:solidFill>
-                <a:latin typeface="Aptos" pitchFamily="34" charset="0"/>
-                <a:ea typeface="Aptos" pitchFamily="34" charset="-122"/>
-                <a:cs typeface="Aptos" pitchFamily="34" charset="-120"/>
-              </a:rPr>
-              <a:t>attributes describe data</a:t>
-            </a:r>
-            <a:endParaRPr lang="en-US" sz="1620" dirty="0"/>
-          </a:p>
-          <a:p>
-            <a:pPr marL="228600" indent="-228600">
-              <a:buSzPct val="100000"/>
-              <a:buChar char="•"/>
-            </a:pPr>
-            <a:r>
-              <a:rPr lang="en-US" sz="1620" dirty="0">
-                <a:solidFill>
-                  <a:srgbClr val="18212B"/>
-                </a:solidFill>
-                <a:latin typeface="Aptos" pitchFamily="34" charset="0"/>
-                <a:ea typeface="Aptos" pitchFamily="34" charset="-122"/>
-                <a:cs typeface="Aptos" pitchFamily="34" charset="-120"/>
-              </a:rPr>
-              <a:t>a better interface for your program</a:t>
-            </a:r>
-            <a:endParaRPr lang="en-US" sz="1620" dirty="0"/>
+              <a:t>A dataclass is not mandatory everywhere. It is useful where values describe one thing together.</a:t>
+            </a:r>
+            <a:endParaRPr lang="en-US" sz="1720" dirty="0"/>
           </a:p>
         </p:txBody>
       </p:sp>
@@ -10874,7 +11065,7 @@
                 <a:ea typeface="Consolas" pitchFamily="34" charset="-122"/>
                 <a:cs typeface="Consolas" pitchFamily="34" charset="-120"/>
               </a:rPr>
-              <a:t>21 / 27</a:t>
+              <a:t>21 / 26</a:t>
             </a:r>
             <a:endParaRPr lang="en-US" sz="780" dirty="0"/>
           </a:p>
@@ -10915,7 +11106,7 @@
                 <a:ea typeface="Aptos Display" pitchFamily="34" charset="-122"/>
                 <a:cs typeface="Aptos Display" pitchFamily="34" charset="-120"/>
               </a:rPr>
-              <a:t>dataclass names a domain object</a:t>
+              <a:t>An operation can fail</a:t>
             </a:r>
             <a:endParaRPr lang="en-US" sz="2850" dirty="0"/>
           </a:p>
@@ -10923,24 +11114,65 @@
       </p:sp>
       <p:sp>
         <p:nvSpPr>
-          <p:cNvPr id="9" name="Shape 7"/>
-          <p:cNvSpPr/>
-          <p:nvPr/>
-        </p:nvSpPr>
-        <p:spPr>
-          <a:xfrm>
-            <a:off x="658368" y="1828800"/>
-            <a:ext cx="6903720" cy="4069080"/>
+          <p:cNvPr id="9" name="Text 7"/>
+          <p:cNvSpPr/>
+          <p:nvPr/>
+        </p:nvSpPr>
+        <p:spPr>
+          <a:xfrm>
+            <a:off x="694944" y="1700784"/>
+            <a:ext cx="9784080" cy="420624"/>
+          </a:xfrm>
+          <a:prstGeom prst="rect">
+            <a:avLst/>
+          </a:prstGeom>
+          <a:noFill/>
+          <a:ln/>
+        </p:spPr>
+        <p:txBody>
+          <a:bodyPr wrap="square" lIns="0" tIns="0" rIns="0" bIns="0" rtlCol="0" anchor="t">
+            <a:normAutofit/>
+          </a:bodyPr>
+          <a:lstStyle/>
+          <a:p>
+            <a:pPr algn="l" indent="0" marL="0">
+              <a:buNone/>
+            </a:pPr>
+            <a:r>
+              <a:rPr lang="en-US" sz="1850" dirty="0">
+                <a:solidFill>
+                  <a:srgbClr val="5E6B78"/>
+                </a:solidFill>
+                <a:latin typeface="Aptos" pitchFamily="34" charset="0"/>
+                <a:ea typeface="Aptos" pitchFamily="34" charset="-122"/>
+                <a:cs typeface="Aptos" pitchFamily="34" charset="-120"/>
+              </a:rPr>
+              <a:t>Catch only a specific error for which we can reasonably help the calling code.</a:t>
+            </a:r>
+            <a:endParaRPr lang="en-US" sz="1850" dirty="0"/>
+          </a:p>
+        </p:txBody>
+      </p:sp>
+      <p:sp>
+        <p:nvSpPr>
+          <p:cNvPr id="10" name="Shape 8"/>
+          <p:cNvSpPr/>
+          <p:nvPr/>
+        </p:nvSpPr>
+        <p:spPr>
+          <a:xfrm>
+            <a:off x="777240" y="2880360"/>
+            <a:ext cx="2606040" cy="1078992"/>
           </a:xfrm>
           <a:prstGeom prst="rect">
             <a:avLst/>
           </a:prstGeom>
           <a:solidFill>
-            <a:srgbClr val="17212B"/>
+            <a:srgbClr val="F3F6F8"/>
           </a:solidFill>
           <a:ln w="12700">
             <a:solidFill>
-              <a:srgbClr val="243242"/>
+              <a:srgbClr val="D8E0E6"/>
             </a:solidFill>
             <a:prstDash val="solid"/>
           </a:ln>
@@ -10948,257 +11180,79 @@
       </p:sp>
       <p:sp>
         <p:nvSpPr>
-          <p:cNvPr id="10" name="Shape 8"/>
-          <p:cNvSpPr/>
-          <p:nvPr/>
-        </p:nvSpPr>
-        <p:spPr>
-          <a:xfrm>
-            <a:off x="658368" y="1828800"/>
-            <a:ext cx="6903720" cy="347472"/>
-          </a:xfrm>
-          <a:prstGeom prst="rect">
+          <p:cNvPr id="11" name="Text 9"/>
+          <p:cNvSpPr/>
+          <p:nvPr/>
+        </p:nvSpPr>
+        <p:spPr>
+          <a:xfrm>
+            <a:off x="941832" y="3172968"/>
+            <a:ext cx="2267712" cy="502920"/>
+          </a:xfrm>
+          <a:prstGeom prst="rect">
+            <a:avLst/>
+          </a:prstGeom>
+          <a:noFill/>
+          <a:ln/>
+        </p:spPr>
+        <p:txBody>
+          <a:bodyPr wrap="square" lIns="0" tIns="0" rIns="0" bIns="0" rtlCol="0" anchor="ctr">
+            <a:normAutofit/>
+          </a:bodyPr>
+          <a:lstStyle/>
+          <a:p>
+            <a:pPr algn="ctr" indent="0" marL="0">
+              <a:buNone/>
+            </a:pPr>
+            <a:r>
+              <a:rPr lang="en-US" sz="1700" b="1" dirty="0">
+                <a:solidFill>
+                  <a:srgbClr val="16324F"/>
+                </a:solidFill>
+                <a:latin typeface="Aptos" pitchFamily="34" charset="0"/>
+                <a:ea typeface="Aptos" pitchFamily="34" charset="-122"/>
+                <a:cs typeface="Aptos" pitchFamily="34" charset="-120"/>
+              </a:rPr>
+              <a:t>operation</a:t>
+            </a:r>
+            <a:endParaRPr lang="en-US" sz="1700" dirty="0"/>
+          </a:p>
+          <a:p>
+            <a:pPr algn="ctr" indent="0" marL="0">
+              <a:buNone/>
+            </a:pPr>
+            <a:r>
+              <a:rPr lang="en-US" sz="1700" b="1" dirty="0">
+                <a:solidFill>
+                  <a:srgbClr val="16324F"/>
+                </a:solidFill>
+                <a:latin typeface="Aptos" pitchFamily="34" charset="0"/>
+                <a:ea typeface="Aptos" pitchFamily="34" charset="-122"/>
+                <a:cs typeface="Aptos" pitchFamily="34" charset="-120"/>
+              </a:rPr>
+              <a:t>int(raw)</a:t>
+            </a:r>
+            <a:endParaRPr lang="en-US" sz="1700" dirty="0"/>
+          </a:p>
+        </p:txBody>
+      </p:sp>
+      <p:sp>
+        <p:nvSpPr>
+          <p:cNvPr id="12" name="Shape 10"/>
+          <p:cNvSpPr/>
+          <p:nvPr/>
+        </p:nvSpPr>
+        <p:spPr>
+          <a:xfrm>
+            <a:off x="3721608" y="3255264"/>
+            <a:ext cx="228600" cy="292608"/>
+          </a:xfrm>
+          <a:prstGeom prst="chevron">
             <a:avLst/>
           </a:prstGeom>
           <a:solidFill>
-            <a:srgbClr val="223044"/>
+            <a:srgbClr val="1877B9"/>
           </a:solidFill>
-          <a:ln w="12700">
-            <a:solidFill>
-              <a:srgbClr val="223044"/>
-            </a:solidFill>
-            <a:prstDash val="solid"/>
-          </a:ln>
-        </p:spPr>
-      </p:sp>
-      <p:sp>
-        <p:nvSpPr>
-          <p:cNvPr id="11" name="Text 9"/>
-          <p:cNvSpPr/>
-          <p:nvPr/>
-        </p:nvSpPr>
-        <p:spPr>
-          <a:xfrm>
-            <a:off x="868680" y="1947672"/>
-            <a:ext cx="6309360" cy="146304"/>
-          </a:xfrm>
-          <a:prstGeom prst="rect">
-            <a:avLst/>
-          </a:prstGeom>
-          <a:noFill/>
-          <a:ln/>
-        </p:spPr>
-        <p:txBody>
-          <a:bodyPr wrap="square" lIns="0" tIns="0" rIns="0" bIns="0" rtlCol="0" anchor="ctr">
-            <a:normAutofit/>
-          </a:bodyPr>
-          <a:lstStyle/>
-          <a:p>
-            <a:pPr algn="l" indent="0" marL="0">
-              <a:buNone/>
-            </a:pPr>
-            <a:r>
-              <a:rPr lang="en-US" sz="820" b="1" spc="35" kern="0" dirty="0">
-                <a:solidFill>
-                  <a:srgbClr val="8FD3FF"/>
-                </a:solidFill>
-                <a:latin typeface="Consolas" pitchFamily="34" charset="0"/>
-                <a:ea typeface="Consolas" pitchFamily="34" charset="-122"/>
-                <a:cs typeface="Consolas" pitchFamily="34" charset="-120"/>
-              </a:rPr>
-              <a:t>python</a:t>
-            </a:r>
-            <a:endParaRPr lang="en-US" sz="820" dirty="0"/>
-          </a:p>
-        </p:txBody>
-      </p:sp>
-      <p:sp>
-        <p:nvSpPr>
-          <p:cNvPr id="12" name="Text 10"/>
-          <p:cNvSpPr/>
-          <p:nvPr/>
-        </p:nvSpPr>
-        <p:spPr>
-          <a:xfrm>
-            <a:off x="877824" y="2359152"/>
-            <a:ext cx="6382512" cy="3246120"/>
-          </a:xfrm>
-          <a:prstGeom prst="rect">
-            <a:avLst/>
-          </a:prstGeom>
-          <a:noFill/>
-          <a:ln/>
-        </p:spPr>
-        <p:txBody>
-          <a:bodyPr wrap="square" lIns="0" tIns="0" rIns="0" bIns="0" rtlCol="0" anchor="t">
-            <a:normAutofit/>
-          </a:bodyPr>
-          <a:lstStyle/>
-          <a:p>
-            <a:pPr algn="l" indent="0" marL="0">
-              <a:buNone/>
-            </a:pPr>
-            <a:r>
-              <a:rPr lang="en-US" sz="1500" dirty="0">
-                <a:solidFill>
-                  <a:srgbClr val="F4F7FA"/>
-                </a:solidFill>
-                <a:latin typeface="Consolas" pitchFamily="34" charset="0"/>
-                <a:ea typeface="Consolas" pitchFamily="34" charset="-122"/>
-                <a:cs typeface="Consolas" pitchFamily="34" charset="-120"/>
-              </a:rPr>
-              <a:t>from dataclasses import dataclass</a:t>
-            </a:r>
-            <a:endParaRPr lang="en-US" sz="1500" dirty="0"/>
-          </a:p>
-          <a:p>
-            <a:pPr algn="l" indent="0" marL="0">
-              <a:buNone/>
-            </a:pPr>
-            <a:endParaRPr lang="en-US" sz="1500" dirty="0"/>
-          </a:p>
-          <a:p>
-            <a:pPr algn="l" indent="0" marL="0">
-              <a:buNone/>
-            </a:pPr>
-            <a:r>
-              <a:rPr lang="en-US" sz="1500" dirty="0">
-                <a:solidFill>
-                  <a:srgbClr val="F4F7FA"/>
-                </a:solidFill>
-                <a:latin typeface="Consolas" pitchFamily="34" charset="0"/>
-                <a:ea typeface="Consolas" pitchFamily="34" charset="-122"/>
-                <a:cs typeface="Consolas" pitchFamily="34" charset="-120"/>
-              </a:rPr>
-              <a:t>@dataclass</a:t>
-            </a:r>
-            <a:endParaRPr lang="en-US" sz="1500" dirty="0"/>
-          </a:p>
-          <a:p>
-            <a:pPr algn="l" indent="0" marL="0">
-              <a:buNone/>
-            </a:pPr>
-            <a:r>
-              <a:rPr lang="en-US" sz="1500" dirty="0">
-                <a:solidFill>
-                  <a:srgbClr val="F4F7FA"/>
-                </a:solidFill>
-                <a:latin typeface="Consolas" pitchFamily="34" charset="0"/>
-                <a:ea typeface="Consolas" pitchFamily="34" charset="-122"/>
-                <a:cs typeface="Consolas" pitchFamily="34" charset="-120"/>
-              </a:rPr>
-              <a:t>class Result:</a:t>
-            </a:r>
-            <a:endParaRPr lang="en-US" sz="1500" dirty="0"/>
-          </a:p>
-          <a:p>
-            <a:pPr algn="l" indent="0" marL="0">
-              <a:buNone/>
-            </a:pPr>
-            <a:r>
-              <a:rPr lang="en-US" sz="1500" dirty="0">
-                <a:solidFill>
-                  <a:srgbClr val="F4F7FA"/>
-                </a:solidFill>
-                <a:latin typeface="Consolas" pitchFamily="34" charset="0"/>
-                <a:ea typeface="Consolas" pitchFamily="34" charset="-122"/>
-                <a:cs typeface="Consolas" pitchFamily="34" charset="-120"/>
-              </a:rPr>
-              <a:t>    student: str</a:t>
-            </a:r>
-            <a:endParaRPr lang="en-US" sz="1500" dirty="0"/>
-          </a:p>
-          <a:p>
-            <a:pPr algn="l" indent="0" marL="0">
-              <a:buNone/>
-            </a:pPr>
-            <a:r>
-              <a:rPr lang="en-US" sz="1500" dirty="0">
-                <a:solidFill>
-                  <a:srgbClr val="F4F7FA"/>
-                </a:solidFill>
-                <a:latin typeface="Consolas" pitchFamily="34" charset="0"/>
-                <a:ea typeface="Consolas" pitchFamily="34" charset="-122"/>
-                <a:cs typeface="Consolas" pitchFamily="34" charset="-120"/>
-              </a:rPr>
-              <a:t>    course: str</a:t>
-            </a:r>
-            <a:endParaRPr lang="en-US" sz="1500" dirty="0"/>
-          </a:p>
-          <a:p>
-            <a:pPr algn="l" indent="0" marL="0">
-              <a:buNone/>
-            </a:pPr>
-            <a:r>
-              <a:rPr lang="en-US" sz="1500" dirty="0">
-                <a:solidFill>
-                  <a:srgbClr val="F4F7FA"/>
-                </a:solidFill>
-                <a:latin typeface="Consolas" pitchFamily="34" charset="0"/>
-                <a:ea typeface="Consolas" pitchFamily="34" charset="-122"/>
-                <a:cs typeface="Consolas" pitchFamily="34" charset="-120"/>
-              </a:rPr>
-              <a:t>    points: int</a:t>
-            </a:r>
-            <a:endParaRPr lang="en-US" sz="1500" dirty="0"/>
-          </a:p>
-          <a:p>
-            <a:pPr algn="l" indent="0" marL="0">
-              <a:buNone/>
-            </a:pPr>
-            <a:endParaRPr lang="en-US" sz="1500" dirty="0"/>
-          </a:p>
-          <a:p>
-            <a:pPr algn="l" indent="0" marL="0">
-              <a:buNone/>
-            </a:pPr>
-            <a:r>
-              <a:rPr lang="en-US" sz="1500" dirty="0">
-                <a:solidFill>
-                  <a:srgbClr val="F4F7FA"/>
-                </a:solidFill>
-                <a:latin typeface="Consolas" pitchFamily="34" charset="0"/>
-                <a:ea typeface="Consolas" pitchFamily="34" charset="-122"/>
-                <a:cs typeface="Consolas" pitchFamily="34" charset="-120"/>
-              </a:rPr>
-              <a:t>    def passed(self) -&gt; bool:</a:t>
-            </a:r>
-            <a:endParaRPr lang="en-US" sz="1500" dirty="0"/>
-          </a:p>
-          <a:p>
-            <a:pPr algn="l" indent="0" marL="0">
-              <a:buNone/>
-            </a:pPr>
-            <a:r>
-              <a:rPr lang="en-US" sz="1500" dirty="0">
-                <a:solidFill>
-                  <a:srgbClr val="F4F7FA"/>
-                </a:solidFill>
-                <a:latin typeface="Consolas" pitchFamily="34" charset="0"/>
-                <a:ea typeface="Consolas" pitchFamily="34" charset="-122"/>
-                <a:cs typeface="Consolas" pitchFamily="34" charset="-120"/>
-              </a:rPr>
-              <a:t>        return self.points &gt;= 51</a:t>
-            </a:r>
-            <a:endParaRPr lang="en-US" sz="1500" dirty="0"/>
-          </a:p>
-        </p:txBody>
-      </p:sp>
-      <p:sp>
-        <p:nvSpPr>
-          <p:cNvPr id="13" name="Shape 11"/>
-          <p:cNvSpPr/>
-          <p:nvPr/>
-        </p:nvSpPr>
-        <p:spPr>
-          <a:xfrm>
-            <a:off x="7936992" y="1883664"/>
-            <a:ext cx="0" cy="3639312"/>
-          </a:xfrm>
-          <a:prstGeom prst="line">
-            <a:avLst/>
-          </a:prstGeom>
-          <a:noFill/>
           <a:ln w="12700">
             <a:solidFill>
               <a:srgbClr val="1877B9"/>
@@ -11209,42 +11263,216 @@
       </p:sp>
       <p:sp>
         <p:nvSpPr>
+          <p:cNvPr id="13" name="Shape 11"/>
+          <p:cNvSpPr/>
+          <p:nvPr/>
+        </p:nvSpPr>
+        <p:spPr>
+          <a:xfrm>
+            <a:off x="4160520" y="2880360"/>
+            <a:ext cx="2606040" cy="1078992"/>
+          </a:xfrm>
+          <a:prstGeom prst="rect">
+            <a:avLst/>
+          </a:prstGeom>
+          <a:solidFill>
+            <a:srgbClr val="EAF3F7"/>
+          </a:solidFill>
+          <a:ln w="12700">
+            <a:solidFill>
+              <a:srgbClr val="D8E0E6"/>
+            </a:solidFill>
+            <a:prstDash val="solid"/>
+          </a:ln>
+        </p:spPr>
+      </p:sp>
+      <p:sp>
+        <p:nvSpPr>
           <p:cNvPr id="14" name="Text 12"/>
           <p:cNvSpPr/>
           <p:nvPr/>
         </p:nvSpPr>
         <p:spPr>
           <a:xfrm>
-            <a:off x="8229600" y="2084832"/>
-            <a:ext cx="2816352" cy="2514600"/>
-          </a:xfrm>
-          <a:prstGeom prst="rect">
-            <a:avLst/>
-          </a:prstGeom>
-          <a:noFill/>
-          <a:ln/>
-        </p:spPr>
-        <p:txBody>
-          <a:bodyPr wrap="square" lIns="0" tIns="0" rIns="0" bIns="0" rtlCol="0" anchor="t">
-            <a:normAutofit/>
-          </a:bodyPr>
-          <a:lstStyle/>
-          <a:p>
-            <a:pPr algn="l" indent="0" marL="0">
-              <a:buNone/>
-            </a:pPr>
-            <a:r>
-              <a:rPr lang="en-US" sz="1720" dirty="0">
-                <a:solidFill>
-                  <a:srgbClr val="5E6B78"/>
+            <a:off x="4325112" y="3172968"/>
+            <a:ext cx="2267712" cy="502920"/>
+          </a:xfrm>
+          <a:prstGeom prst="rect">
+            <a:avLst/>
+          </a:prstGeom>
+          <a:noFill/>
+          <a:ln/>
+        </p:spPr>
+        <p:txBody>
+          <a:bodyPr wrap="square" lIns="0" tIns="0" rIns="0" bIns="0" rtlCol="0" anchor="ctr">
+            <a:normAutofit/>
+          </a:bodyPr>
+          <a:lstStyle/>
+          <a:p>
+            <a:pPr algn="ctr" indent="0" marL="0">
+              <a:buNone/>
+            </a:pPr>
+            <a:r>
+              <a:rPr lang="en-US" sz="1700" b="1" dirty="0">
+                <a:solidFill>
+                  <a:srgbClr val="16324F"/>
+                </a:solidFill>
+                <a:latin typeface="Consolas" pitchFamily="34" charset="0"/>
+                <a:ea typeface="Consolas" pitchFamily="34" charset="-122"/>
+                <a:cs typeface="Consolas" pitchFamily="34" charset="-120"/>
+              </a:rPr>
+              <a:t>ValueError</a:t>
+            </a:r>
+            <a:endParaRPr lang="en-US" sz="1700" dirty="0"/>
+          </a:p>
+        </p:txBody>
+      </p:sp>
+      <p:sp>
+        <p:nvSpPr>
+          <p:cNvPr id="15" name="Shape 13"/>
+          <p:cNvSpPr/>
+          <p:nvPr/>
+        </p:nvSpPr>
+        <p:spPr>
+          <a:xfrm>
+            <a:off x="7104888" y="3255264"/>
+            <a:ext cx="228600" cy="292608"/>
+          </a:xfrm>
+          <a:prstGeom prst="chevron">
+            <a:avLst/>
+          </a:prstGeom>
+          <a:solidFill>
+            <a:srgbClr val="1877B9"/>
+          </a:solidFill>
+          <a:ln w="12700">
+            <a:solidFill>
+              <a:srgbClr val="1877B9"/>
+            </a:solidFill>
+            <a:prstDash val="solid"/>
+          </a:ln>
+        </p:spPr>
+      </p:sp>
+      <p:sp>
+        <p:nvSpPr>
+          <p:cNvPr id="16" name="Shape 14"/>
+          <p:cNvSpPr/>
+          <p:nvPr/>
+        </p:nvSpPr>
+        <p:spPr>
+          <a:xfrm>
+            <a:off x="7543800" y="2880360"/>
+            <a:ext cx="2606040" cy="1078992"/>
+          </a:xfrm>
+          <a:prstGeom prst="rect">
+            <a:avLst/>
+          </a:prstGeom>
+          <a:solidFill>
+            <a:srgbClr val="F3F6F8"/>
+          </a:solidFill>
+          <a:ln w="12700">
+            <a:solidFill>
+              <a:srgbClr val="D8E0E6"/>
+            </a:solidFill>
+            <a:prstDash val="solid"/>
+          </a:ln>
+        </p:spPr>
+      </p:sp>
+      <p:sp>
+        <p:nvSpPr>
+          <p:cNvPr id="17" name="Text 15"/>
+          <p:cNvSpPr/>
+          <p:nvPr/>
+        </p:nvSpPr>
+        <p:spPr>
+          <a:xfrm>
+            <a:off x="7708392" y="3172968"/>
+            <a:ext cx="2267712" cy="502920"/>
+          </a:xfrm>
+          <a:prstGeom prst="rect">
+            <a:avLst/>
+          </a:prstGeom>
+          <a:noFill/>
+          <a:ln/>
+        </p:spPr>
+        <p:txBody>
+          <a:bodyPr wrap="square" lIns="0" tIns="0" rIns="0" bIns="0" rtlCol="0" anchor="ctr">
+            <a:normAutofit/>
+          </a:bodyPr>
+          <a:lstStyle/>
+          <a:p>
+            <a:pPr algn="ctr" indent="0" marL="0">
+              <a:buNone/>
+            </a:pPr>
+            <a:r>
+              <a:rPr lang="en-US" sz="1700" b="1" dirty="0">
+                <a:solidFill>
+                  <a:srgbClr val="16324F"/>
                 </a:solidFill>
                 <a:latin typeface="Aptos" pitchFamily="34" charset="0"/>
                 <a:ea typeface="Aptos" pitchFamily="34" charset="-122"/>
                 <a:cs typeface="Aptos" pitchFamily="34" charset="-120"/>
               </a:rPr>
-              <a:t>A dataclass is not mandatory everywhere. It is useful where values describe one thing together.</a:t>
-            </a:r>
-            <a:endParaRPr lang="en-US" sz="1720" dirty="0"/>
+              <a:t>the caller receives</a:t>
+            </a:r>
+            <a:endParaRPr lang="en-US" sz="1700" dirty="0"/>
+          </a:p>
+          <a:p>
+            <a:pPr algn="ctr" indent="0" marL="0">
+              <a:buNone/>
+            </a:pPr>
+            <a:r>
+              <a:rPr lang="en-US" sz="1700" b="1" dirty="0">
+                <a:solidFill>
+                  <a:srgbClr val="16324F"/>
+                </a:solidFill>
+                <a:latin typeface="Aptos" pitchFamily="34" charset="0"/>
+                <a:ea typeface="Aptos" pitchFamily="34" charset="-122"/>
+                <a:cs typeface="Aptos" pitchFamily="34" charset="-120"/>
+              </a:rPr>
+              <a:t>a meaningful error</a:t>
+            </a:r>
+            <a:endParaRPr lang="en-US" sz="1700" dirty="0"/>
+          </a:p>
+        </p:txBody>
+      </p:sp>
+      <p:sp>
+        <p:nvSpPr>
+          <p:cNvPr id="18" name="Text 16"/>
+          <p:cNvSpPr/>
+          <p:nvPr/>
+        </p:nvSpPr>
+        <p:spPr>
+          <a:xfrm>
+            <a:off x="786384" y="4828032"/>
+            <a:ext cx="9921240" cy="347472"/>
+          </a:xfrm>
+          <a:prstGeom prst="rect">
+            <a:avLst/>
+          </a:prstGeom>
+          <a:noFill/>
+          <a:ln/>
+        </p:spPr>
+        <p:txBody>
+          <a:bodyPr wrap="square" lIns="0" tIns="0" rIns="0" bIns="0" rtlCol="0" anchor="ctr">
+            <a:normAutofit/>
+          </a:bodyPr>
+          <a:lstStyle/>
+          <a:p>
+            <a:pPr algn="l" indent="0" marL="0">
+              <a:buNone/>
+            </a:pPr>
+            <a:r>
+              <a:rPr lang="en-US" sz="1800" dirty="0">
+                <a:solidFill>
+                  <a:srgbClr val="5E6B78"/>
+                </a:solidFill>
+                <a:latin typeface="Aptos" pitchFamily="34" charset="0"/>
+                <a:ea typeface="Aptos" pitchFamily="34" charset="-122"/>
+                <a:cs typeface="Aptos" pitchFamily="34" charset="-120"/>
+              </a:rPr>
+              <a:t>Not broad except or except: pass. An error should not disappear silently.</a:t>
+            </a:r>
+            <a:endParaRPr lang="en-US" sz="1800" dirty="0"/>
           </a:p>
         </p:txBody>
       </p:sp>
@@ -11468,7 +11696,7 @@
                 <a:ea typeface="Consolas" pitchFamily="34" charset="-122"/>
                 <a:cs typeface="Consolas" pitchFamily="34" charset="-120"/>
               </a:rPr>
-              <a:t>22 / 27</a:t>
+              <a:t>22 / 26</a:t>
             </a:r>
             <a:endParaRPr lang="en-US" sz="780" dirty="0"/>
           </a:p>
@@ -11482,8 +11710,8 @@
         </p:nvSpPr>
         <p:spPr>
           <a:xfrm>
-            <a:off x="749808" y="1481328"/>
-            <a:ext cx="10287000" cy="1554480"/>
+            <a:off x="658368" y="914400"/>
+            <a:ext cx="10881360" cy="713232"/>
           </a:xfrm>
           <a:prstGeom prst="rect">
             <a:avLst/>
@@ -11501,7 +11729,7 @@
               <a:buNone/>
             </a:pPr>
             <a:r>
-              <a:rPr lang="en-US" sz="3300" b="1" dirty="0">
+              <a:rPr lang="en-US" sz="2850" b="1" dirty="0">
                 <a:solidFill>
                   <a:srgbClr val="16324F"/>
                 </a:solidFill>
@@ -11509,32 +11737,110 @@
                 <a:ea typeface="Aptos Display" pitchFamily="34" charset="-122"/>
                 <a:cs typeface="Aptos Display" pitchFamily="34" charset="-120"/>
               </a:rPr>
-              <a:t>An operation can fail. An exception should name the specific problem.</a:t>
-            </a:r>
-            <a:endParaRPr lang="en-US" sz="3300" dirty="0"/>
-          </a:p>
-        </p:txBody>
-      </p:sp>
-      <p:sp>
-        <p:nvSpPr>
-          <p:cNvPr id="9" name="Shape 7"/>
-          <p:cNvSpPr/>
-          <p:nvPr/>
-        </p:nvSpPr>
-        <p:spPr>
-          <a:xfrm>
-            <a:off x="768096" y="3438144"/>
-            <a:ext cx="1280160" cy="91440"/>
+              <a:t>A specific exception, a specific response</a:t>
+            </a:r>
+            <a:endParaRPr lang="en-US" sz="2850" dirty="0"/>
+          </a:p>
+        </p:txBody>
+      </p:sp>
+      <p:sp>
+        <p:nvSpPr>
+          <p:cNvPr id="9" name="Text 7"/>
+          <p:cNvSpPr/>
+          <p:nvPr/>
+        </p:nvSpPr>
+        <p:spPr>
+          <a:xfrm>
+            <a:off x="749808" y="1920240"/>
+            <a:ext cx="4160520" cy="3886200"/>
+          </a:xfrm>
+          <a:prstGeom prst="rect">
+            <a:avLst/>
+          </a:prstGeom>
+          <a:noFill/>
+          <a:ln/>
+        </p:spPr>
+        <p:txBody>
+          <a:bodyPr wrap="square" lIns="508" tIns="508" rIns="508" bIns="508" rtlCol="0" anchor="t">
+            <a:normAutofit/>
+          </a:bodyPr>
+          <a:lstStyle/>
+          <a:p>
+            <a:pPr marL="228600" indent="-228600">
+              <a:buSzPct val="100000"/>
+              <a:buChar char="•"/>
+            </a:pPr>
+            <a:r>
+              <a:rPr lang="en-US" sz="1650" dirty="0">
+                <a:solidFill>
+                  <a:srgbClr val="18212B"/>
+                </a:solidFill>
+                <a:latin typeface="Aptos" pitchFamily="34" charset="0"/>
+                <a:ea typeface="Aptos" pitchFamily="34" charset="-122"/>
+                <a:cs typeface="Aptos" pitchFamily="34" charset="-120"/>
+              </a:rPr>
+              <a:t>int() can fail on non-numeric input</a:t>
+            </a:r>
+            <a:endParaRPr lang="en-US" sz="1650" dirty="0"/>
+          </a:p>
+          <a:p>
+            <a:pPr marL="228600" indent="-228600">
+              <a:buSzPct val="100000"/>
+              <a:buChar char="•"/>
+            </a:pPr>
+            <a:r>
+              <a:rPr lang="en-US" sz="1650" dirty="0">
+                <a:solidFill>
+                  <a:srgbClr val="18212B"/>
+                </a:solidFill>
+                <a:latin typeface="Aptos" pitchFamily="34" charset="0"/>
+                <a:ea typeface="Aptos" pitchFamily="34" charset="-122"/>
+                <a:cs typeface="Aptos" pitchFamily="34" charset="-120"/>
+              </a:rPr>
+              <a:t>ValueError is part of this operation's contract</a:t>
+            </a:r>
+            <a:endParaRPr lang="en-US" sz="1650" dirty="0"/>
+          </a:p>
+          <a:p>
+            <a:pPr marL="228600" indent="-228600">
+              <a:buSzPct val="100000"/>
+              <a:buChar char="•"/>
+            </a:pPr>
+            <a:r>
+              <a:rPr lang="en-US" sz="1650" dirty="0">
+                <a:solidFill>
+                  <a:srgbClr val="18212B"/>
+                </a:solidFill>
+                <a:latin typeface="Aptos" pitchFamily="34" charset="0"/>
+                <a:ea typeface="Aptos" pitchFamily="34" charset="-122"/>
+                <a:cs typeface="Aptos" pitchFamily="34" charset="-120"/>
+              </a:rPr>
+              <a:t>except: pass only hides a problem</a:t>
+            </a:r>
+            <a:endParaRPr lang="en-US" sz="1650" dirty="0"/>
+          </a:p>
+        </p:txBody>
+      </p:sp>
+      <p:sp>
+        <p:nvSpPr>
+          <p:cNvPr id="10" name="Shape 8"/>
+          <p:cNvSpPr/>
+          <p:nvPr/>
+        </p:nvSpPr>
+        <p:spPr>
+          <a:xfrm>
+            <a:off x="5413248" y="1792224"/>
+            <a:ext cx="5925312" cy="4160520"/>
           </a:xfrm>
           <a:prstGeom prst="rect">
             <a:avLst/>
           </a:prstGeom>
           <a:solidFill>
-            <a:srgbClr val="E0A03A"/>
+            <a:srgbClr val="17212B"/>
           </a:solidFill>
           <a:ln w="12700">
             <a:solidFill>
-              <a:srgbClr val="E0A03A"/>
+              <a:srgbClr val="243242"/>
             </a:solidFill>
             <a:prstDash val="solid"/>
           </a:ln>
@@ -11542,14 +11848,80 @@
       </p:sp>
       <p:sp>
         <p:nvSpPr>
-          <p:cNvPr id="10" name="Text 8"/>
-          <p:cNvSpPr/>
-          <p:nvPr/>
-        </p:nvSpPr>
-        <p:spPr>
-          <a:xfrm>
-            <a:off x="768096" y="3858768"/>
-            <a:ext cx="9006840" cy="804672"/>
+          <p:cNvPr id="11" name="Shape 9"/>
+          <p:cNvSpPr/>
+          <p:nvPr/>
+        </p:nvSpPr>
+        <p:spPr>
+          <a:xfrm>
+            <a:off x="5413248" y="1792224"/>
+            <a:ext cx="5925312" cy="329184"/>
+          </a:xfrm>
+          <a:prstGeom prst="rect">
+            <a:avLst/>
+          </a:prstGeom>
+          <a:solidFill>
+            <a:srgbClr val="223044"/>
+          </a:solidFill>
+          <a:ln w="12700">
+            <a:solidFill>
+              <a:srgbClr val="223044"/>
+            </a:solidFill>
+            <a:prstDash val="solid"/>
+          </a:ln>
+        </p:spPr>
+      </p:sp>
+      <p:sp>
+        <p:nvSpPr>
+          <p:cNvPr id="12" name="Text 10"/>
+          <p:cNvSpPr/>
+          <p:nvPr/>
+        </p:nvSpPr>
+        <p:spPr>
+          <a:xfrm>
+            <a:off x="5641848" y="1901952"/>
+            <a:ext cx="5394960" cy="146304"/>
+          </a:xfrm>
+          <a:prstGeom prst="rect">
+            <a:avLst/>
+          </a:prstGeom>
+          <a:noFill/>
+          <a:ln/>
+        </p:spPr>
+        <p:txBody>
+          <a:bodyPr wrap="square" lIns="0" tIns="0" rIns="0" bIns="0" rtlCol="0" anchor="ctr">
+            <a:normAutofit/>
+          </a:bodyPr>
+          <a:lstStyle/>
+          <a:p>
+            <a:pPr algn="l" indent="0" marL="0">
+              <a:buNone/>
+            </a:pPr>
+            <a:r>
+              <a:rPr lang="en-US" sz="810" b="1" spc="35" kern="0" dirty="0">
+                <a:solidFill>
+                  <a:srgbClr val="8FD3FF"/>
+                </a:solidFill>
+                <a:latin typeface="Consolas" pitchFamily="34" charset="0"/>
+                <a:ea typeface="Consolas" pitchFamily="34" charset="-122"/>
+                <a:cs typeface="Consolas" pitchFamily="34" charset="-120"/>
+              </a:rPr>
+              <a:t>python</a:t>
+            </a:r>
+            <a:endParaRPr lang="en-US" sz="810" dirty="0"/>
+          </a:p>
+        </p:txBody>
+      </p:sp>
+      <p:sp>
+        <p:nvSpPr>
+          <p:cNvPr id="13" name="Text 11"/>
+          <p:cNvSpPr/>
+          <p:nvPr/>
+        </p:nvSpPr>
+        <p:spPr>
+          <a:xfrm>
+            <a:off x="5641848" y="2331720"/>
+            <a:ext cx="5340096" cy="3182112"/>
           </a:xfrm>
           <a:prstGeom prst="rect">
             <a:avLst/>
@@ -11567,17 +11939,119 @@
               <a:buNone/>
             </a:pPr>
             <a:r>
-              <a:rPr lang="en-US" sz="2100" dirty="0">
-                <a:solidFill>
-                  <a:srgbClr val="5E6B78"/>
-                </a:solidFill>
-                <a:latin typeface="Aptos" pitchFamily="34" charset="0"/>
-                <a:ea typeface="Aptos" pitchFamily="34" charset="-122"/>
-                <a:cs typeface="Aptos" pitchFamily="34" charset="-120"/>
-              </a:rPr>
-              <a:t>Catch only an error for which we can reasonably help the user or calling code.</a:t>
-            </a:r>
-            <a:endParaRPr lang="en-US" sz="2100" dirty="0"/>
+              <a:rPr lang="en-US" sz="1520" dirty="0">
+                <a:solidFill>
+                  <a:srgbClr val="F4F7FA"/>
+                </a:solidFill>
+                <a:latin typeface="Consolas" pitchFamily="34" charset="0"/>
+                <a:ea typeface="Consolas" pitchFamily="34" charset="-122"/>
+                <a:cs typeface="Consolas" pitchFamily="34" charset="-120"/>
+              </a:rPr>
+              <a:t>def read_score(raw: str) -&gt; int:</a:t>
+            </a:r>
+            <a:endParaRPr lang="en-US" sz="1520" dirty="0"/>
+          </a:p>
+          <a:p>
+            <a:pPr algn="l" indent="0" marL="0">
+              <a:buNone/>
+            </a:pPr>
+            <a:r>
+              <a:rPr lang="en-US" sz="1520" dirty="0">
+                <a:solidFill>
+                  <a:srgbClr val="F4F7FA"/>
+                </a:solidFill>
+                <a:latin typeface="Consolas" pitchFamily="34" charset="0"/>
+                <a:ea typeface="Consolas" pitchFamily="34" charset="-122"/>
+                <a:cs typeface="Consolas" pitchFamily="34" charset="-120"/>
+              </a:rPr>
+              <a:t>    try:</a:t>
+            </a:r>
+            <a:endParaRPr lang="en-US" sz="1520" dirty="0"/>
+          </a:p>
+          <a:p>
+            <a:pPr algn="l" indent="0" marL="0">
+              <a:buNone/>
+            </a:pPr>
+            <a:r>
+              <a:rPr lang="en-US" sz="1520" dirty="0">
+                <a:solidFill>
+                  <a:srgbClr val="F4F7FA"/>
+                </a:solidFill>
+                <a:latin typeface="Consolas" pitchFamily="34" charset="0"/>
+                <a:ea typeface="Consolas" pitchFamily="34" charset="-122"/>
+                <a:cs typeface="Consolas" pitchFamily="34" charset="-120"/>
+              </a:rPr>
+              <a:t>        return int(raw)</a:t>
+            </a:r>
+            <a:endParaRPr lang="en-US" sz="1520" dirty="0"/>
+          </a:p>
+          <a:p>
+            <a:pPr algn="l" indent="0" marL="0">
+              <a:buNone/>
+            </a:pPr>
+            <a:r>
+              <a:rPr lang="en-US" sz="1520" dirty="0">
+                <a:solidFill>
+                  <a:srgbClr val="F4F7FA"/>
+                </a:solidFill>
+                <a:latin typeface="Consolas" pitchFamily="34" charset="0"/>
+                <a:ea typeface="Consolas" pitchFamily="34" charset="-122"/>
+                <a:cs typeface="Consolas" pitchFamily="34" charset="-120"/>
+              </a:rPr>
+              <a:t>    except ValueError as error:</a:t>
+            </a:r>
+            <a:endParaRPr lang="en-US" sz="1520" dirty="0"/>
+          </a:p>
+          <a:p>
+            <a:pPr algn="l" indent="0" marL="0">
+              <a:buNone/>
+            </a:pPr>
+            <a:r>
+              <a:rPr lang="en-US" sz="1520" dirty="0">
+                <a:solidFill>
+                  <a:srgbClr val="F4F7FA"/>
+                </a:solidFill>
+                <a:latin typeface="Consolas" pitchFamily="34" charset="0"/>
+                <a:ea typeface="Consolas" pitchFamily="34" charset="-122"/>
+                <a:cs typeface="Consolas" pitchFamily="34" charset="-120"/>
+              </a:rPr>
+              <a:t>        raise ValueError(</a:t>
+            </a:r>
+            <a:endParaRPr lang="en-US" sz="1520" dirty="0"/>
+          </a:p>
+          <a:p>
+            <a:pPr algn="l" indent="0" marL="0">
+              <a:buNone/>
+            </a:pPr>
+            <a:r>
+              <a:rPr lang="en-US" sz="1520" dirty="0">
+                <a:solidFill>
+                  <a:srgbClr val="F4F7FA"/>
+                </a:solidFill>
+                <a:latin typeface="Consolas" pitchFamily="34" charset="0"/>
+                <a:ea typeface="Consolas" pitchFamily="34" charset="-122"/>
+                <a:cs typeface="Consolas" pitchFamily="34" charset="-120"/>
+              </a:rPr>
+              <a:t>            "score must be an integer"</a:t>
+            </a:r>
+            <a:endParaRPr lang="en-US" sz="1520" dirty="0"/>
+          </a:p>
+          <a:p>
+            <a:pPr algn="l" indent="0" marL="0">
+              <a:buNone/>
+            </a:pPr>
+            <a:r>
+              <a:rPr lang="en-US" sz="1520" dirty="0">
+                <a:solidFill>
+                  <a:srgbClr val="F4F7FA"/>
+                </a:solidFill>
+                <a:latin typeface="Consolas" pitchFamily="34" charset="0"/>
+                <a:ea typeface="Consolas" pitchFamily="34" charset="-122"/>
+                <a:cs typeface="Consolas" pitchFamily="34" charset="-120"/>
+              </a:rPr>
+              <a:t>        ) from error</a:t>
+            </a:r>
+            <a:endParaRPr lang="en-US" sz="1520" dirty="0"/>
           </a:p>
         </p:txBody>
       </p:sp>
@@ -11801,7 +12275,7 @@
                 <a:ea typeface="Consolas" pitchFamily="34" charset="-122"/>
                 <a:cs typeface="Consolas" pitchFamily="34" charset="-120"/>
               </a:rPr>
-              <a:t>23 / 27</a:t>
+              <a:t>23 / 26</a:t>
             </a:r>
             <a:endParaRPr lang="en-US" sz="780" dirty="0"/>
           </a:p>
@@ -11842,7 +12316,7 @@
                 <a:ea typeface="Aptos Display" pitchFamily="34" charset="-122"/>
                 <a:cs typeface="Aptos Display" pitchFamily="34" charset="-120"/>
               </a:rPr>
-              <a:t>A specific exception, a specific response</a:t>
+              <a:t>A module is a code interface</a:t>
             </a:r>
             <a:endParaRPr lang="en-US" sz="2850" dirty="0"/>
           </a:p>
@@ -11884,7 +12358,7 @@
                 <a:ea typeface="Aptos" pitchFamily="34" charset="-122"/>
                 <a:cs typeface="Aptos" pitchFamily="34" charset="-120"/>
               </a:rPr>
-              <a:t>int() can fail on non-numeric input</a:t>
+              <a:t>import only public functionality</a:t>
             </a:r>
             <a:endParaRPr lang="en-US" sz="1650" dirty="0"/>
           </a:p>
@@ -11902,7 +12376,7 @@
                 <a:ea typeface="Aptos" pitchFamily="34" charset="-122"/>
                 <a:cs typeface="Aptos" pitchFamily="34" charset="-120"/>
               </a:rPr>
-              <a:t>ValueError is part of this operation's contract</a:t>
+              <a:t>main() separates program execution from import</a:t>
             </a:r>
             <a:endParaRPr lang="en-US" sz="1650" dirty="0"/>
           </a:p>
@@ -11920,7 +12394,7 @@
                 <a:ea typeface="Aptos" pitchFamily="34" charset="-122"/>
                 <a:cs typeface="Aptos" pitchFamily="34" charset="-120"/>
               </a:rPr>
-              <a:t>except: pass only hides a problem</a:t>
+              <a:t>functions can then be tested without a terminal</a:t>
             </a:r>
             <a:endParaRPr lang="en-US" sz="1650" dirty="0"/>
           </a:p>
@@ -12052,8 +12526,14 @@
                 <a:ea typeface="Consolas" pitchFamily="34" charset="-122"/>
                 <a:cs typeface="Consolas" pitchFamily="34" charset="-120"/>
               </a:rPr>
-              <a:t>def read_score(raw: str) -&gt; int:</a:t>
-            </a:r>
+              <a:t>from report import build_summary</a:t>
+            </a:r>
+            <a:endParaRPr lang="en-US" sz="1520" dirty="0"/>
+          </a:p>
+          <a:p>
+            <a:pPr algn="l" indent="0" marL="0">
+              <a:buNone/>
+            </a:pPr>
             <a:endParaRPr lang="en-US" sz="1520" dirty="0"/>
           </a:p>
           <a:p>
@@ -12069,7 +12549,7 @@
                 <a:ea typeface="Consolas" pitchFamily="34" charset="-122"/>
                 <a:cs typeface="Consolas" pitchFamily="34" charset="-120"/>
               </a:rPr>
-              <a:t>    try:</a:t>
+              <a:t>def main() -&gt; None:</a:t>
             </a:r>
             <a:endParaRPr lang="en-US" sz="1520" dirty="0"/>
           </a:p>
@@ -12086,7 +12566,7 @@
                 <a:ea typeface="Consolas" pitchFamily="34" charset="-122"/>
                 <a:cs typeface="Consolas" pitchFamily="34" charset="-120"/>
               </a:rPr>
-              <a:t>        return int(raw)</a:t>
+              <a:t>    summary = build_summary("results.csv")</a:t>
             </a:r>
             <a:endParaRPr lang="en-US" sz="1520" dirty="0"/>
           </a:p>
@@ -12103,8 +12583,14 @@
                 <a:ea typeface="Consolas" pitchFamily="34" charset="-122"/>
                 <a:cs typeface="Consolas" pitchFamily="34" charset="-120"/>
               </a:rPr>
-              <a:t>    except ValueError as error:</a:t>
-            </a:r>
+              <a:t>    print(summary)</a:t>
+            </a:r>
+            <a:endParaRPr lang="en-US" sz="1520" dirty="0"/>
+          </a:p>
+          <a:p>
+            <a:pPr algn="l" indent="0" marL="0">
+              <a:buNone/>
+            </a:pPr>
             <a:endParaRPr lang="en-US" sz="1520" dirty="0"/>
           </a:p>
           <a:p>
@@ -12120,7 +12606,7 @@
                 <a:ea typeface="Consolas" pitchFamily="34" charset="-122"/>
                 <a:cs typeface="Consolas" pitchFamily="34" charset="-120"/>
               </a:rPr>
-              <a:t>        raise ValueError(</a:t>
+              <a:t>if __name__ == "__main__":</a:t>
             </a:r>
             <a:endParaRPr lang="en-US" sz="1520" dirty="0"/>
           </a:p>
@@ -12137,24 +12623,7 @@
                 <a:ea typeface="Consolas" pitchFamily="34" charset="-122"/>
                 <a:cs typeface="Consolas" pitchFamily="34" charset="-120"/>
               </a:rPr>
-              <a:t>            "score must be an integer"</a:t>
-            </a:r>
-            <a:endParaRPr lang="en-US" sz="1520" dirty="0"/>
-          </a:p>
-          <a:p>
-            <a:pPr algn="l" indent="0" marL="0">
-              <a:buNone/>
-            </a:pPr>
-            <a:r>
-              <a:rPr lang="en-US" sz="1520" dirty="0">
-                <a:solidFill>
-                  <a:srgbClr val="F4F7FA"/>
-                </a:solidFill>
-                <a:latin typeface="Consolas" pitchFamily="34" charset="0"/>
-                <a:ea typeface="Consolas" pitchFamily="34" charset="-122"/>
-                <a:cs typeface="Consolas" pitchFamily="34" charset="-120"/>
-              </a:rPr>
-              <a:t>        ) from error</a:t>
+              <a:t>    main()</a:t>
             </a:r>
             <a:endParaRPr lang="en-US" sz="1520" dirty="0"/>
           </a:p>
@@ -12380,7 +12849,7 @@
                 <a:ea typeface="Consolas" pitchFamily="34" charset="-122"/>
                 <a:cs typeface="Consolas" pitchFamily="34" charset="-120"/>
               </a:rPr>
-              <a:t>24 / 27</a:t>
+              <a:t>24 / 26</a:t>
             </a:r>
             <a:endParaRPr lang="en-US" sz="780" dirty="0"/>
           </a:p>
@@ -12421,7 +12890,7 @@
                 <a:ea typeface="Aptos Display" pitchFamily="34" charset="-122"/>
                 <a:cs typeface="Aptos Display" pitchFamily="34" charset="-120"/>
               </a:rPr>
-              <a:t>A module is a code interface</a:t>
+              <a:t>A project needs its own environment</a:t>
             </a:r>
             <a:endParaRPr lang="en-US" sz="2850" dirty="0"/>
           </a:p>
@@ -12429,92 +12898,14 @@
       </p:sp>
       <p:sp>
         <p:nvSpPr>
-          <p:cNvPr id="9" name="Text 7"/>
-          <p:cNvSpPr/>
-          <p:nvPr/>
-        </p:nvSpPr>
-        <p:spPr>
-          <a:xfrm>
-            <a:off x="749808" y="1920240"/>
-            <a:ext cx="4160520" cy="3886200"/>
-          </a:xfrm>
-          <a:prstGeom prst="rect">
-            <a:avLst/>
-          </a:prstGeom>
-          <a:noFill/>
-          <a:ln/>
-        </p:spPr>
-        <p:txBody>
-          <a:bodyPr wrap="square" lIns="508" tIns="508" rIns="508" bIns="508" rtlCol="0" anchor="t">
-            <a:normAutofit/>
-          </a:bodyPr>
-          <a:lstStyle/>
-          <a:p>
-            <a:pPr marL="228600" indent="-228600">
-              <a:buSzPct val="100000"/>
-              <a:buChar char="•"/>
-            </a:pPr>
-            <a:r>
-              <a:rPr lang="en-US" sz="1650" dirty="0">
-                <a:solidFill>
-                  <a:srgbClr val="18212B"/>
-                </a:solidFill>
-                <a:latin typeface="Aptos" pitchFamily="34" charset="0"/>
-                <a:ea typeface="Aptos" pitchFamily="34" charset="-122"/>
-                <a:cs typeface="Aptos" pitchFamily="34" charset="-120"/>
-              </a:rPr>
-              <a:t>import only public functionality</a:t>
-            </a:r>
-            <a:endParaRPr lang="en-US" sz="1650" dirty="0"/>
-          </a:p>
-          <a:p>
-            <a:pPr marL="228600" indent="-228600">
-              <a:buSzPct val="100000"/>
-              <a:buChar char="•"/>
-            </a:pPr>
-            <a:r>
-              <a:rPr lang="en-US" sz="1650" dirty="0">
-                <a:solidFill>
-                  <a:srgbClr val="18212B"/>
-                </a:solidFill>
-                <a:latin typeface="Aptos" pitchFamily="34" charset="0"/>
-                <a:ea typeface="Aptos" pitchFamily="34" charset="-122"/>
-                <a:cs typeface="Aptos" pitchFamily="34" charset="-120"/>
-              </a:rPr>
-              <a:t>main() separates program execution from import</a:t>
-            </a:r>
-            <a:endParaRPr lang="en-US" sz="1650" dirty="0"/>
-          </a:p>
-          <a:p>
-            <a:pPr marL="228600" indent="-228600">
-              <a:buSzPct val="100000"/>
-              <a:buChar char="•"/>
-            </a:pPr>
-            <a:r>
-              <a:rPr lang="en-US" sz="1650" dirty="0">
-                <a:solidFill>
-                  <a:srgbClr val="18212B"/>
-                </a:solidFill>
-                <a:latin typeface="Aptos" pitchFamily="34" charset="0"/>
-                <a:ea typeface="Aptos" pitchFamily="34" charset="-122"/>
-                <a:cs typeface="Aptos" pitchFamily="34" charset="-120"/>
-              </a:rPr>
-              <a:t>functions can then be tested without a terminal</a:t>
-            </a:r>
-            <a:endParaRPr lang="en-US" sz="1650" dirty="0"/>
-          </a:p>
-        </p:txBody>
-      </p:sp>
-      <p:sp>
-        <p:nvSpPr>
-          <p:cNvPr id="10" name="Shape 8"/>
-          <p:cNvSpPr/>
-          <p:nvPr/>
-        </p:nvSpPr>
-        <p:spPr>
-          <a:xfrm>
-            <a:off x="5413248" y="1792224"/>
-            <a:ext cx="5925312" cy="4160520"/>
+          <p:cNvPr id="9" name="Shape 7"/>
+          <p:cNvSpPr/>
+          <p:nvPr/>
+        </p:nvSpPr>
+        <p:spPr>
+          <a:xfrm>
+            <a:off x="658368" y="1828800"/>
+            <a:ext cx="5193792" cy="3145536"/>
           </a:xfrm>
           <a:prstGeom prst="rect">
             <a:avLst/>
@@ -12532,14 +12923,14 @@
       </p:sp>
       <p:sp>
         <p:nvSpPr>
-          <p:cNvPr id="11" name="Shape 9"/>
-          <p:cNvSpPr/>
-          <p:nvPr/>
-        </p:nvSpPr>
-        <p:spPr>
-          <a:xfrm>
-            <a:off x="5413248" y="1792224"/>
-            <a:ext cx="5925312" cy="329184"/>
+          <p:cNvPr id="10" name="Shape 8"/>
+          <p:cNvSpPr/>
+          <p:nvPr/>
+        </p:nvSpPr>
+        <p:spPr>
+          <a:xfrm>
+            <a:off x="658368" y="1828800"/>
+            <a:ext cx="5193792" cy="347472"/>
           </a:xfrm>
           <a:prstGeom prst="rect">
             <a:avLst/>
@@ -12557,14 +12948,14 @@
       </p:sp>
       <p:sp>
         <p:nvSpPr>
-          <p:cNvPr id="12" name="Text 10"/>
-          <p:cNvSpPr/>
-          <p:nvPr/>
-        </p:nvSpPr>
-        <p:spPr>
-          <a:xfrm>
-            <a:off x="5641848" y="1901952"/>
-            <a:ext cx="5394960" cy="146304"/>
+          <p:cNvPr id="11" name="Text 9"/>
+          <p:cNvSpPr/>
+          <p:nvPr/>
+        </p:nvSpPr>
+        <p:spPr>
+          <a:xfrm>
+            <a:off x="877824" y="1947672"/>
+            <a:ext cx="4754880" cy="155448"/>
           </a:xfrm>
           <a:prstGeom prst="rect">
             <a:avLst/>
@@ -12582,7 +12973,7 @@
               <a:buNone/>
             </a:pPr>
             <a:r>
-              <a:rPr lang="en-US" sz="810" b="1" spc="35" kern="0" dirty="0">
+              <a:rPr lang="en-US" sz="810" b="1" spc="30" kern="0" dirty="0">
                 <a:solidFill>
                   <a:srgbClr val="8FD3FF"/>
                 </a:solidFill>
@@ -12590,7 +12981,7 @@
                 <a:ea typeface="Consolas" pitchFamily="34" charset="-122"/>
                 <a:cs typeface="Consolas" pitchFamily="34" charset="-120"/>
               </a:rPr>
-              <a:t>python</a:t>
+              <a:t>COMMANDS</a:t>
             </a:r>
             <a:endParaRPr lang="en-US" sz="810" dirty="0"/>
           </a:p>
@@ -12598,14 +12989,14 @@
       </p:sp>
       <p:sp>
         <p:nvSpPr>
-          <p:cNvPr id="13" name="Text 11"/>
-          <p:cNvSpPr/>
-          <p:nvPr/>
-        </p:nvSpPr>
-        <p:spPr>
-          <a:xfrm>
-            <a:off x="5641848" y="2331720"/>
-            <a:ext cx="5340096" cy="3182112"/>
+          <p:cNvPr id="12" name="Text 10"/>
+          <p:cNvSpPr/>
+          <p:nvPr/>
+        </p:nvSpPr>
+        <p:spPr>
+          <a:xfrm>
+            <a:off x="877824" y="2487168"/>
+            <a:ext cx="4718304" cy="2212848"/>
           </a:xfrm>
           <a:prstGeom prst="rect">
             <a:avLst/>
@@ -12623,7 +13014,7 @@
               <a:buNone/>
             </a:pPr>
             <a:r>
-              <a:rPr lang="en-US" sz="1520" dirty="0">
+              <a:rPr lang="en-US" sz="1660" dirty="0">
                 <a:solidFill>
                   <a:srgbClr val="F4F7FA"/>
                 </a:solidFill>
@@ -12631,22 +13022,16 @@
                 <a:ea typeface="Consolas" pitchFamily="34" charset="-122"/>
                 <a:cs typeface="Consolas" pitchFamily="34" charset="-120"/>
               </a:rPr>
-              <a:t>from report import build_summary</a:t>
-            </a:r>
-            <a:endParaRPr lang="en-US" sz="1520" dirty="0"/>
-          </a:p>
-          <a:p>
-            <a:pPr algn="l" indent="0" marL="0">
-              <a:buNone/>
-            </a:pPr>
-            <a:endParaRPr lang="en-US" sz="1520" dirty="0"/>
-          </a:p>
-          <a:p>
-            <a:pPr algn="l" indent="0" marL="0">
-              <a:buNone/>
-            </a:pPr>
-            <a:r>
-              <a:rPr lang="en-US" sz="1520" dirty="0">
+              <a:t>python -m venv .venv</a:t>
+            </a:r>
+            <a:endParaRPr lang="en-US" sz="1660" dirty="0"/>
+          </a:p>
+          <a:p>
+            <a:pPr algn="l" indent="0" marL="0">
+              <a:buNone/>
+            </a:pPr>
+            <a:r>
+              <a:rPr lang="en-US" sz="1660" dirty="0">
                 <a:solidFill>
                   <a:srgbClr val="F4F7FA"/>
                 </a:solidFill>
@@ -12654,16 +13039,16 @@
                 <a:ea typeface="Consolas" pitchFamily="34" charset="-122"/>
                 <a:cs typeface="Consolas" pitchFamily="34" charset="-120"/>
               </a:rPr>
-              <a:t>def main() -&gt; None:</a:t>
-            </a:r>
-            <a:endParaRPr lang="en-US" sz="1520" dirty="0"/>
-          </a:p>
-          <a:p>
-            <a:pPr algn="l" indent="0" marL="0">
-              <a:buNone/>
-            </a:pPr>
-            <a:r>
-              <a:rPr lang="en-US" sz="1520" dirty="0">
+              <a:t># Windows</a:t>
+            </a:r>
+            <a:endParaRPr lang="en-US" sz="1660" dirty="0"/>
+          </a:p>
+          <a:p>
+            <a:pPr algn="l" indent="0" marL="0">
+              <a:buNone/>
+            </a:pPr>
+            <a:r>
+              <a:rPr lang="en-US" sz="1660" dirty="0">
                 <a:solidFill>
                   <a:srgbClr val="F4F7FA"/>
                 </a:solidFill>
@@ -12671,16 +13056,22 @@
                 <a:ea typeface="Consolas" pitchFamily="34" charset="-122"/>
                 <a:cs typeface="Consolas" pitchFamily="34" charset="-120"/>
               </a:rPr>
-              <a:t>    summary = build_summary("results.csv")</a:t>
-            </a:r>
-            <a:endParaRPr lang="en-US" sz="1520" dirty="0"/>
-          </a:p>
-          <a:p>
-            <a:pPr algn="l" indent="0" marL="0">
-              <a:buNone/>
-            </a:pPr>
-            <a:r>
-              <a:rPr lang="en-US" sz="1520" dirty="0">
+              <a:t>.venv\Scripts\activate</a:t>
+            </a:r>
+            <a:endParaRPr lang="en-US" sz="1660" dirty="0"/>
+          </a:p>
+          <a:p>
+            <a:pPr algn="l" indent="0" marL="0">
+              <a:buNone/>
+            </a:pPr>
+            <a:endParaRPr lang="en-US" sz="1660" dirty="0"/>
+          </a:p>
+          <a:p>
+            <a:pPr algn="l" indent="0" marL="0">
+              <a:buNone/>
+            </a:pPr>
+            <a:r>
+              <a:rPr lang="en-US" sz="1660" dirty="0">
                 <a:solidFill>
                   <a:srgbClr val="F4F7FA"/>
                 </a:solidFill>
@@ -12688,39 +13079,131 @@
                 <a:ea typeface="Consolas" pitchFamily="34" charset="-122"/>
                 <a:cs typeface="Consolas" pitchFamily="34" charset="-120"/>
               </a:rPr>
-              <a:t>    print(summary)</a:t>
-            </a:r>
-            <a:endParaRPr lang="en-US" sz="1520" dirty="0"/>
-          </a:p>
-          <a:p>
-            <a:pPr algn="l" indent="0" marL="0">
-              <a:buNone/>
-            </a:pPr>
-            <a:endParaRPr lang="en-US" sz="1520" dirty="0"/>
-          </a:p>
-          <a:p>
-            <a:pPr algn="l" indent="0" marL="0">
-              <a:buNone/>
-            </a:pPr>
-            <a:r>
-              <a:rPr lang="en-US" sz="1520" dirty="0">
-                <a:solidFill>
-                  <a:srgbClr val="F4F7FA"/>
+              <a:t>python -m pip install httpx</a:t>
+            </a:r>
+            <a:endParaRPr lang="en-US" sz="1660" dirty="0"/>
+          </a:p>
+        </p:txBody>
+      </p:sp>
+      <p:sp>
+        <p:nvSpPr>
+          <p:cNvPr id="13" name="Shape 11"/>
+          <p:cNvSpPr/>
+          <p:nvPr/>
+        </p:nvSpPr>
+        <p:spPr>
+          <a:xfrm>
+            <a:off x="6336792" y="1828800"/>
+            <a:ext cx="5193792" cy="3145536"/>
+          </a:xfrm>
+          <a:prstGeom prst="rect">
+            <a:avLst/>
+          </a:prstGeom>
+          <a:solidFill>
+            <a:srgbClr val="17212B"/>
+          </a:solidFill>
+          <a:ln w="12700">
+            <a:solidFill>
+              <a:srgbClr val="243242"/>
+            </a:solidFill>
+            <a:prstDash val="solid"/>
+          </a:ln>
+        </p:spPr>
+      </p:sp>
+      <p:sp>
+        <p:nvSpPr>
+          <p:cNvPr id="14" name="Shape 12"/>
+          <p:cNvSpPr/>
+          <p:nvPr/>
+        </p:nvSpPr>
+        <p:spPr>
+          <a:xfrm>
+            <a:off x="6336792" y="1828800"/>
+            <a:ext cx="5193792" cy="347472"/>
+          </a:xfrm>
+          <a:prstGeom prst="rect">
+            <a:avLst/>
+          </a:prstGeom>
+          <a:solidFill>
+            <a:srgbClr val="223044"/>
+          </a:solidFill>
+          <a:ln w="12700">
+            <a:solidFill>
+              <a:srgbClr val="223044"/>
+            </a:solidFill>
+            <a:prstDash val="solid"/>
+          </a:ln>
+        </p:spPr>
+      </p:sp>
+      <p:sp>
+        <p:nvSpPr>
+          <p:cNvPr id="15" name="Text 13"/>
+          <p:cNvSpPr/>
+          <p:nvPr/>
+        </p:nvSpPr>
+        <p:spPr>
+          <a:xfrm>
+            <a:off x="6556248" y="1947672"/>
+            <a:ext cx="4754880" cy="155448"/>
+          </a:xfrm>
+          <a:prstGeom prst="rect">
+            <a:avLst/>
+          </a:prstGeom>
+          <a:noFill/>
+          <a:ln/>
+        </p:spPr>
+        <p:txBody>
+          <a:bodyPr wrap="square" lIns="0" tIns="0" rIns="0" bIns="0" rtlCol="0" anchor="ctr">
+            <a:normAutofit/>
+          </a:bodyPr>
+          <a:lstStyle/>
+          <a:p>
+            <a:pPr algn="l" indent="0" marL="0">
+              <a:buNone/>
+            </a:pPr>
+            <a:r>
+              <a:rPr lang="en-US" sz="810" b="1" spc="30" kern="0" dirty="0">
+                <a:solidFill>
+                  <a:srgbClr val="8FD3FF"/>
                 </a:solidFill>
                 <a:latin typeface="Consolas" pitchFamily="34" charset="0"/>
                 <a:ea typeface="Consolas" pitchFamily="34" charset="-122"/>
                 <a:cs typeface="Consolas" pitchFamily="34" charset="-120"/>
               </a:rPr>
-              <a:t>if __name__ == "__main__":</a:t>
-            </a:r>
-            <a:endParaRPr lang="en-US" sz="1520" dirty="0"/>
-          </a:p>
-          <a:p>
-            <a:pPr algn="l" indent="0" marL="0">
-              <a:buNone/>
-            </a:pPr>
-            <a:r>
-              <a:rPr lang="en-US" sz="1520" dirty="0">
+              <a:t>pyproject.toml</a:t>
+            </a:r>
+            <a:endParaRPr lang="en-US" sz="810" dirty="0"/>
+          </a:p>
+        </p:txBody>
+      </p:sp>
+      <p:sp>
+        <p:nvSpPr>
+          <p:cNvPr id="16" name="Text 14"/>
+          <p:cNvSpPr/>
+          <p:nvPr/>
+        </p:nvSpPr>
+        <p:spPr>
+          <a:xfrm>
+            <a:off x="6556248" y="2487168"/>
+            <a:ext cx="4718304" cy="2212848"/>
+          </a:xfrm>
+          <a:prstGeom prst="rect">
+            <a:avLst/>
+          </a:prstGeom>
+          <a:noFill/>
+          <a:ln/>
+        </p:spPr>
+        <p:txBody>
+          <a:bodyPr wrap="square" lIns="0" tIns="0" rIns="0" bIns="0" rtlCol="0" anchor="t">
+            <a:normAutofit/>
+          </a:bodyPr>
+          <a:lstStyle/>
+          <a:p>
+            <a:pPr algn="l" indent="0" marL="0">
+              <a:buNone/>
+            </a:pPr>
+            <a:r>
+              <a:rPr lang="en-US" sz="1660" dirty="0">
                 <a:solidFill>
                   <a:srgbClr val="F4F7FA"/>
                 </a:solidFill>
@@ -12728,9 +13211,84 @@
                 <a:ea typeface="Consolas" pitchFamily="34" charset="-122"/>
                 <a:cs typeface="Consolas" pitchFamily="34" charset="-120"/>
               </a:rPr>
-              <a:t>    main()</a:t>
-            </a:r>
-            <a:endParaRPr lang="en-US" sz="1520" dirty="0"/>
+              <a:t>[project]</a:t>
+            </a:r>
+            <a:endParaRPr lang="en-US" sz="1660" dirty="0"/>
+          </a:p>
+          <a:p>
+            <a:pPr algn="l" indent="0" marL="0">
+              <a:buNone/>
+            </a:pPr>
+            <a:r>
+              <a:rPr lang="en-US" sz="1660" dirty="0">
+                <a:solidFill>
+                  <a:srgbClr val="F4F7FA"/>
+                </a:solidFill>
+                <a:latin typeface="Consolas" pitchFamily="34" charset="0"/>
+                <a:ea typeface="Consolas" pitchFamily="34" charset="-122"/>
+                <a:cs typeface="Consolas" pitchFamily="34" charset="-120"/>
+              </a:rPr>
+              <a:t>name = "course-report"</a:t>
+            </a:r>
+            <a:endParaRPr lang="en-US" sz="1660" dirty="0"/>
+          </a:p>
+          <a:p>
+            <a:pPr algn="l" indent="0" marL="0">
+              <a:buNone/>
+            </a:pPr>
+            <a:r>
+              <a:rPr lang="en-US" sz="1660" dirty="0">
+                <a:solidFill>
+                  <a:srgbClr val="F4F7FA"/>
+                </a:solidFill>
+                <a:latin typeface="Consolas" pitchFamily="34" charset="0"/>
+                <a:ea typeface="Consolas" pitchFamily="34" charset="-122"/>
+                <a:cs typeface="Consolas" pitchFamily="34" charset="-120"/>
+              </a:rPr>
+              <a:t>dependencies = ["httpx&gt;=0.27"]</a:t>
+            </a:r>
+            <a:endParaRPr lang="en-US" sz="1660" dirty="0"/>
+          </a:p>
+        </p:txBody>
+      </p:sp>
+      <p:sp>
+        <p:nvSpPr>
+          <p:cNvPr id="17" name="Text 15"/>
+          <p:cNvSpPr/>
+          <p:nvPr/>
+        </p:nvSpPr>
+        <p:spPr>
+          <a:xfrm>
+            <a:off x="749808" y="5440680"/>
+            <a:ext cx="10149840" cy="402336"/>
+          </a:xfrm>
+          <a:prstGeom prst="rect">
+            <a:avLst/>
+          </a:prstGeom>
+          <a:noFill/>
+          <a:ln/>
+        </p:spPr>
+        <p:txBody>
+          <a:bodyPr wrap="square" lIns="0" tIns="0" rIns="0" bIns="0" rtlCol="0" anchor="t">
+            <a:normAutofit/>
+          </a:bodyPr>
+          <a:lstStyle/>
+          <a:p>
+            <a:pPr algn="l" indent="0" marL="0">
+              <a:buNone/>
+            </a:pPr>
+            <a:r>
+              <a:rPr lang="en-US" sz="1820" dirty="0">
+                <a:solidFill>
+                  <a:srgbClr val="5E6B78"/>
+                </a:solidFill>
+                <a:latin typeface="Aptos" pitchFamily="34" charset="0"/>
+                <a:ea typeface="Aptos" pitchFamily="34" charset="-122"/>
+                <a:cs typeface="Aptos" pitchFamily="34" charset="-120"/>
+              </a:rPr>
+              <a:t>A virtual environment isolates dependencies. pyproject.toml describes what a project needs to run on another computer.</a:t>
+            </a:r>
+            <a:endParaRPr lang="en-US" sz="1820" dirty="0"/>
           </a:p>
         </p:txBody>
       </p:sp>
@@ -12954,7 +13512,7 @@
                 <a:ea typeface="Consolas" pitchFamily="34" charset="-122"/>
                 <a:cs typeface="Consolas" pitchFamily="34" charset="-120"/>
               </a:rPr>
-              <a:t>25 / 27</a:t>
+              <a:t>25 / 26</a:t>
             </a:r>
             <a:endParaRPr lang="en-US" sz="780" dirty="0"/>
           </a:p>
@@ -12995,7 +13553,7 @@
                 <a:ea typeface="Aptos Display" pitchFamily="34" charset="-122"/>
                 <a:cs typeface="Aptos Display" pitchFamily="34" charset="-120"/>
               </a:rPr>
-              <a:t>A project needs its own environment</a:t>
+              <a:t>A small program composes familiar parts</a:t>
             </a:r>
             <a:endParaRPr lang="en-US" sz="2850" dirty="0"/>
           </a:p>
@@ -13086,7 +13644,7 @@
                 <a:ea typeface="Consolas" pitchFamily="34" charset="-122"/>
                 <a:cs typeface="Consolas" pitchFamily="34" charset="-120"/>
               </a:rPr>
-              <a:t>terminal / pyproject.toml</a:t>
+              <a:t>python</a:t>
             </a:r>
             <a:endParaRPr lang="en-US" sz="820" dirty="0"/>
           </a:p>
@@ -13127,7 +13685,7 @@
                 <a:ea typeface="Consolas" pitchFamily="34" charset="-122"/>
                 <a:cs typeface="Consolas" pitchFamily="34" charset="-120"/>
               </a:rPr>
-              <a:t>python -m venv .venv</a:t>
+              <a:t>def passed_by_course(results: list[Result]) -&gt; dict[str, list[str]]:</a:t>
             </a:r>
             <a:endParaRPr lang="en-US" sz="1500" dirty="0"/>
           </a:p>
@@ -13144,7 +13702,7 @@
                 <a:ea typeface="Consolas" pitchFamily="34" charset="-122"/>
                 <a:cs typeface="Consolas" pitchFamily="34" charset="-120"/>
               </a:rPr>
-              <a:t># Windows</a:t>
+              <a:t>    grouped: dict[str, list[str]] = {}</a:t>
             </a:r>
             <a:endParaRPr lang="en-US" sz="1500" dirty="0"/>
           </a:p>
@@ -13161,14 +13719,8 @@
                 <a:ea typeface="Consolas" pitchFamily="34" charset="-122"/>
                 <a:cs typeface="Consolas" pitchFamily="34" charset="-120"/>
               </a:rPr>
-              <a:t>.venv\Scripts\activate</a:t>
-            </a:r>
-            <a:endParaRPr lang="en-US" sz="1500" dirty="0"/>
-          </a:p>
-          <a:p>
-            <a:pPr algn="l" indent="0" marL="0">
-              <a:buNone/>
-            </a:pPr>
+              <a:t>    for result in results:</a:t>
+            </a:r>
             <a:endParaRPr lang="en-US" sz="1500" dirty="0"/>
           </a:p>
           <a:p>
@@ -13184,14 +13736,8 @@
                 <a:ea typeface="Consolas" pitchFamily="34" charset="-122"/>
                 <a:cs typeface="Consolas" pitchFamily="34" charset="-120"/>
               </a:rPr>
-              <a:t>python -m pip install httpx</a:t>
-            </a:r>
-            <a:endParaRPr lang="en-US" sz="1500" dirty="0"/>
-          </a:p>
-          <a:p>
-            <a:pPr algn="l" indent="0" marL="0">
-              <a:buNone/>
-            </a:pPr>
+              <a:t>        if result.passed():</a:t>
+            </a:r>
             <a:endParaRPr lang="en-US" sz="1500" dirty="0"/>
           </a:p>
           <a:p>
@@ -13207,7 +13753,7 @@
                 <a:ea typeface="Consolas" pitchFamily="34" charset="-122"/>
                 <a:cs typeface="Consolas" pitchFamily="34" charset="-120"/>
               </a:rPr>
-              <a:t># pyproject.toml</a:t>
+              <a:t>            grouped.setdefault(result.course, []).append(result.student)</a:t>
             </a:r>
             <a:endParaRPr lang="en-US" sz="1500" dirty="0"/>
           </a:p>
@@ -13224,8 +13770,14 @@
                 <a:ea typeface="Consolas" pitchFamily="34" charset="-122"/>
                 <a:cs typeface="Consolas" pitchFamily="34" charset="-120"/>
               </a:rPr>
-              <a:t>[project]</a:t>
-            </a:r>
+              <a:t>    return grouped</a:t>
+            </a:r>
+            <a:endParaRPr lang="en-US" sz="1500" dirty="0"/>
+          </a:p>
+          <a:p>
+            <a:pPr algn="l" indent="0" marL="0">
+              <a:buNone/>
+            </a:pPr>
             <a:endParaRPr lang="en-US" sz="1500" dirty="0"/>
           </a:p>
           <a:p>
@@ -13241,7 +13793,7 @@
                 <a:ea typeface="Consolas" pitchFamily="34" charset="-122"/>
                 <a:cs typeface="Consolas" pitchFamily="34" charset="-120"/>
               </a:rPr>
-              <a:t>name = "course-report"</a:t>
+              <a:t># kolekcia + funkcia + dataclass + type hints</a:t>
             </a:r>
             <a:endParaRPr lang="en-US" sz="1500" dirty="0"/>
           </a:p>
@@ -13258,7 +13810,7 @@
                 <a:ea typeface="Consolas" pitchFamily="34" charset="-122"/>
                 <a:cs typeface="Consolas" pitchFamily="34" charset="-120"/>
               </a:rPr>
-              <a:t>dependencies = ["httpx&gt;=0.27"]</a:t>
+              <a:t>print(passed_by_course(results))</a:t>
             </a:r>
             <a:endParaRPr lang="en-US" sz="1500" dirty="0"/>
           </a:p>
@@ -13299,7 +13851,7 @@
                 <a:ea typeface="Aptos" pitchFamily="34" charset="-122"/>
                 <a:cs typeface="Aptos" pitchFamily="34" charset="-120"/>
               </a:rPr>
-              <a:t>A virtual environment isolates dependencies. pyproject.toml describes what the project needs on another computer.</a:t>
+              <a:t>Pythonic code does not come from one trick. It comes from precise names, suitable structures and small verifiable parts.</a:t>
             </a:r>
             <a:endParaRPr lang="en-US" sz="1520" dirty="0"/>
           </a:p>
@@ -13525,572 +14077,7 @@
                 <a:ea typeface="Consolas" pitchFamily="34" charset="-122"/>
                 <a:cs typeface="Consolas" pitchFamily="34" charset="-120"/>
               </a:rPr>
-              <a:t>26 / 27</a:t>
-            </a:r>
-            <a:endParaRPr lang="en-US" sz="780" dirty="0"/>
-          </a:p>
-        </p:txBody>
-      </p:sp>
-      <p:sp>
-        <p:nvSpPr>
-          <p:cNvPr id="8" name="Text 6"/>
-          <p:cNvSpPr/>
-          <p:nvPr/>
-        </p:nvSpPr>
-        <p:spPr>
-          <a:xfrm>
-            <a:off x="658368" y="914400"/>
-            <a:ext cx="10881360" cy="713232"/>
-          </a:xfrm>
-          <a:prstGeom prst="rect">
-            <a:avLst/>
-          </a:prstGeom>
-          <a:noFill/>
-          <a:ln/>
-        </p:spPr>
-        <p:txBody>
-          <a:bodyPr wrap="square" lIns="0" tIns="0" rIns="0" bIns="0" rtlCol="0" anchor="t">
-            <a:normAutofit/>
-          </a:bodyPr>
-          <a:lstStyle/>
-          <a:p>
-            <a:pPr algn="l" indent="0" marL="0">
-              <a:buNone/>
-            </a:pPr>
-            <a:r>
-              <a:rPr lang="en-US" sz="2850" b="1" dirty="0">
-                <a:solidFill>
-                  <a:srgbClr val="16324F"/>
-                </a:solidFill>
-                <a:latin typeface="Aptos Display" pitchFamily="34" charset="0"/>
-                <a:ea typeface="Aptos Display" pitchFamily="34" charset="-122"/>
-                <a:cs typeface="Aptos Display" pitchFamily="34" charset="-120"/>
-              </a:rPr>
-              <a:t>A small program composes familiar parts</a:t>
-            </a:r>
-            <a:endParaRPr lang="en-US" sz="2850" dirty="0"/>
-          </a:p>
-        </p:txBody>
-      </p:sp>
-      <p:sp>
-        <p:nvSpPr>
-          <p:cNvPr id="9" name="Shape 7"/>
-          <p:cNvSpPr/>
-          <p:nvPr/>
-        </p:nvSpPr>
-        <p:spPr>
-          <a:xfrm>
-            <a:off x="658368" y="1755648"/>
-            <a:ext cx="10899648" cy="4096512"/>
-          </a:xfrm>
-          <a:prstGeom prst="rect">
-            <a:avLst/>
-          </a:prstGeom>
-          <a:solidFill>
-            <a:srgbClr val="17212B"/>
-          </a:solidFill>
-          <a:ln w="12700">
-            <a:solidFill>
-              <a:srgbClr val="243242"/>
-            </a:solidFill>
-            <a:prstDash val="solid"/>
-          </a:ln>
-        </p:spPr>
-      </p:sp>
-      <p:sp>
-        <p:nvSpPr>
-          <p:cNvPr id="10" name="Shape 8"/>
-          <p:cNvSpPr/>
-          <p:nvPr/>
-        </p:nvSpPr>
-        <p:spPr>
-          <a:xfrm>
-            <a:off x="658368" y="1755648"/>
-            <a:ext cx="10899648" cy="347472"/>
-          </a:xfrm>
-          <a:prstGeom prst="rect">
-            <a:avLst/>
-          </a:prstGeom>
-          <a:solidFill>
-            <a:srgbClr val="223044"/>
-          </a:solidFill>
-          <a:ln w="12700">
-            <a:solidFill>
-              <a:srgbClr val="223044"/>
-            </a:solidFill>
-            <a:prstDash val="solid"/>
-          </a:ln>
-        </p:spPr>
-      </p:sp>
-      <p:sp>
-        <p:nvSpPr>
-          <p:cNvPr id="11" name="Text 9"/>
-          <p:cNvSpPr/>
-          <p:nvPr/>
-        </p:nvSpPr>
-        <p:spPr>
-          <a:xfrm>
-            <a:off x="896112" y="1874520"/>
-            <a:ext cx="9966960" cy="146304"/>
-          </a:xfrm>
-          <a:prstGeom prst="rect">
-            <a:avLst/>
-          </a:prstGeom>
-          <a:noFill/>
-          <a:ln/>
-        </p:spPr>
-        <p:txBody>
-          <a:bodyPr wrap="square" lIns="0" tIns="0" rIns="0" bIns="0" rtlCol="0" anchor="ctr">
-            <a:normAutofit/>
-          </a:bodyPr>
-          <a:lstStyle/>
-          <a:p>
-            <a:pPr algn="l" indent="0" marL="0">
-              <a:buNone/>
-            </a:pPr>
-            <a:r>
-              <a:rPr lang="en-US" sz="820" b="1" spc="35" kern="0" dirty="0">
-                <a:solidFill>
-                  <a:srgbClr val="8FD3FF"/>
-                </a:solidFill>
-                <a:latin typeface="Consolas" pitchFamily="34" charset="0"/>
-                <a:ea typeface="Consolas" pitchFamily="34" charset="-122"/>
-                <a:cs typeface="Consolas" pitchFamily="34" charset="-120"/>
-              </a:rPr>
-              <a:t>python</a:t>
-            </a:r>
-            <a:endParaRPr lang="en-US" sz="820" dirty="0"/>
-          </a:p>
-        </p:txBody>
-      </p:sp>
-      <p:sp>
-        <p:nvSpPr>
-          <p:cNvPr id="12" name="Text 10"/>
-          <p:cNvSpPr/>
-          <p:nvPr/>
-        </p:nvSpPr>
-        <p:spPr>
-          <a:xfrm>
-            <a:off x="896112" y="2304288"/>
-            <a:ext cx="9921240" cy="3127248"/>
-          </a:xfrm>
-          <a:prstGeom prst="rect">
-            <a:avLst/>
-          </a:prstGeom>
-          <a:noFill/>
-          <a:ln/>
-        </p:spPr>
-        <p:txBody>
-          <a:bodyPr wrap="square" lIns="0" tIns="0" rIns="0" bIns="0" rtlCol="0" anchor="t">
-            <a:normAutofit/>
-          </a:bodyPr>
-          <a:lstStyle/>
-          <a:p>
-            <a:pPr algn="l" indent="0" marL="0">
-              <a:buNone/>
-            </a:pPr>
-            <a:r>
-              <a:rPr lang="en-US" sz="1500" dirty="0">
-                <a:solidFill>
-                  <a:srgbClr val="F4F7FA"/>
-                </a:solidFill>
-                <a:latin typeface="Consolas" pitchFamily="34" charset="0"/>
-                <a:ea typeface="Consolas" pitchFamily="34" charset="-122"/>
-                <a:cs typeface="Consolas" pitchFamily="34" charset="-120"/>
-              </a:rPr>
-              <a:t>def passed_by_course(results: list[Result]) -&gt; dict[str, list[str]]:</a:t>
-            </a:r>
-            <a:endParaRPr lang="en-US" sz="1500" dirty="0"/>
-          </a:p>
-          <a:p>
-            <a:pPr algn="l" indent="0" marL="0">
-              <a:buNone/>
-            </a:pPr>
-            <a:r>
-              <a:rPr lang="en-US" sz="1500" dirty="0">
-                <a:solidFill>
-                  <a:srgbClr val="F4F7FA"/>
-                </a:solidFill>
-                <a:latin typeface="Consolas" pitchFamily="34" charset="0"/>
-                <a:ea typeface="Consolas" pitchFamily="34" charset="-122"/>
-                <a:cs typeface="Consolas" pitchFamily="34" charset="-120"/>
-              </a:rPr>
-              <a:t>    grouped: dict[str, list[str]] = {}</a:t>
-            </a:r>
-            <a:endParaRPr lang="en-US" sz="1500" dirty="0"/>
-          </a:p>
-          <a:p>
-            <a:pPr algn="l" indent="0" marL="0">
-              <a:buNone/>
-            </a:pPr>
-            <a:r>
-              <a:rPr lang="en-US" sz="1500" dirty="0">
-                <a:solidFill>
-                  <a:srgbClr val="F4F7FA"/>
-                </a:solidFill>
-                <a:latin typeface="Consolas" pitchFamily="34" charset="0"/>
-                <a:ea typeface="Consolas" pitchFamily="34" charset="-122"/>
-                <a:cs typeface="Consolas" pitchFamily="34" charset="-120"/>
-              </a:rPr>
-              <a:t>    for result in results:</a:t>
-            </a:r>
-            <a:endParaRPr lang="en-US" sz="1500" dirty="0"/>
-          </a:p>
-          <a:p>
-            <a:pPr algn="l" indent="0" marL="0">
-              <a:buNone/>
-            </a:pPr>
-            <a:r>
-              <a:rPr lang="en-US" sz="1500" dirty="0">
-                <a:solidFill>
-                  <a:srgbClr val="F4F7FA"/>
-                </a:solidFill>
-                <a:latin typeface="Consolas" pitchFamily="34" charset="0"/>
-                <a:ea typeface="Consolas" pitchFamily="34" charset="-122"/>
-                <a:cs typeface="Consolas" pitchFamily="34" charset="-120"/>
-              </a:rPr>
-              <a:t>        if result.passed():</a:t>
-            </a:r>
-            <a:endParaRPr lang="en-US" sz="1500" dirty="0"/>
-          </a:p>
-          <a:p>
-            <a:pPr algn="l" indent="0" marL="0">
-              <a:buNone/>
-            </a:pPr>
-            <a:r>
-              <a:rPr lang="en-US" sz="1500" dirty="0">
-                <a:solidFill>
-                  <a:srgbClr val="F4F7FA"/>
-                </a:solidFill>
-                <a:latin typeface="Consolas" pitchFamily="34" charset="0"/>
-                <a:ea typeface="Consolas" pitchFamily="34" charset="-122"/>
-                <a:cs typeface="Consolas" pitchFamily="34" charset="-120"/>
-              </a:rPr>
-              <a:t>            grouped.setdefault(result.course, []).append(result.student)</a:t>
-            </a:r>
-            <a:endParaRPr lang="en-US" sz="1500" dirty="0"/>
-          </a:p>
-          <a:p>
-            <a:pPr algn="l" indent="0" marL="0">
-              <a:buNone/>
-            </a:pPr>
-            <a:r>
-              <a:rPr lang="en-US" sz="1500" dirty="0">
-                <a:solidFill>
-                  <a:srgbClr val="F4F7FA"/>
-                </a:solidFill>
-                <a:latin typeface="Consolas" pitchFamily="34" charset="0"/>
-                <a:ea typeface="Consolas" pitchFamily="34" charset="-122"/>
-                <a:cs typeface="Consolas" pitchFamily="34" charset="-120"/>
-              </a:rPr>
-              <a:t>    return grouped</a:t>
-            </a:r>
-            <a:endParaRPr lang="en-US" sz="1500" dirty="0"/>
-          </a:p>
-          <a:p>
-            <a:pPr algn="l" indent="0" marL="0">
-              <a:buNone/>
-            </a:pPr>
-            <a:endParaRPr lang="en-US" sz="1500" dirty="0"/>
-          </a:p>
-          <a:p>
-            <a:pPr algn="l" indent="0" marL="0">
-              <a:buNone/>
-            </a:pPr>
-            <a:r>
-              <a:rPr lang="en-US" sz="1500" dirty="0">
-                <a:solidFill>
-                  <a:srgbClr val="F4F7FA"/>
-                </a:solidFill>
-                <a:latin typeface="Consolas" pitchFamily="34" charset="0"/>
-                <a:ea typeface="Consolas" pitchFamily="34" charset="-122"/>
-                <a:cs typeface="Consolas" pitchFamily="34" charset="-120"/>
-              </a:rPr>
-              <a:t># kolekcia + funkcia + dataclass + type hints</a:t>
-            </a:r>
-            <a:endParaRPr lang="en-US" sz="1500" dirty="0"/>
-          </a:p>
-          <a:p>
-            <a:pPr algn="l" indent="0" marL="0">
-              <a:buNone/>
-            </a:pPr>
-            <a:r>
-              <a:rPr lang="en-US" sz="1500" dirty="0">
-                <a:solidFill>
-                  <a:srgbClr val="F4F7FA"/>
-                </a:solidFill>
-                <a:latin typeface="Consolas" pitchFamily="34" charset="0"/>
-                <a:ea typeface="Consolas" pitchFamily="34" charset="-122"/>
-                <a:cs typeface="Consolas" pitchFamily="34" charset="-120"/>
-              </a:rPr>
-              <a:t>print(passed_by_course(results))</a:t>
-            </a:r>
-            <a:endParaRPr lang="en-US" sz="1500" dirty="0"/>
-          </a:p>
-        </p:txBody>
-      </p:sp>
-      <p:sp>
-        <p:nvSpPr>
-          <p:cNvPr id="13" name="Text 11"/>
-          <p:cNvSpPr/>
-          <p:nvPr/>
-        </p:nvSpPr>
-        <p:spPr>
-          <a:xfrm>
-            <a:off x="768096" y="6053328"/>
-            <a:ext cx="9921240" cy="256032"/>
-          </a:xfrm>
-          <a:prstGeom prst="rect">
-            <a:avLst/>
-          </a:prstGeom>
-          <a:noFill/>
-          <a:ln/>
-        </p:spPr>
-        <p:txBody>
-          <a:bodyPr wrap="square" lIns="0" tIns="0" rIns="0" bIns="0" rtlCol="0" anchor="t">
-            <a:normAutofit/>
-          </a:bodyPr>
-          <a:lstStyle/>
-          <a:p>
-            <a:pPr algn="l" indent="0" marL="0">
-              <a:buNone/>
-            </a:pPr>
-            <a:r>
-              <a:rPr lang="en-US" sz="1520" dirty="0">
-                <a:solidFill>
-                  <a:srgbClr val="5E6B78"/>
-                </a:solidFill>
-                <a:latin typeface="Aptos" pitchFamily="34" charset="0"/>
-                <a:ea typeface="Aptos" pitchFamily="34" charset="-122"/>
-                <a:cs typeface="Aptos" pitchFamily="34" charset="-120"/>
-              </a:rPr>
-              <a:t>Pythonic code does not come from one trick. It comes from precise names, suitable structures and small verifiable parts.</a:t>
-            </a:r>
-            <a:endParaRPr lang="en-US" sz="1520" dirty="0"/>
-          </a:p>
-        </p:txBody>
-      </p:sp>
-    </p:spTree>
-  </p:cSld>
-  <p:clrMapOvr>
-    <a:masterClrMapping/>
-  </p:clrMapOvr>
-</p:sld>
-</file>
-
-<file path=ppt/slides/slide27.xml><?xml version="1.0" encoding="utf-8"?>
-<p:sld xmlns:a="http://schemas.openxmlformats.org/drawingml/2006/main" xmlns:r="http://schemas.openxmlformats.org/officeDocument/2006/relationships" xmlns:p="http://schemas.openxmlformats.org/presentationml/2006/main">
-  <p:cSld name="Slide 27">
-    <p:bg>
-      <p:bgPr>
-        <a:solidFill>
-          <a:srgbClr val="FFFFFF"/>
-        </a:solidFill>
-      </p:bgPr>
-    </p:bg>
-    <p:spTree>
-      <p:nvGrpSpPr>
-        <p:cNvPr id="1" name=""/>
-        <p:cNvGrpSpPr/>
-        <p:nvPr/>
-      </p:nvGrpSpPr>
-      <p:grpSpPr>
-        <a:xfrm>
-          <a:off x="0" y="0"/>
-          <a:ext cx="0" cy="0"/>
-          <a:chOff x="0" y="0"/>
-          <a:chExt cx="0" cy="0"/>
-        </a:xfrm>
-      </p:grpSpPr>
-      <p:sp>
-        <p:nvSpPr>
-          <p:cNvPr id="2" name="Shape 0"/>
-          <p:cNvSpPr/>
-          <p:nvPr/>
-        </p:nvSpPr>
-        <p:spPr>
-          <a:xfrm>
-            <a:off x="0" y="0"/>
-            <a:ext cx="12191695" cy="109728"/>
-          </a:xfrm>
-          <a:prstGeom prst="rect">
-            <a:avLst/>
-          </a:prstGeom>
-          <a:solidFill>
-            <a:srgbClr val="1877B9"/>
-          </a:solidFill>
-          <a:ln w="12700">
-            <a:solidFill>
-              <a:srgbClr val="1877B9"/>
-            </a:solidFill>
-            <a:prstDash val="solid"/>
-          </a:ln>
-        </p:spPr>
-      </p:sp>
-      <p:sp>
-        <p:nvSpPr>
-          <p:cNvPr id="3" name="Text 1"/>
-          <p:cNvSpPr/>
-          <p:nvPr/>
-        </p:nvSpPr>
-        <p:spPr>
-          <a:xfrm>
-            <a:off x="566928" y="310896"/>
-            <a:ext cx="4663440" cy="182880"/>
-          </a:xfrm>
-          <a:prstGeom prst="rect">
-            <a:avLst/>
-          </a:prstGeom>
-          <a:noFill/>
-          <a:ln/>
-        </p:spPr>
-        <p:txBody>
-          <a:bodyPr wrap="square" lIns="0" tIns="0" rIns="0" bIns="0" rtlCol="0" anchor="ctr">
-            <a:normAutofit/>
-          </a:bodyPr>
-          <a:lstStyle/>
-          <a:p>
-            <a:pPr algn="l" indent="0" marL="0">
-              <a:buNone/>
-            </a:pPr>
-            <a:r>
-              <a:rPr lang="en-US" sz="880" b="1" spc="50" kern="0" dirty="0">
-                <a:solidFill>
-                  <a:srgbClr val="1877B9"/>
-                </a:solidFill>
-                <a:latin typeface="Aptos" pitchFamily="34" charset="0"/>
-                <a:ea typeface="Aptos" pitchFamily="34" charset="-122"/>
-                <a:cs typeface="Aptos" pitchFamily="34" charset="-120"/>
-              </a:rPr>
-              <a:t>PROGRAMMING IN PYTHON</a:t>
-            </a:r>
-            <a:endParaRPr lang="en-US" sz="880" dirty="0"/>
-          </a:p>
-        </p:txBody>
-      </p:sp>
-      <p:sp>
-        <p:nvSpPr>
-          <p:cNvPr id="4" name="Text 2"/>
-          <p:cNvSpPr/>
-          <p:nvPr/>
-        </p:nvSpPr>
-        <p:spPr>
-          <a:xfrm>
-            <a:off x="9829800" y="310896"/>
-            <a:ext cx="1783080" cy="182880"/>
-          </a:xfrm>
-          <a:prstGeom prst="rect">
-            <a:avLst/>
-          </a:prstGeom>
-          <a:noFill/>
-          <a:ln/>
-        </p:spPr>
-        <p:txBody>
-          <a:bodyPr wrap="square" lIns="0" tIns="0" rIns="0" bIns="0" rtlCol="0" anchor="ctr">
-            <a:normAutofit/>
-          </a:bodyPr>
-          <a:lstStyle/>
-          <a:p>
-            <a:pPr algn="r" indent="0" marL="0">
-              <a:buNone/>
-            </a:pPr>
-            <a:r>
-              <a:rPr lang="en-US" sz="880" b="1" dirty="0">
-                <a:solidFill>
-                  <a:srgbClr val="5E6B78"/>
-                </a:solidFill>
-                <a:latin typeface="Consolas" pitchFamily="34" charset="0"/>
-                <a:ea typeface="Consolas" pitchFamily="34" charset="-122"/>
-                <a:cs typeface="Consolas" pitchFamily="34" charset="-120"/>
-              </a:rPr>
-              <a:t>LECTURE 01</a:t>
-            </a:r>
-            <a:endParaRPr lang="en-US" sz="880" dirty="0"/>
-          </a:p>
-        </p:txBody>
-      </p:sp>
-      <p:sp>
-        <p:nvSpPr>
-          <p:cNvPr id="5" name="Shape 3"/>
-          <p:cNvSpPr/>
-          <p:nvPr/>
-        </p:nvSpPr>
-        <p:spPr>
-          <a:xfrm>
-            <a:off x="566928" y="658368"/>
-            <a:ext cx="11045952" cy="0"/>
-          </a:xfrm>
-          <a:prstGeom prst="line">
-            <a:avLst/>
-          </a:prstGeom>
-          <a:noFill/>
-          <a:ln w="12700">
-            <a:solidFill>
-              <a:srgbClr val="D8E0E6"/>
-            </a:solidFill>
-            <a:prstDash val="solid"/>
-          </a:ln>
-        </p:spPr>
-      </p:sp>
-      <p:sp>
-        <p:nvSpPr>
-          <p:cNvPr id="6" name="Shape 4"/>
-          <p:cNvSpPr/>
-          <p:nvPr/>
-        </p:nvSpPr>
-        <p:spPr>
-          <a:xfrm>
-            <a:off x="566928" y="6419088"/>
-            <a:ext cx="11045952" cy="0"/>
-          </a:xfrm>
-          <a:prstGeom prst="line">
-            <a:avLst/>
-          </a:prstGeom>
-          <a:noFill/>
-          <a:ln w="12700">
-            <a:solidFill>
-              <a:srgbClr val="D8E0E6"/>
-            </a:solidFill>
-            <a:prstDash val="solid"/>
-          </a:ln>
-        </p:spPr>
-      </p:sp>
-      <p:sp>
-        <p:nvSpPr>
-          <p:cNvPr id="7" name="Text 5"/>
-          <p:cNvSpPr/>
-          <p:nvPr/>
-        </p:nvSpPr>
-        <p:spPr>
-          <a:xfrm>
-            <a:off x="10771632" y="6501384"/>
-            <a:ext cx="804672" cy="146304"/>
-          </a:xfrm>
-          <a:prstGeom prst="rect">
-            <a:avLst/>
-          </a:prstGeom>
-          <a:noFill/>
-          <a:ln/>
-        </p:spPr>
-        <p:txBody>
-          <a:bodyPr wrap="square" lIns="0" tIns="0" rIns="0" bIns="0" rtlCol="0" anchor="ctr">
-            <a:normAutofit/>
-          </a:bodyPr>
-          <a:lstStyle/>
-          <a:p>
-            <a:pPr algn="r" indent="0" marL="0">
-              <a:buNone/>
-            </a:pPr>
-            <a:r>
-              <a:rPr lang="en-US" sz="780" dirty="0">
-                <a:solidFill>
-                  <a:srgbClr val="5E6B78"/>
-                </a:solidFill>
-                <a:latin typeface="Consolas" pitchFamily="34" charset="0"/>
-                <a:ea typeface="Consolas" pitchFamily="34" charset="-122"/>
-                <a:cs typeface="Consolas" pitchFamily="34" charset="-120"/>
-              </a:rPr>
-              <a:t>27 / 27</a:t>
+              <a:t>26 / 26</a:t>
             </a:r>
             <a:endParaRPr lang="en-US" sz="780" dirty="0"/>
           </a:p>
@@ -14423,7 +14410,7 @@
                 <a:ea typeface="Consolas" pitchFamily="34" charset="-122"/>
                 <a:cs typeface="Consolas" pitchFamily="34" charset="-120"/>
               </a:rPr>
-              <a:t>03 / 27</a:t>
+              <a:t>03 / 26</a:t>
             </a:r>
             <a:endParaRPr lang="en-US" sz="780" dirty="0"/>
           </a:p>
@@ -15070,7 +15057,7 @@
                 <a:ea typeface="Consolas" pitchFamily="34" charset="-122"/>
                 <a:cs typeface="Consolas" pitchFamily="34" charset="-120"/>
               </a:rPr>
-              <a:t>04 / 27</a:t>
+              <a:t>04 / 26</a:t>
             </a:r>
             <a:endParaRPr lang="en-US" sz="780" dirty="0"/>
           </a:p>
@@ -15125,8 +15112,8 @@
         </p:nvSpPr>
         <p:spPr>
           <a:xfrm>
-            <a:off x="694944" y="1691640"/>
-            <a:ext cx="9509760" cy="411480"/>
+            <a:off x="694944" y="1700784"/>
+            <a:ext cx="9784080" cy="420624"/>
           </a:xfrm>
           <a:prstGeom prst="rect">
             <a:avLst/>
@@ -15144,7 +15131,7 @@
               <a:buNone/>
             </a:pPr>
             <a:r>
-              <a:rPr lang="en-US" sz="1800" dirty="0">
+              <a:rPr lang="en-US" sz="1850" dirty="0">
                 <a:solidFill>
                   <a:srgbClr val="5E6B78"/>
                 </a:solidFill>
@@ -15152,22 +15139,63 @@
                 <a:ea typeface="Aptos" pitchFamily="34" charset="-122"/>
                 <a:cs typeface="Aptos" pitchFamily="34" charset="-120"/>
               </a:rPr>
-              <a:t>Assignment binds a name to a value. It does not automatically create a copy.</a:t>
-            </a:r>
-            <a:endParaRPr lang="en-US" sz="1800" dirty="0"/>
-          </a:p>
-        </p:txBody>
-      </p:sp>
-      <p:sp>
-        <p:nvSpPr>
-          <p:cNvPr id="10" name="Shape 8"/>
-          <p:cNvSpPr/>
-          <p:nvPr/>
-        </p:nvSpPr>
-        <p:spPr>
-          <a:xfrm>
-            <a:off x="694944" y="2834640"/>
-            <a:ext cx="2400300" cy="1042416"/>
+              <a:t>A type belongs to an object. Reassignment changes a name binding, not the original object.</a:t>
+            </a:r>
+            <a:endParaRPr lang="en-US" sz="1850" dirty="0"/>
+          </a:p>
+        </p:txBody>
+      </p:sp>
+      <p:sp>
+        <p:nvSpPr>
+          <p:cNvPr id="10" name="Text 8"/>
+          <p:cNvSpPr/>
+          <p:nvPr/>
+        </p:nvSpPr>
+        <p:spPr>
+          <a:xfrm>
+            <a:off x="749808" y="2487168"/>
+            <a:ext cx="2651760" cy="182880"/>
+          </a:xfrm>
+          <a:prstGeom prst="rect">
+            <a:avLst/>
+          </a:prstGeom>
+          <a:noFill/>
+          <a:ln/>
+        </p:spPr>
+        <p:txBody>
+          <a:bodyPr wrap="square" lIns="0" tIns="0" rIns="0" bIns="0" rtlCol="0" anchor="ctr">
+            <a:normAutofit/>
+          </a:bodyPr>
+          <a:lstStyle/>
+          <a:p>
+            <a:pPr algn="l" indent="0" marL="0">
+              <a:buNone/>
+            </a:pPr>
+            <a:r>
+              <a:rPr lang="en-US" sz="920" b="1" dirty="0">
+                <a:solidFill>
+                  <a:srgbClr val="1877B9"/>
+                </a:solidFill>
+                <a:latin typeface="Consolas" pitchFamily="34" charset="0"/>
+                <a:ea typeface="Consolas" pitchFamily="34" charset="-122"/>
+                <a:cs typeface="Consolas" pitchFamily="34" charset="-120"/>
+              </a:rPr>
+              <a:t>ORIGINAL BINDING</a:t>
+            </a:r>
+            <a:endParaRPr lang="en-US" sz="920" dirty="0"/>
+          </a:p>
+        </p:txBody>
+      </p:sp>
+      <p:sp>
+        <p:nvSpPr>
+          <p:cNvPr id="11" name="Shape 9"/>
+          <p:cNvSpPr/>
+          <p:nvPr/>
+        </p:nvSpPr>
+        <p:spPr>
+          <a:xfrm>
+            <a:off x="749808" y="2834640"/>
+            <a:ext cx="1965960" cy="859536"/>
           </a:xfrm>
           <a:prstGeom prst="rect">
             <a:avLst/>
@@ -15185,14 +15213,14 @@
       </p:sp>
       <p:sp>
         <p:nvSpPr>
-          <p:cNvPr id="11" name="Text 9"/>
-          <p:cNvSpPr/>
-          <p:nvPr/>
-        </p:nvSpPr>
-        <p:spPr>
-          <a:xfrm>
-            <a:off x="804672" y="3063240"/>
-            <a:ext cx="2180844" cy="548640"/>
+          <p:cNvPr id="12" name="Text 10"/>
+          <p:cNvSpPr/>
+          <p:nvPr/>
+        </p:nvSpPr>
+        <p:spPr>
+          <a:xfrm>
+            <a:off x="859536" y="3108960"/>
+            <a:ext cx="1737360" cy="256032"/>
           </a:xfrm>
           <a:prstGeom prst="rect">
             <a:avLst/>
@@ -15210,7 +15238,7 @@
               <a:buNone/>
             </a:pPr>
             <a:r>
-              <a:rPr lang="en-US" sz="1700" b="1" dirty="0">
+              <a:rPr lang="en-US" sz="2000" b="1" dirty="0">
                 <a:solidFill>
                   <a:srgbClr val="16324F"/>
                 </a:solidFill>
@@ -15220,20 +15248,20 @@
               </a:rPr>
               <a:t>score</a:t>
             </a:r>
-            <a:endParaRPr lang="en-US" sz="1700" dirty="0"/>
-          </a:p>
-        </p:txBody>
-      </p:sp>
-      <p:sp>
-        <p:nvSpPr>
-          <p:cNvPr id="12" name="Shape 10"/>
-          <p:cNvSpPr/>
-          <p:nvPr/>
-        </p:nvSpPr>
-        <p:spPr>
-          <a:xfrm>
-            <a:off x="3232404" y="3209544"/>
-            <a:ext cx="182880" cy="292608"/>
+            <a:endParaRPr lang="en-US" sz="2000" dirty="0"/>
+          </a:p>
+        </p:txBody>
+      </p:sp>
+      <p:sp>
+        <p:nvSpPr>
+          <p:cNvPr id="13" name="Shape 11"/>
+          <p:cNvSpPr/>
+          <p:nvPr/>
+        </p:nvSpPr>
+        <p:spPr>
+          <a:xfrm>
+            <a:off x="2962656" y="3108960"/>
+            <a:ext cx="347472" cy="274320"/>
           </a:xfrm>
           <a:prstGeom prst="chevron">
             <a:avLst/>
@@ -15251,14 +15279,14 @@
       </p:sp>
       <p:sp>
         <p:nvSpPr>
-          <p:cNvPr id="13" name="Shape 11"/>
-          <p:cNvSpPr/>
-          <p:nvPr/>
-        </p:nvSpPr>
-        <p:spPr>
-          <a:xfrm>
-            <a:off x="3506724" y="2834640"/>
-            <a:ext cx="2400300" cy="1042416"/>
+          <p:cNvPr id="14" name="Shape 12"/>
+          <p:cNvSpPr/>
+          <p:nvPr/>
+        </p:nvSpPr>
+        <p:spPr>
+          <a:xfrm>
+            <a:off x="3538728" y="2761488"/>
+            <a:ext cx="1828800" cy="1024128"/>
           </a:xfrm>
           <a:prstGeom prst="rect">
             <a:avLst/>
@@ -15276,14 +15304,14 @@
       </p:sp>
       <p:sp>
         <p:nvSpPr>
-          <p:cNvPr id="14" name="Text 12"/>
-          <p:cNvSpPr/>
-          <p:nvPr/>
-        </p:nvSpPr>
-        <p:spPr>
-          <a:xfrm>
-            <a:off x="3616452" y="3063240"/>
-            <a:ext cx="2180844" cy="548640"/>
+          <p:cNvPr id="15" name="Text 13"/>
+          <p:cNvSpPr/>
+          <p:nvPr/>
+        </p:nvSpPr>
+        <p:spPr>
+          <a:xfrm>
+            <a:off x="3648456" y="2999232"/>
+            <a:ext cx="1609344" cy="530352"/>
           </a:xfrm>
           <a:prstGeom prst="rect">
             <a:avLst/>
@@ -15301,7 +15329,131 @@
               <a:buNone/>
             </a:pPr>
             <a:r>
-              <a:rPr lang="en-US" sz="1700" b="1" dirty="0">
+              <a:rPr lang="en-US" sz="1650" b="1" dirty="0">
+                <a:solidFill>
+                  <a:srgbClr val="16324F"/>
+                </a:solidFill>
+                <a:latin typeface="Consolas" pitchFamily="34" charset="0"/>
+                <a:ea typeface="Consolas" pitchFamily="34" charset="-122"/>
+                <a:cs typeface="Consolas" pitchFamily="34" charset="-120"/>
+              </a:rPr>
+              <a:t>92</a:t>
+            </a:r>
+            <a:endParaRPr lang="en-US" sz="1650" dirty="0"/>
+          </a:p>
+          <a:p>
+            <a:pPr algn="ctr" indent="0" marL="0">
+              <a:buNone/>
+            </a:pPr>
+            <a:r>
+              <a:rPr lang="en-US" sz="1650" b="1" dirty="0">
+                <a:solidFill>
+                  <a:srgbClr val="16324F"/>
+                </a:solidFill>
+                <a:latin typeface="Consolas" pitchFamily="34" charset="0"/>
+                <a:ea typeface="Consolas" pitchFamily="34" charset="-122"/>
+                <a:cs typeface="Consolas" pitchFamily="34" charset="-120"/>
+              </a:rPr>
+              <a:t>int</a:t>
+            </a:r>
+            <a:endParaRPr lang="en-US" sz="1650" dirty="0"/>
+          </a:p>
+        </p:txBody>
+      </p:sp>
+      <p:sp>
+        <p:nvSpPr>
+          <p:cNvPr id="16" name="Text 14"/>
+          <p:cNvSpPr/>
+          <p:nvPr/>
+        </p:nvSpPr>
+        <p:spPr>
+          <a:xfrm>
+            <a:off x="6876288" y="2487168"/>
+            <a:ext cx="2651760" cy="182880"/>
+          </a:xfrm>
+          <a:prstGeom prst="rect">
+            <a:avLst/>
+          </a:prstGeom>
+          <a:noFill/>
+          <a:ln/>
+        </p:spPr>
+        <p:txBody>
+          <a:bodyPr wrap="square" lIns="0" tIns="0" rIns="0" bIns="0" rtlCol="0" anchor="ctr">
+            <a:normAutofit/>
+          </a:bodyPr>
+          <a:lstStyle/>
+          <a:p>
+            <a:pPr algn="l" indent="0" marL="0">
+              <a:buNone/>
+            </a:pPr>
+            <a:r>
+              <a:rPr lang="en-US" sz="920" b="1" dirty="0">
+                <a:solidFill>
+                  <a:srgbClr val="1877B9"/>
+                </a:solidFill>
+                <a:latin typeface="Consolas" pitchFamily="34" charset="0"/>
+                <a:ea typeface="Consolas" pitchFamily="34" charset="-122"/>
+                <a:cs typeface="Consolas" pitchFamily="34" charset="-120"/>
+              </a:rPr>
+              <a:t>REASSIGNMENT</a:t>
+            </a:r>
+            <a:endParaRPr lang="en-US" sz="920" dirty="0"/>
+          </a:p>
+        </p:txBody>
+      </p:sp>
+      <p:sp>
+        <p:nvSpPr>
+          <p:cNvPr id="17" name="Shape 15"/>
+          <p:cNvSpPr/>
+          <p:nvPr/>
+        </p:nvSpPr>
+        <p:spPr>
+          <a:xfrm>
+            <a:off x="6876288" y="2834640"/>
+            <a:ext cx="1965960" cy="859536"/>
+          </a:xfrm>
+          <a:prstGeom prst="rect">
+            <a:avLst/>
+          </a:prstGeom>
+          <a:solidFill>
+            <a:srgbClr val="F3F6F8"/>
+          </a:solidFill>
+          <a:ln w="12700">
+            <a:solidFill>
+              <a:srgbClr val="D8E0E6"/>
+            </a:solidFill>
+            <a:prstDash val="solid"/>
+          </a:ln>
+        </p:spPr>
+      </p:sp>
+      <p:sp>
+        <p:nvSpPr>
+          <p:cNvPr id="18" name="Text 16"/>
+          <p:cNvSpPr/>
+          <p:nvPr/>
+        </p:nvSpPr>
+        <p:spPr>
+          <a:xfrm>
+            <a:off x="6986016" y="3108960"/>
+            <a:ext cx="1737360" cy="256032"/>
+          </a:xfrm>
+          <a:prstGeom prst="rect">
+            <a:avLst/>
+          </a:prstGeom>
+          <a:noFill/>
+          <a:ln/>
+        </p:spPr>
+        <p:txBody>
+          <a:bodyPr wrap="square" lIns="0" tIns="0" rIns="0" bIns="0" rtlCol="0" anchor="ctr">
+            <a:normAutofit/>
+          </a:bodyPr>
+          <a:lstStyle/>
+          <a:p>
+            <a:pPr algn="ctr" indent="0" marL="0">
+              <a:buNone/>
+            </a:pPr>
+            <a:r>
+              <a:rPr lang="en-US" sz="2000" b="1" dirty="0">
                 <a:solidFill>
                   <a:srgbClr val="16324F"/>
                 </a:solidFill>
@@ -15309,39 +15461,22 @@
                 <a:ea typeface="Aptos" pitchFamily="34" charset="-122"/>
                 <a:cs typeface="Aptos" pitchFamily="34" charset="-120"/>
               </a:rPr>
-              <a:t>92</a:t>
-            </a:r>
-            <a:endParaRPr lang="en-US" sz="1700" dirty="0"/>
-          </a:p>
-          <a:p>
-            <a:pPr algn="ctr" indent="0" marL="0">
-              <a:buNone/>
-            </a:pPr>
-            <a:r>
-              <a:rPr lang="en-US" sz="1700" b="1" dirty="0">
-                <a:solidFill>
-                  <a:srgbClr val="16324F"/>
-                </a:solidFill>
-                <a:latin typeface="Aptos" pitchFamily="34" charset="0"/>
-                <a:ea typeface="Aptos" pitchFamily="34" charset="-122"/>
-                <a:cs typeface="Aptos" pitchFamily="34" charset="-120"/>
-              </a:rPr>
-              <a:t>int</a:t>
-            </a:r>
-            <a:endParaRPr lang="en-US" sz="1700" dirty="0"/>
-          </a:p>
-        </p:txBody>
-      </p:sp>
-      <p:sp>
-        <p:nvSpPr>
-          <p:cNvPr id="15" name="Shape 13"/>
-          <p:cNvSpPr/>
-          <p:nvPr/>
-        </p:nvSpPr>
-        <p:spPr>
-          <a:xfrm>
-            <a:off x="6044184" y="3209544"/>
-            <a:ext cx="182880" cy="292608"/>
+              <a:t>score</a:t>
+            </a:r>
+            <a:endParaRPr lang="en-US" sz="2000" dirty="0"/>
+          </a:p>
+        </p:txBody>
+      </p:sp>
+      <p:sp>
+        <p:nvSpPr>
+          <p:cNvPr id="19" name="Shape 17"/>
+          <p:cNvSpPr/>
+          <p:nvPr/>
+        </p:nvSpPr>
+        <p:spPr>
+          <a:xfrm>
+            <a:off x="9089136" y="3108960"/>
+            <a:ext cx="347472" cy="274320"/>
           </a:xfrm>
           <a:prstGeom prst="chevron">
             <a:avLst/>
@@ -15359,105 +15494,14 @@
       </p:sp>
       <p:sp>
         <p:nvSpPr>
-          <p:cNvPr id="16" name="Shape 14"/>
-          <p:cNvSpPr/>
-          <p:nvPr/>
-        </p:nvSpPr>
-        <p:spPr>
-          <a:xfrm>
-            <a:off x="6318504" y="2834640"/>
-            <a:ext cx="2400300" cy="1042416"/>
-          </a:xfrm>
-          <a:prstGeom prst="rect">
-            <a:avLst/>
-          </a:prstGeom>
-          <a:solidFill>
-            <a:srgbClr val="F3F6F8"/>
-          </a:solidFill>
-          <a:ln w="12700">
-            <a:solidFill>
-              <a:srgbClr val="D8E0E6"/>
-            </a:solidFill>
-            <a:prstDash val="solid"/>
-          </a:ln>
-        </p:spPr>
-      </p:sp>
-      <p:sp>
-        <p:nvSpPr>
-          <p:cNvPr id="17" name="Text 15"/>
-          <p:cNvSpPr/>
-          <p:nvPr/>
-        </p:nvSpPr>
-        <p:spPr>
-          <a:xfrm>
-            <a:off x="6428232" y="3063240"/>
-            <a:ext cx="2180844" cy="548640"/>
-          </a:xfrm>
-          <a:prstGeom prst="rect">
-            <a:avLst/>
-          </a:prstGeom>
-          <a:noFill/>
-          <a:ln/>
-        </p:spPr>
-        <p:txBody>
-          <a:bodyPr wrap="square" lIns="0" tIns="0" rIns="0" bIns="0" rtlCol="0" anchor="ctr">
-            <a:normAutofit/>
-          </a:bodyPr>
-          <a:lstStyle/>
-          <a:p>
-            <a:pPr algn="ctr" indent="0" marL="0">
-              <a:buNone/>
-            </a:pPr>
-            <a:r>
-              <a:rPr lang="en-US" sz="1700" b="1" dirty="0">
-                <a:solidFill>
-                  <a:srgbClr val="16324F"/>
-                </a:solidFill>
-                <a:latin typeface="Aptos" pitchFamily="34" charset="0"/>
-                <a:ea typeface="Aptos" pitchFamily="34" charset="-122"/>
-                <a:cs typeface="Aptos" pitchFamily="34" charset="-120"/>
-              </a:rPr>
-              <a:t>score</a:t>
-            </a:r>
-            <a:endParaRPr lang="en-US" sz="1700" dirty="0"/>
-          </a:p>
-        </p:txBody>
-      </p:sp>
-      <p:sp>
-        <p:nvSpPr>
-          <p:cNvPr id="18" name="Shape 16"/>
-          <p:cNvSpPr/>
-          <p:nvPr/>
-        </p:nvSpPr>
-        <p:spPr>
-          <a:xfrm>
-            <a:off x="8855964" y="3209544"/>
-            <a:ext cx="182880" cy="292608"/>
-          </a:xfrm>
-          <a:prstGeom prst="chevron">
-            <a:avLst/>
-          </a:prstGeom>
-          <a:solidFill>
-            <a:srgbClr val="1877B9"/>
-          </a:solidFill>
-          <a:ln w="12700">
-            <a:solidFill>
-              <a:srgbClr val="1877B9"/>
-            </a:solidFill>
-            <a:prstDash val="solid"/>
-          </a:ln>
-        </p:spPr>
-      </p:sp>
-      <p:sp>
-        <p:nvSpPr>
-          <p:cNvPr id="19" name="Shape 17"/>
-          <p:cNvSpPr/>
-          <p:nvPr/>
-        </p:nvSpPr>
-        <p:spPr>
-          <a:xfrm>
-            <a:off x="9130284" y="2834640"/>
-            <a:ext cx="2400300" cy="1042416"/>
+          <p:cNvPr id="20" name="Shape 18"/>
+          <p:cNvSpPr/>
+          <p:nvPr/>
+        </p:nvSpPr>
+        <p:spPr>
+          <a:xfrm>
+            <a:off x="9665208" y="2761488"/>
+            <a:ext cx="1828800" cy="1024128"/>
           </a:xfrm>
           <a:prstGeom prst="rect">
             <a:avLst/>
@@ -15475,14 +15519,14 @@
       </p:sp>
       <p:sp>
         <p:nvSpPr>
-          <p:cNvPr id="20" name="Text 18"/>
-          <p:cNvSpPr/>
-          <p:nvPr/>
-        </p:nvSpPr>
-        <p:spPr>
-          <a:xfrm>
-            <a:off x="9240012" y="3063240"/>
-            <a:ext cx="2180844" cy="548640"/>
+          <p:cNvPr id="21" name="Text 19"/>
+          <p:cNvSpPr/>
+          <p:nvPr/>
+        </p:nvSpPr>
+        <p:spPr>
+          <a:xfrm>
+            <a:off x="9774936" y="2999232"/>
+            <a:ext cx="1609344" cy="530352"/>
           </a:xfrm>
           <a:prstGeom prst="rect">
             <a:avLst/>
@@ -15500,34 +15544,75 @@
               <a:buNone/>
             </a:pPr>
             <a:r>
-              <a:rPr lang="en-US" sz="1700" b="1" dirty="0">
+              <a:rPr lang="en-US" sz="1650" b="1" dirty="0">
                 <a:solidFill>
                   <a:srgbClr val="16324F"/>
+                </a:solidFill>
+                <a:latin typeface="Consolas" pitchFamily="34" charset="0"/>
+                <a:ea typeface="Consolas" pitchFamily="34" charset="-122"/>
+                <a:cs typeface="Consolas" pitchFamily="34" charset="-120"/>
+              </a:rPr>
+              <a:t>"excellent"</a:t>
+            </a:r>
+            <a:endParaRPr lang="en-US" sz="1650" dirty="0"/>
+          </a:p>
+          <a:p>
+            <a:pPr algn="ctr" indent="0" marL="0">
+              <a:buNone/>
+            </a:pPr>
+            <a:r>
+              <a:rPr lang="en-US" sz="1650" b="1" dirty="0">
+                <a:solidFill>
+                  <a:srgbClr val="16324F"/>
+                </a:solidFill>
+                <a:latin typeface="Consolas" pitchFamily="34" charset="0"/>
+                <a:ea typeface="Consolas" pitchFamily="34" charset="-122"/>
+                <a:cs typeface="Consolas" pitchFamily="34" charset="-120"/>
+              </a:rPr>
+              <a:t>str</a:t>
+            </a:r>
+            <a:endParaRPr lang="en-US" sz="1650" dirty="0"/>
+          </a:p>
+        </p:txBody>
+      </p:sp>
+      <p:sp>
+        <p:nvSpPr>
+          <p:cNvPr id="22" name="Text 20"/>
+          <p:cNvSpPr/>
+          <p:nvPr/>
+        </p:nvSpPr>
+        <p:spPr>
+          <a:xfrm>
+            <a:off x="768096" y="4645152"/>
+            <a:ext cx="9966960" cy="365760"/>
+          </a:xfrm>
+          <a:prstGeom prst="rect">
+            <a:avLst/>
+          </a:prstGeom>
+          <a:noFill/>
+          <a:ln/>
+        </p:spPr>
+        <p:txBody>
+          <a:bodyPr wrap="square" lIns="0" tIns="0" rIns="0" bIns="0" rtlCol="0" anchor="ctr">
+            <a:normAutofit/>
+          </a:bodyPr>
+          <a:lstStyle/>
+          <a:p>
+            <a:pPr algn="l" indent="0" marL="0">
+              <a:buNone/>
+            </a:pPr>
+            <a:r>
+              <a:rPr lang="en-US" sz="1850" dirty="0">
+                <a:solidFill>
+                  <a:srgbClr val="5E6B78"/>
                 </a:solidFill>
                 <a:latin typeface="Aptos" pitchFamily="34" charset="0"/>
                 <a:ea typeface="Aptos" pitchFamily="34" charset="-122"/>
                 <a:cs typeface="Aptos" pitchFamily="34" charset="-120"/>
               </a:rPr>
-              <a:t>"excellent"</a:t>
-            </a:r>
-            <a:endParaRPr lang="en-US" sz="1700" dirty="0"/>
-          </a:p>
-          <a:p>
-            <a:pPr algn="ctr" indent="0" marL="0">
-              <a:buNone/>
-            </a:pPr>
-            <a:r>
-              <a:rPr lang="en-US" sz="1700" b="1" dirty="0">
-                <a:solidFill>
-                  <a:srgbClr val="16324F"/>
-                </a:solidFill>
-                <a:latin typeface="Aptos" pitchFamily="34" charset="0"/>
-                <a:ea typeface="Aptos" pitchFamily="34" charset="-122"/>
-                <a:cs typeface="Aptos" pitchFamily="34" charset="-120"/>
-              </a:rPr>
-              <a:t>str</a:t>
-            </a:r>
-            <a:endParaRPr lang="en-US" sz="1700" dirty="0"/>
+              <a:t>The object 92 still exists; only the score name binding changed.</a:t>
+            </a:r>
+            <a:endParaRPr lang="en-US" sz="1850" dirty="0"/>
           </a:p>
         </p:txBody>
       </p:sp>
@@ -15751,7 +15836,7 @@
                 <a:ea typeface="Consolas" pitchFamily="34" charset="-122"/>
                 <a:cs typeface="Consolas" pitchFamily="34" charset="-120"/>
               </a:rPr>
-              <a:t>05 / 27</a:t>
+              <a:t>05 / 26</a:t>
             </a:r>
             <a:endParaRPr lang="en-US" sz="780" dirty="0"/>
           </a:p>
@@ -15987,7 +16072,7 @@
                 <a:ea typeface="Consolas" pitchFamily="34" charset="-122"/>
                 <a:cs typeface="Consolas" pitchFamily="34" charset="-120"/>
               </a:rPr>
-              <a:t>print(results)  # [72, 91, 45]</a:t>
+              <a:t>print(results)</a:t>
             </a:r>
             <a:endParaRPr lang="en-US" sz="1600" dirty="0"/>
           </a:p>
@@ -16004,7 +16089,7 @@
                 <a:ea typeface="Consolas" pitchFamily="34" charset="-122"/>
                 <a:cs typeface="Consolas" pitchFamily="34" charset="-120"/>
               </a:rPr>
-              <a:t>print(alias)    # [72, 91, 45]</a:t>
+              <a:t>print(alias)</a:t>
             </a:r>
             <a:endParaRPr lang="en-US" sz="1600" dirty="0"/>
           </a:p>
@@ -16042,7 +16127,106 @@
         <p:spPr>
           <a:xfrm>
             <a:off x="8229600" y="2084832"/>
-            <a:ext cx="2816352" cy="2514600"/>
+            <a:ext cx="2560320" cy="164592"/>
+          </a:xfrm>
+          <a:prstGeom prst="rect">
+            <a:avLst/>
+          </a:prstGeom>
+          <a:noFill/>
+          <a:ln/>
+        </p:spPr>
+        <p:txBody>
+          <a:bodyPr wrap="square" lIns="0" tIns="0" rIns="0" bIns="0" rtlCol="0" anchor="ctr">
+            <a:normAutofit/>
+          </a:bodyPr>
+          <a:lstStyle/>
+          <a:p>
+            <a:pPr algn="l" indent="0" marL="0">
+              <a:buNone/>
+            </a:pPr>
+            <a:r>
+              <a:rPr lang="en-US" sz="810" b="1" spc="35" kern="0" dirty="0">
+                <a:solidFill>
+                  <a:srgbClr val="1877B9"/>
+                </a:solidFill>
+                <a:latin typeface="Consolas" pitchFamily="34" charset="0"/>
+                <a:ea typeface="Consolas" pitchFamily="34" charset="-122"/>
+                <a:cs typeface="Consolas" pitchFamily="34" charset="-120"/>
+              </a:rPr>
+              <a:t>OUTPUT</a:t>
+            </a:r>
+            <a:endParaRPr lang="en-US" sz="810" dirty="0"/>
+          </a:p>
+        </p:txBody>
+      </p:sp>
+      <p:sp>
+        <p:nvSpPr>
+          <p:cNvPr id="15" name="Text 13"/>
+          <p:cNvSpPr/>
+          <p:nvPr/>
+        </p:nvSpPr>
+        <p:spPr>
+          <a:xfrm>
+            <a:off x="8229600" y="2395728"/>
+            <a:ext cx="2816352" cy="566928"/>
+          </a:xfrm>
+          <a:prstGeom prst="rect">
+            <a:avLst/>
+          </a:prstGeom>
+          <a:noFill/>
+          <a:ln/>
+        </p:spPr>
+        <p:txBody>
+          <a:bodyPr wrap="square" lIns="0" tIns="0" rIns="0" bIns="0" rtlCol="0" anchor="t">
+            <a:normAutofit/>
+          </a:bodyPr>
+          <a:lstStyle/>
+          <a:p>
+            <a:pPr algn="l" indent="0" marL="0">
+              <a:buNone/>
+            </a:pPr>
+            <a:r>
+              <a:rPr lang="en-US" sz="1520" dirty="0">
+                <a:solidFill>
+                  <a:srgbClr val="18212B"/>
+                </a:solidFill>
+                <a:latin typeface="Consolas" pitchFamily="34" charset="0"/>
+                <a:ea typeface="Consolas" pitchFamily="34" charset="-122"/>
+                <a:cs typeface="Consolas" pitchFamily="34" charset="-120"/>
+              </a:rPr>
+              <a:t>[72, 91, 45]</a:t>
+            </a:r>
+            <a:endParaRPr lang="en-US" sz="1520" dirty="0"/>
+          </a:p>
+          <a:p>
+            <a:pPr algn="l" indent="0" marL="0">
+              <a:buNone/>
+            </a:pPr>
+            <a:r>
+              <a:rPr lang="en-US" sz="1520" dirty="0">
+                <a:solidFill>
+                  <a:srgbClr val="18212B"/>
+                </a:solidFill>
+                <a:latin typeface="Consolas" pitchFamily="34" charset="0"/>
+                <a:ea typeface="Consolas" pitchFamily="34" charset="-122"/>
+                <a:cs typeface="Consolas" pitchFamily="34" charset="-120"/>
+              </a:rPr>
+              <a:t>[72, 91, 45]</a:t>
+            </a:r>
+            <a:endParaRPr lang="en-US" sz="1520" dirty="0"/>
+          </a:p>
+        </p:txBody>
+      </p:sp>
+      <p:sp>
+        <p:nvSpPr>
+          <p:cNvPr id="16" name="Text 14"/>
+          <p:cNvSpPr/>
+          <p:nvPr/>
+        </p:nvSpPr>
+        <p:spPr>
+          <a:xfrm>
+            <a:off x="8229600" y="3255264"/>
+            <a:ext cx="2816352" cy="1572768"/>
           </a:xfrm>
           <a:prstGeom prst="rect">
             <a:avLst/>
@@ -16294,7 +16478,7 @@
                 <a:ea typeface="Consolas" pitchFamily="34" charset="-122"/>
                 <a:cs typeface="Consolas" pitchFamily="34" charset="-120"/>
               </a:rPr>
-              <a:t>06 / 27</a:t>
+              <a:t>06 / 26</a:t>
             </a:r>
             <a:endParaRPr lang="en-US" sz="780" dirty="0"/>
           </a:p>
@@ -16349,8 +16533,8 @@
         </p:nvSpPr>
         <p:spPr>
           <a:xfrm>
-            <a:off x="694944" y="1709928"/>
-            <a:ext cx="9235440" cy="457200"/>
+            <a:off x="694944" y="1700784"/>
+            <a:ext cx="9601200" cy="411480"/>
           </a:xfrm>
           <a:prstGeom prst="rect">
             <a:avLst/>
@@ -16368,7 +16552,7 @@
               <a:buNone/>
             </a:pPr>
             <a:r>
-              <a:rPr lang="en-US" sz="2000" dirty="0">
+              <a:rPr lang="en-US" sz="1950" dirty="0">
                 <a:solidFill>
                   <a:srgbClr val="5E6B78"/>
                 </a:solidFill>
@@ -16378,7 +16562,7 @@
               </a:rPr>
               <a:t>Compare assignment, a shallow copy and a nested list.</a:t>
             </a:r>
-            <a:endParaRPr lang="en-US" sz="2000" dirty="0"/>
+            <a:endParaRPr lang="en-US" sz="1950" dirty="0"/>
           </a:p>
         </p:txBody>
       </p:sp>
@@ -16390,18 +16574,18 @@
         </p:nvSpPr>
         <p:spPr>
           <a:xfrm>
-            <a:off x="658368" y="2423160"/>
-            <a:ext cx="7863840" cy="3154680"/>
+            <a:off x="658368" y="2359152"/>
+            <a:ext cx="5925312" cy="3337560"/>
           </a:xfrm>
           <a:prstGeom prst="rect">
             <a:avLst/>
           </a:prstGeom>
           <a:solidFill>
-            <a:srgbClr val="F3F6F8"/>
+            <a:srgbClr val="17212B"/>
           </a:solidFill>
           <a:ln w="12700">
             <a:solidFill>
-              <a:srgbClr val="D8E0E6"/>
+              <a:srgbClr val="243242"/>
             </a:solidFill>
             <a:prstDash val="solid"/>
           </a:ln>
@@ -16415,18 +16599,18 @@
         </p:nvSpPr>
         <p:spPr>
           <a:xfrm>
-            <a:off x="658368" y="2423160"/>
-            <a:ext cx="7863840" cy="347472"/>
+            <a:off x="658368" y="2359152"/>
+            <a:ext cx="5925312" cy="347472"/>
           </a:xfrm>
           <a:prstGeom prst="rect">
             <a:avLst/>
           </a:prstGeom>
           <a:solidFill>
-            <a:srgbClr val="E7EEF4"/>
+            <a:srgbClr val="223044"/>
           </a:solidFill>
           <a:ln w="12700">
             <a:solidFill>
-              <a:srgbClr val="E7EEF4"/>
+              <a:srgbClr val="223044"/>
             </a:solidFill>
             <a:prstDash val="solid"/>
           </a:ln>
@@ -16440,8 +16624,8 @@
         </p:nvSpPr>
         <p:spPr>
           <a:xfrm>
-            <a:off x="896112" y="2542032"/>
-            <a:ext cx="7132320" cy="146304"/>
+            <a:off x="877824" y="2478024"/>
+            <a:ext cx="5486400" cy="155448"/>
           </a:xfrm>
           <a:prstGeom prst="rect">
             <a:avLst/>
@@ -16459,9 +16643,9 @@
               <a:buNone/>
             </a:pPr>
             <a:r>
-              <a:rPr lang="en-US" sz="820" b="1" dirty="0">
-                <a:solidFill>
-                  <a:srgbClr val="1877B9"/>
+              <a:rPr lang="en-US" sz="810" b="1" spc="30" kern="0" dirty="0">
+                <a:solidFill>
+                  <a:srgbClr val="8FD3FF"/>
                 </a:solidFill>
                 <a:latin typeface="Consolas" pitchFamily="34" charset="0"/>
                 <a:ea typeface="Consolas" pitchFamily="34" charset="-122"/>
@@ -16469,7 +16653,7 @@
               </a:rPr>
               <a:t>python</a:t>
             </a:r>
-            <a:endParaRPr lang="en-US" sz="820" dirty="0"/>
+            <a:endParaRPr lang="en-US" sz="810" dirty="0"/>
           </a:p>
         </p:txBody>
       </p:sp>
@@ -16481,8 +16665,8 @@
         </p:nvSpPr>
         <p:spPr>
           <a:xfrm>
-            <a:off x="896112" y="2971800"/>
-            <a:ext cx="7132320" cy="2148840"/>
+            <a:off x="877824" y="3017520"/>
+            <a:ext cx="5449824" cy="2404872"/>
           </a:xfrm>
           <a:prstGeom prst="rect">
             <a:avLst/>
@@ -16500,9 +16684,9 @@
               <a:buNone/>
             </a:pPr>
             <a:r>
-              <a:rPr lang="en-US" sz="1700" dirty="0">
-                <a:solidFill>
-                  <a:srgbClr val="18212B"/>
+              <a:rPr lang="en-US" sz="1580" dirty="0">
+                <a:solidFill>
+                  <a:srgbClr val="F4F7FA"/>
                 </a:solidFill>
                 <a:latin typeface="Consolas" pitchFamily="34" charset="0"/>
                 <a:ea typeface="Consolas" pitchFamily="34" charset="-122"/>
@@ -16510,16 +16694,16 @@
               </a:rPr>
               <a:t>original = {"scores": [80, 90]}</a:t>
             </a:r>
-            <a:endParaRPr lang="en-US" sz="1700" dirty="0"/>
-          </a:p>
-          <a:p>
-            <a:pPr algn="l" indent="0" marL="0">
-              <a:buNone/>
-            </a:pPr>
-            <a:r>
-              <a:rPr lang="en-US" sz="1700" dirty="0">
-                <a:solidFill>
-                  <a:srgbClr val="18212B"/>
+            <a:endParaRPr lang="en-US" sz="1580" dirty="0"/>
+          </a:p>
+          <a:p>
+            <a:pPr algn="l" indent="0" marL="0">
+              <a:buNone/>
+            </a:pPr>
+            <a:r>
+              <a:rPr lang="en-US" sz="1580" dirty="0">
+                <a:solidFill>
+                  <a:srgbClr val="F4F7FA"/>
                 </a:solidFill>
                 <a:latin typeface="Consolas" pitchFamily="34" charset="0"/>
                 <a:ea typeface="Consolas" pitchFamily="34" charset="-122"/>
@@ -16527,16 +16711,16 @@
               </a:rPr>
               <a:t>copy = original.copy()</a:t>
             </a:r>
-            <a:endParaRPr lang="en-US" sz="1700" dirty="0"/>
-          </a:p>
-          <a:p>
-            <a:pPr algn="l" indent="0" marL="0">
-              <a:buNone/>
-            </a:pPr>
-            <a:r>
-              <a:rPr lang="en-US" sz="1700" dirty="0">
-                <a:solidFill>
-                  <a:srgbClr val="18212B"/>
+            <a:endParaRPr lang="en-US" sz="1580" dirty="0"/>
+          </a:p>
+          <a:p>
+            <a:pPr algn="l" indent="0" marL="0">
+              <a:buNone/>
+            </a:pPr>
+            <a:r>
+              <a:rPr lang="en-US" sz="1580" dirty="0">
+                <a:solidFill>
+                  <a:srgbClr val="F4F7FA"/>
                 </a:solidFill>
                 <a:latin typeface="Consolas" pitchFamily="34" charset="0"/>
                 <a:ea typeface="Consolas" pitchFamily="34" charset="-122"/>
@@ -16544,22 +16728,22 @@
               </a:rPr>
               <a:t>copy["scores"].append(100)</a:t>
             </a:r>
-            <a:endParaRPr lang="en-US" sz="1700" dirty="0"/>
-          </a:p>
-          <a:p>
-            <a:pPr algn="l" indent="0" marL="0">
-              <a:buNone/>
-            </a:pPr>
-            <a:endParaRPr lang="en-US" sz="1700" dirty="0"/>
-          </a:p>
-          <a:p>
-            <a:pPr algn="l" indent="0" marL="0">
-              <a:buNone/>
-            </a:pPr>
-            <a:r>
-              <a:rPr lang="en-US" sz="1700" dirty="0">
-                <a:solidFill>
-                  <a:srgbClr val="18212B"/>
+            <a:endParaRPr lang="en-US" sz="1580" dirty="0"/>
+          </a:p>
+          <a:p>
+            <a:pPr algn="l" indent="0" marL="0">
+              <a:buNone/>
+            </a:pPr>
+            <a:endParaRPr lang="en-US" sz="1580" dirty="0"/>
+          </a:p>
+          <a:p>
+            <a:pPr algn="l" indent="0" marL="0">
+              <a:buNone/>
+            </a:pPr>
+            <a:r>
+              <a:rPr lang="en-US" sz="1580" dirty="0">
+                <a:solidFill>
+                  <a:srgbClr val="F4F7FA"/>
                 </a:solidFill>
                 <a:latin typeface="Consolas" pitchFamily="34" charset="0"/>
                 <a:ea typeface="Consolas" pitchFamily="34" charset="-122"/>
@@ -16567,7 +16751,7 @@
               </a:rPr>
               <a:t>print(original["scores"])</a:t>
             </a:r>
-            <a:endParaRPr lang="en-US" sz="1700" dirty="0"/>
+            <a:endParaRPr lang="en-US" sz="1580" dirty="0"/>
           </a:p>
         </p:txBody>
       </p:sp>
@@ -16579,36 +16763,155 @@
         </p:nvSpPr>
         <p:spPr>
           <a:xfrm>
-            <a:off x="8915400" y="2834640"/>
-            <a:ext cx="2011680" cy="1298448"/>
-          </a:xfrm>
-          <a:prstGeom prst="rect">
-            <a:avLst/>
-          </a:prstGeom>
-          <a:noFill/>
-          <a:ln/>
-        </p:spPr>
-        <p:txBody>
-          <a:bodyPr wrap="square" lIns="0" tIns="0" rIns="0" bIns="0" rtlCol="0" anchor="t">
-            <a:normAutofit/>
-          </a:bodyPr>
-          <a:lstStyle/>
-          <a:p>
-            <a:pPr algn="l" indent="0" marL="0">
-              <a:buNone/>
-            </a:pPr>
-            <a:r>
-              <a:rPr lang="en-US" sz="1650" dirty="0">
-                <a:solidFill>
-                  <a:srgbClr val="5E6B78"/>
+            <a:off x="7178040" y="2432304"/>
+            <a:ext cx="3200400" cy="164592"/>
+          </a:xfrm>
+          <a:prstGeom prst="rect">
+            <a:avLst/>
+          </a:prstGeom>
+          <a:noFill/>
+          <a:ln/>
+        </p:spPr>
+        <p:txBody>
+          <a:bodyPr wrap="square" lIns="0" tIns="0" rIns="0" bIns="0" rtlCol="0" anchor="ctr">
+            <a:normAutofit/>
+          </a:bodyPr>
+          <a:lstStyle/>
+          <a:p>
+            <a:pPr algn="l" indent="0" marL="0">
+              <a:buNone/>
+            </a:pPr>
+            <a:r>
+              <a:rPr lang="en-US" sz="840" b="1" dirty="0">
+                <a:solidFill>
+                  <a:srgbClr val="1877B9"/>
+                </a:solidFill>
+                <a:latin typeface="Consolas" pitchFamily="34" charset="0"/>
+                <a:ea typeface="Consolas" pitchFamily="34" charset="-122"/>
+                <a:cs typeface="Consolas" pitchFamily="34" charset="-120"/>
+              </a:rPr>
+              <a:t>RESULT</a:t>
+            </a:r>
+            <a:endParaRPr lang="en-US" sz="840" dirty="0"/>
+          </a:p>
+        </p:txBody>
+      </p:sp>
+      <p:sp>
+        <p:nvSpPr>
+          <p:cNvPr id="15" name="Text 13"/>
+          <p:cNvSpPr/>
+          <p:nvPr/>
+        </p:nvSpPr>
+        <p:spPr>
+          <a:xfrm>
+            <a:off x="7178040" y="2788920"/>
+            <a:ext cx="3337560" cy="310896"/>
+          </a:xfrm>
+          <a:prstGeom prst="rect">
+            <a:avLst/>
+          </a:prstGeom>
+          <a:noFill/>
+          <a:ln/>
+        </p:spPr>
+        <p:txBody>
+          <a:bodyPr wrap="square" lIns="0" tIns="0" rIns="0" bIns="0" rtlCol="0" anchor="ctr">
+            <a:normAutofit/>
+          </a:bodyPr>
+          <a:lstStyle/>
+          <a:p>
+            <a:pPr algn="l" indent="0" marL="0">
+              <a:buNone/>
+            </a:pPr>
+            <a:r>
+              <a:rPr lang="en-US" sz="2000" b="1" dirty="0">
+                <a:solidFill>
+                  <a:srgbClr val="16324F"/>
+                </a:solidFill>
+                <a:latin typeface="Consolas" pitchFamily="34" charset="0"/>
+                <a:ea typeface="Consolas" pitchFamily="34" charset="-122"/>
+                <a:cs typeface="Consolas" pitchFamily="34" charset="-120"/>
+              </a:rPr>
+              <a:t>[80, 90, 100]</a:t>
+            </a:r>
+            <a:endParaRPr lang="en-US" sz="2000" dirty="0"/>
+          </a:p>
+        </p:txBody>
+      </p:sp>
+      <p:sp>
+        <p:nvSpPr>
+          <p:cNvPr id="16" name="Text 14"/>
+          <p:cNvSpPr/>
+          <p:nvPr/>
+        </p:nvSpPr>
+        <p:spPr>
+          <a:xfrm>
+            <a:off x="7150608" y="3401568"/>
+            <a:ext cx="3977640" cy="3886200"/>
+          </a:xfrm>
+          <a:prstGeom prst="rect">
+            <a:avLst/>
+          </a:prstGeom>
+          <a:noFill/>
+          <a:ln/>
+        </p:spPr>
+        <p:txBody>
+          <a:bodyPr wrap="square" lIns="508" tIns="508" rIns="508" bIns="508" rtlCol="0" anchor="t">
+            <a:normAutofit/>
+          </a:bodyPr>
+          <a:lstStyle/>
+          <a:p>
+            <a:pPr marL="228600" indent="-228600">
+              <a:buSzPct val="100000"/>
+              <a:buChar char="•"/>
+            </a:pPr>
+            <a:r>
+              <a:rPr lang="en-US" sz="1470" dirty="0">
+                <a:solidFill>
+                  <a:srgbClr val="18212B"/>
                 </a:solidFill>
                 <a:latin typeface="Aptos" pitchFamily="34" charset="0"/>
                 <a:ea typeface="Aptos" pitchFamily="34" charset="-122"/>
                 <a:cs typeface="Aptos" pitchFamily="34" charset="-120"/>
               </a:rPr>
-              <a:t>Justify your answer first. Then run the code.</a:t>
-            </a:r>
-            <a:endParaRPr lang="en-US" sz="1650" dirty="0"/>
+              <a:t>assignment: no new object is created</a:t>
+            </a:r>
+            <a:endParaRPr lang="en-US" sz="1470" dirty="0"/>
+          </a:p>
+          <a:p>
+            <a:pPr marL="228600" indent="-228600">
+              <a:buSzPct val="100000"/>
+              <a:buChar char="•"/>
+            </a:pPr>
+            <a:r>
+              <a:rPr lang="en-US" sz="1470" dirty="0">
+                <a:solidFill>
+                  <a:srgbClr val="18212B"/>
+                </a:solidFill>
+                <a:latin typeface="Aptos" pitchFamily="34" charset="0"/>
+                <a:ea typeface="Aptos" pitchFamily="34" charset="-122"/>
+                <a:cs typeface="Aptos" pitchFamily="34" charset="-120"/>
+              </a:rPr>
+              <a:t>shallow copy: only the outer object is new</a:t>
+            </a:r>
+            <a:endParaRPr lang="en-US" sz="1470" dirty="0"/>
+          </a:p>
+          <a:p>
+            <a:pPr marL="228600" indent="-228600">
+              <a:buSzPct val="100000"/>
+              <a:buChar char="•"/>
+            </a:pPr>
+            <a:r>
+              <a:rPr lang="en-US" sz="1470" dirty="0">
+                <a:solidFill>
+                  <a:srgbClr val="18212B"/>
+                </a:solidFill>
+                <a:latin typeface="Aptos" pitchFamily="34" charset="0"/>
+                <a:ea typeface="Aptos" pitchFamily="34" charset="-122"/>
+                <a:cs typeface="Aptos" pitchFamily="34" charset="-120"/>
+              </a:rPr>
+              <a:t>deep copy: nested mutable objects are independent too</a:t>
+            </a:r>
+            <a:endParaRPr lang="en-US" sz="1470" dirty="0"/>
           </a:p>
         </p:txBody>
       </p:sp>
@@ -16832,7 +17135,7 @@
                 <a:ea typeface="Consolas" pitchFamily="34" charset="-122"/>
                 <a:cs typeface="Consolas" pitchFamily="34" charset="-120"/>
               </a:rPr>
-              <a:t>07 / 27</a:t>
+              <a:t>07 / 26</a:t>
             </a:r>
             <a:endParaRPr lang="en-US" sz="780" dirty="0"/>
           </a:p>
@@ -16846,8 +17149,8 @@
         </p:nvSpPr>
         <p:spPr>
           <a:xfrm>
-            <a:off x="749808" y="1481328"/>
-            <a:ext cx="10287000" cy="1554480"/>
+            <a:off x="658368" y="914400"/>
+            <a:ext cx="10881360" cy="713232"/>
           </a:xfrm>
           <a:prstGeom prst="rect">
             <a:avLst/>
@@ -16865,7 +17168,7 @@
               <a:buNone/>
             </a:pPr>
             <a:r>
-              <a:rPr lang="en-US" sz="3300" b="1" dirty="0">
+              <a:rPr lang="en-US" sz="2850" b="1" dirty="0">
                 <a:solidFill>
                   <a:srgbClr val="16324F"/>
                 </a:solidFill>
@@ -16873,29 +17176,363 @@
                 <a:ea typeface="Aptos Display" pitchFamily="34" charset="-122"/>
                 <a:cs typeface="Aptos Display" pitchFamily="34" charset="-120"/>
               </a:rPr>
-              <a:t>Mutability determines whether an object can be changed in place.</a:t>
-            </a:r>
-            <a:endParaRPr lang="en-US" sz="3300" dirty="0"/>
-          </a:p>
-        </p:txBody>
-      </p:sp>
-      <p:sp>
-        <p:nvSpPr>
-          <p:cNvPr id="9" name="Shape 7"/>
-          <p:cNvSpPr/>
-          <p:nvPr/>
-        </p:nvSpPr>
-        <p:spPr>
-          <a:xfrm>
-            <a:off x="768096" y="3438144"/>
-            <a:ext cx="1280160" cy="91440"/>
+              <a:t>Mutability changes an object, not a name binding</a:t>
+            </a:r>
+            <a:endParaRPr lang="en-US" sz="2850" dirty="0"/>
+          </a:p>
+        </p:txBody>
+      </p:sp>
+      <p:sp>
+        <p:nvSpPr>
+          <p:cNvPr id="9" name="Text 7"/>
+          <p:cNvSpPr/>
+          <p:nvPr/>
+        </p:nvSpPr>
+        <p:spPr>
+          <a:xfrm>
+            <a:off x="694944" y="1700784"/>
+            <a:ext cx="9829800" cy="457200"/>
+          </a:xfrm>
+          <a:prstGeom prst="rect">
+            <a:avLst/>
+          </a:prstGeom>
+          <a:noFill/>
+          <a:ln/>
+        </p:spPr>
+        <p:txBody>
+          <a:bodyPr wrap="square" lIns="0" tIns="0" rIns="0" bIns="0" rtlCol="0" anchor="t">
+            <a:normAutofit/>
+          </a:bodyPr>
+          <a:lstStyle/>
+          <a:p>
+            <a:pPr algn="l" indent="0" marL="0">
+              <a:buNone/>
+            </a:pPr>
+            <a:r>
+              <a:rPr lang="en-US" sz="1850" dirty="0">
+                <a:solidFill>
+                  <a:srgbClr val="5E6B78"/>
+                </a:solidFill>
+                <a:latin typeface="Aptos" pitchFamily="34" charset="0"/>
+                <a:ea typeface="Aptos" pitchFamily="34" charset="-122"/>
+                <a:cs typeface="Aptos" pitchFamily="34" charset="-120"/>
+              </a:rPr>
+              <a:t>An immutable value produces a new value. A mutable collection can change its contents in place.</a:t>
+            </a:r>
+            <a:endParaRPr lang="en-US" sz="1850" dirty="0"/>
+          </a:p>
+        </p:txBody>
+      </p:sp>
+      <p:sp>
+        <p:nvSpPr>
+          <p:cNvPr id="10" name="Shape 8"/>
+          <p:cNvSpPr/>
+          <p:nvPr/>
+        </p:nvSpPr>
+        <p:spPr>
+          <a:xfrm>
+            <a:off x="749808" y="2487168"/>
+            <a:ext cx="4800600" cy="0"/>
+          </a:xfrm>
+          <a:prstGeom prst="line">
+            <a:avLst/>
+          </a:prstGeom>
+          <a:noFill/>
+          <a:ln w="12700">
+            <a:solidFill>
+              <a:srgbClr val="167C80"/>
+            </a:solidFill>
+            <a:prstDash val="solid"/>
+          </a:ln>
+        </p:spPr>
+      </p:sp>
+      <p:sp>
+        <p:nvSpPr>
+          <p:cNvPr id="11" name="Text 9"/>
+          <p:cNvSpPr/>
+          <p:nvPr/>
+        </p:nvSpPr>
+        <p:spPr>
+          <a:xfrm>
+            <a:off x="749808" y="2715768"/>
+            <a:ext cx="4709160" cy="219456"/>
+          </a:xfrm>
+          <a:prstGeom prst="rect">
+            <a:avLst/>
+          </a:prstGeom>
+          <a:noFill/>
+          <a:ln/>
+        </p:spPr>
+        <p:txBody>
+          <a:bodyPr wrap="square" lIns="0" tIns="0" rIns="0" bIns="0" rtlCol="0" anchor="ctr">
+            <a:normAutofit/>
+          </a:bodyPr>
+          <a:lstStyle/>
+          <a:p>
+            <a:pPr algn="l" indent="0" marL="0">
+              <a:buNone/>
+            </a:pPr>
+            <a:r>
+              <a:rPr lang="en-US" sz="1050" b="1" dirty="0">
+                <a:solidFill>
+                  <a:srgbClr val="16324F"/>
+                </a:solidFill>
+                <a:latin typeface="Consolas" pitchFamily="34" charset="0"/>
+                <a:ea typeface="Consolas" pitchFamily="34" charset="-122"/>
+                <a:cs typeface="Consolas" pitchFamily="34" charset="-120"/>
+              </a:rPr>
+              <a:t>MUTABLE</a:t>
+            </a:r>
+            <a:endParaRPr lang="en-US" sz="1050" dirty="0"/>
+          </a:p>
+        </p:txBody>
+      </p:sp>
+      <p:sp>
+        <p:nvSpPr>
+          <p:cNvPr id="12" name="Shape 10"/>
+          <p:cNvSpPr/>
+          <p:nvPr/>
+        </p:nvSpPr>
+        <p:spPr>
+          <a:xfrm>
+            <a:off x="749808" y="3163824"/>
+            <a:ext cx="4709160" cy="804672"/>
           </a:xfrm>
           <a:prstGeom prst="rect">
             <a:avLst/>
           </a:prstGeom>
           <a:solidFill>
-            <a:srgbClr val="E0A03A"/>
+            <a:srgbClr val="17212B"/>
           </a:solidFill>
+          <a:ln w="12700">
+            <a:solidFill>
+              <a:srgbClr val="243242"/>
+            </a:solidFill>
+            <a:prstDash val="solid"/>
+          </a:ln>
+        </p:spPr>
+      </p:sp>
+      <p:sp>
+        <p:nvSpPr>
+          <p:cNvPr id="13" name="Shape 11"/>
+          <p:cNvSpPr/>
+          <p:nvPr/>
+        </p:nvSpPr>
+        <p:spPr>
+          <a:xfrm>
+            <a:off x="749808" y="3163824"/>
+            <a:ext cx="4709160" cy="347472"/>
+          </a:xfrm>
+          <a:prstGeom prst="rect">
+            <a:avLst/>
+          </a:prstGeom>
+          <a:solidFill>
+            <a:srgbClr val="223044"/>
+          </a:solidFill>
+          <a:ln w="12700">
+            <a:solidFill>
+              <a:srgbClr val="223044"/>
+            </a:solidFill>
+            <a:prstDash val="solid"/>
+          </a:ln>
+        </p:spPr>
+      </p:sp>
+      <p:sp>
+        <p:nvSpPr>
+          <p:cNvPr id="14" name="Text 12"/>
+          <p:cNvSpPr/>
+          <p:nvPr/>
+        </p:nvSpPr>
+        <p:spPr>
+          <a:xfrm>
+            <a:off x="969264" y="3282696"/>
+            <a:ext cx="4270248" cy="155448"/>
+          </a:xfrm>
+          <a:prstGeom prst="rect">
+            <a:avLst/>
+          </a:prstGeom>
+          <a:noFill/>
+          <a:ln/>
+        </p:spPr>
+        <p:txBody>
+          <a:bodyPr wrap="square" lIns="0" tIns="0" rIns="0" bIns="0" rtlCol="0" anchor="ctr">
+            <a:normAutofit/>
+          </a:bodyPr>
+          <a:lstStyle/>
+          <a:p>
+            <a:pPr algn="l" indent="0" marL="0">
+              <a:buNone/>
+            </a:pPr>
+            <a:r>
+              <a:rPr lang="en-US" sz="810" b="1" spc="30" kern="0" dirty="0">
+                <a:solidFill>
+                  <a:srgbClr val="8FD3FF"/>
+                </a:solidFill>
+                <a:latin typeface="Consolas" pitchFamily="34" charset="0"/>
+                <a:ea typeface="Consolas" pitchFamily="34" charset="-122"/>
+                <a:cs typeface="Consolas" pitchFamily="34" charset="-120"/>
+              </a:rPr>
+              <a:t>python</a:t>
+            </a:r>
+            <a:endParaRPr lang="en-US" sz="810" dirty="0"/>
+          </a:p>
+        </p:txBody>
+      </p:sp>
+      <p:sp>
+        <p:nvSpPr>
+          <p:cNvPr id="15" name="Text 13"/>
+          <p:cNvSpPr/>
+          <p:nvPr/>
+        </p:nvSpPr>
+        <p:spPr>
+          <a:xfrm>
+            <a:off x="969264" y="3557016"/>
+            <a:ext cx="4233672" cy="365760"/>
+          </a:xfrm>
+          <a:prstGeom prst="rect">
+            <a:avLst/>
+          </a:prstGeom>
+          <a:noFill/>
+          <a:ln/>
+        </p:spPr>
+        <p:txBody>
+          <a:bodyPr wrap="square" lIns="0" tIns="0" rIns="0" bIns="0" rtlCol="0" anchor="t">
+            <a:normAutofit/>
+          </a:bodyPr>
+          <a:lstStyle/>
+          <a:p>
+            <a:pPr algn="l" indent="0" marL="0">
+              <a:buNone/>
+            </a:pPr>
+            <a:r>
+              <a:rPr lang="en-US" sz="1680" dirty="0">
+                <a:solidFill>
+                  <a:srgbClr val="F4F7FA"/>
+                </a:solidFill>
+                <a:latin typeface="Consolas" pitchFamily="34" charset="0"/>
+                <a:ea typeface="Consolas" pitchFamily="34" charset="-122"/>
+                <a:cs typeface="Consolas" pitchFamily="34" charset="-120"/>
+              </a:rPr>
+              <a:t>scores.append(100)</a:t>
+            </a:r>
+            <a:endParaRPr lang="en-US" sz="1680" dirty="0"/>
+          </a:p>
+        </p:txBody>
+      </p:sp>
+      <p:sp>
+        <p:nvSpPr>
+          <p:cNvPr id="16" name="Text 14"/>
+          <p:cNvSpPr/>
+          <p:nvPr/>
+        </p:nvSpPr>
+        <p:spPr>
+          <a:xfrm>
+            <a:off x="786384" y="4352544"/>
+            <a:ext cx="4617720" cy="274320"/>
+          </a:xfrm>
+          <a:prstGeom prst="rect">
+            <a:avLst/>
+          </a:prstGeom>
+          <a:noFill/>
+          <a:ln/>
+        </p:spPr>
+        <p:txBody>
+          <a:bodyPr wrap="square" lIns="0" tIns="0" rIns="0" bIns="0" rtlCol="0" anchor="ctr">
+            <a:normAutofit/>
+          </a:bodyPr>
+          <a:lstStyle/>
+          <a:p>
+            <a:pPr algn="ctr" indent="0" marL="0">
+              <a:buNone/>
+            </a:pPr>
+            <a:r>
+              <a:rPr lang="en-US" sz="1900" b="1" dirty="0">
+                <a:solidFill>
+                  <a:srgbClr val="16324F"/>
+                </a:solidFill>
+                <a:latin typeface="Consolas" pitchFamily="34" charset="0"/>
+                <a:ea typeface="Consolas" pitchFamily="34" charset="-122"/>
+                <a:cs typeface="Consolas" pitchFamily="34" charset="-120"/>
+              </a:rPr>
+              <a:t>[80, 90, 100]</a:t>
+            </a:r>
+            <a:endParaRPr lang="en-US" sz="1900" dirty="0"/>
+          </a:p>
+        </p:txBody>
+      </p:sp>
+      <p:sp>
+        <p:nvSpPr>
+          <p:cNvPr id="17" name="Text 15"/>
+          <p:cNvSpPr/>
+          <p:nvPr/>
+        </p:nvSpPr>
+        <p:spPr>
+          <a:xfrm>
+            <a:off x="795528" y="4901184"/>
+            <a:ext cx="4572000" cy="502920"/>
+          </a:xfrm>
+          <a:prstGeom prst="rect">
+            <a:avLst/>
+          </a:prstGeom>
+          <a:noFill/>
+          <a:ln/>
+        </p:spPr>
+        <p:txBody>
+          <a:bodyPr wrap="square" lIns="0" tIns="0" rIns="0" bIns="0" rtlCol="0" anchor="ctr">
+            <a:normAutofit/>
+          </a:bodyPr>
+          <a:lstStyle/>
+          <a:p>
+            <a:pPr algn="ctr" indent="0" marL="0">
+              <a:buNone/>
+            </a:pPr>
+            <a:r>
+              <a:rPr lang="en-US" sz="1650" dirty="0">
+                <a:solidFill>
+                  <a:srgbClr val="5E6B78"/>
+                </a:solidFill>
+                <a:latin typeface="Aptos" pitchFamily="34" charset="0"/>
+                <a:ea typeface="Aptos" pitchFamily="34" charset="-122"/>
+                <a:cs typeface="Aptos" pitchFamily="34" charset="-120"/>
+              </a:rPr>
+              <a:t>list, dict, set</a:t>
+            </a:r>
+            <a:endParaRPr lang="en-US" sz="1650" dirty="0"/>
+          </a:p>
+          <a:p>
+            <a:pPr algn="ctr" indent="0" marL="0">
+              <a:buNone/>
+            </a:pPr>
+            <a:r>
+              <a:rPr lang="en-US" sz="1650" dirty="0">
+                <a:solidFill>
+                  <a:srgbClr val="5E6B78"/>
+                </a:solidFill>
+                <a:latin typeface="Aptos" pitchFamily="34" charset="0"/>
+                <a:ea typeface="Aptos" pitchFamily="34" charset="-122"/>
+                <a:cs typeface="Aptos" pitchFamily="34" charset="-120"/>
+              </a:rPr>
+              <a:t>change object contents</a:t>
+            </a:r>
+            <a:endParaRPr lang="en-US" sz="1650" dirty="0"/>
+          </a:p>
+        </p:txBody>
+      </p:sp>
+      <p:sp>
+        <p:nvSpPr>
+          <p:cNvPr id="18" name="Shape 16"/>
+          <p:cNvSpPr/>
+          <p:nvPr/>
+        </p:nvSpPr>
+        <p:spPr>
+          <a:xfrm>
+            <a:off x="6382512" y="2487168"/>
+            <a:ext cx="4800600" cy="0"/>
+          </a:xfrm>
+          <a:prstGeom prst="line">
+            <a:avLst/>
+          </a:prstGeom>
+          <a:noFill/>
           <a:ln w="12700">
             <a:solidFill>
               <a:srgbClr val="E0A03A"/>
@@ -16906,14 +17543,146 @@
       </p:sp>
       <p:sp>
         <p:nvSpPr>
-          <p:cNvPr id="10" name="Text 8"/>
-          <p:cNvSpPr/>
-          <p:nvPr/>
-        </p:nvSpPr>
-        <p:spPr>
-          <a:xfrm>
-            <a:off x="768096" y="3858768"/>
-            <a:ext cx="9006840" cy="804672"/>
+          <p:cNvPr id="19" name="Text 17"/>
+          <p:cNvSpPr/>
+          <p:nvPr/>
+        </p:nvSpPr>
+        <p:spPr>
+          <a:xfrm>
+            <a:off x="6382512" y="2715768"/>
+            <a:ext cx="4709160" cy="219456"/>
+          </a:xfrm>
+          <a:prstGeom prst="rect">
+            <a:avLst/>
+          </a:prstGeom>
+          <a:noFill/>
+          <a:ln/>
+        </p:spPr>
+        <p:txBody>
+          <a:bodyPr wrap="square" lIns="0" tIns="0" rIns="0" bIns="0" rtlCol="0" anchor="ctr">
+            <a:normAutofit/>
+          </a:bodyPr>
+          <a:lstStyle/>
+          <a:p>
+            <a:pPr algn="l" indent="0" marL="0">
+              <a:buNone/>
+            </a:pPr>
+            <a:r>
+              <a:rPr lang="en-US" sz="1050" b="1" dirty="0">
+                <a:solidFill>
+                  <a:srgbClr val="16324F"/>
+                </a:solidFill>
+                <a:latin typeface="Consolas" pitchFamily="34" charset="0"/>
+                <a:ea typeface="Consolas" pitchFamily="34" charset="-122"/>
+                <a:cs typeface="Consolas" pitchFamily="34" charset="-120"/>
+              </a:rPr>
+              <a:t>IMMUTABLE</a:t>
+            </a:r>
+            <a:endParaRPr lang="en-US" sz="1050" dirty="0"/>
+          </a:p>
+        </p:txBody>
+      </p:sp>
+      <p:sp>
+        <p:nvSpPr>
+          <p:cNvPr id="20" name="Shape 18"/>
+          <p:cNvSpPr/>
+          <p:nvPr/>
+        </p:nvSpPr>
+        <p:spPr>
+          <a:xfrm>
+            <a:off x="6382512" y="3163824"/>
+            <a:ext cx="4709160" cy="804672"/>
+          </a:xfrm>
+          <a:prstGeom prst="rect">
+            <a:avLst/>
+          </a:prstGeom>
+          <a:solidFill>
+            <a:srgbClr val="17212B"/>
+          </a:solidFill>
+          <a:ln w="12700">
+            <a:solidFill>
+              <a:srgbClr val="243242"/>
+            </a:solidFill>
+            <a:prstDash val="solid"/>
+          </a:ln>
+        </p:spPr>
+      </p:sp>
+      <p:sp>
+        <p:nvSpPr>
+          <p:cNvPr id="21" name="Shape 19"/>
+          <p:cNvSpPr/>
+          <p:nvPr/>
+        </p:nvSpPr>
+        <p:spPr>
+          <a:xfrm>
+            <a:off x="6382512" y="3163824"/>
+            <a:ext cx="4709160" cy="347472"/>
+          </a:xfrm>
+          <a:prstGeom prst="rect">
+            <a:avLst/>
+          </a:prstGeom>
+          <a:solidFill>
+            <a:srgbClr val="223044"/>
+          </a:solidFill>
+          <a:ln w="12700">
+            <a:solidFill>
+              <a:srgbClr val="223044"/>
+            </a:solidFill>
+            <a:prstDash val="solid"/>
+          </a:ln>
+        </p:spPr>
+      </p:sp>
+      <p:sp>
+        <p:nvSpPr>
+          <p:cNvPr id="22" name="Text 20"/>
+          <p:cNvSpPr/>
+          <p:nvPr/>
+        </p:nvSpPr>
+        <p:spPr>
+          <a:xfrm>
+            <a:off x="6601968" y="3282696"/>
+            <a:ext cx="4270248" cy="155448"/>
+          </a:xfrm>
+          <a:prstGeom prst="rect">
+            <a:avLst/>
+          </a:prstGeom>
+          <a:noFill/>
+          <a:ln/>
+        </p:spPr>
+        <p:txBody>
+          <a:bodyPr wrap="square" lIns="0" tIns="0" rIns="0" bIns="0" rtlCol="0" anchor="ctr">
+            <a:normAutofit/>
+          </a:bodyPr>
+          <a:lstStyle/>
+          <a:p>
+            <a:pPr algn="l" indent="0" marL="0">
+              <a:buNone/>
+            </a:pPr>
+            <a:r>
+              <a:rPr lang="en-US" sz="810" b="1" spc="30" kern="0" dirty="0">
+                <a:solidFill>
+                  <a:srgbClr val="8FD3FF"/>
+                </a:solidFill>
+                <a:latin typeface="Consolas" pitchFamily="34" charset="0"/>
+                <a:ea typeface="Consolas" pitchFamily="34" charset="-122"/>
+                <a:cs typeface="Consolas" pitchFamily="34" charset="-120"/>
+              </a:rPr>
+              <a:t>python</a:t>
+            </a:r>
+            <a:endParaRPr lang="en-US" sz="810" dirty="0"/>
+          </a:p>
+        </p:txBody>
+      </p:sp>
+      <p:sp>
+        <p:nvSpPr>
+          <p:cNvPr id="23" name="Text 21"/>
+          <p:cNvSpPr/>
+          <p:nvPr/>
+        </p:nvSpPr>
+        <p:spPr>
+          <a:xfrm>
+            <a:off x="6601968" y="3557016"/>
+            <a:ext cx="4233672" cy="365760"/>
           </a:xfrm>
           <a:prstGeom prst="rect">
             <a:avLst/>
@@ -16931,7 +17700,89 @@
               <a:buNone/>
             </a:pPr>
             <a:r>
-              <a:rPr lang="en-US" sz="2100" dirty="0">
+              <a:rPr lang="en-US" sz="1680" dirty="0">
+                <a:solidFill>
+                  <a:srgbClr val="F4F7FA"/>
+                </a:solidFill>
+                <a:latin typeface="Consolas" pitchFamily="34" charset="0"/>
+                <a:ea typeface="Consolas" pitchFamily="34" charset="-122"/>
+                <a:cs typeface="Consolas" pitchFamily="34" charset="-120"/>
+              </a:rPr>
+              <a:t>grade = grade + "+"</a:t>
+            </a:r>
+            <a:endParaRPr lang="en-US" sz="1680" dirty="0"/>
+          </a:p>
+        </p:txBody>
+      </p:sp>
+      <p:sp>
+        <p:nvSpPr>
+          <p:cNvPr id="24" name="Text 22"/>
+          <p:cNvSpPr/>
+          <p:nvPr/>
+        </p:nvSpPr>
+        <p:spPr>
+          <a:xfrm>
+            <a:off x="6419088" y="4352544"/>
+            <a:ext cx="4617720" cy="274320"/>
+          </a:xfrm>
+          <a:prstGeom prst="rect">
+            <a:avLst/>
+          </a:prstGeom>
+          <a:noFill/>
+          <a:ln/>
+        </p:spPr>
+        <p:txBody>
+          <a:bodyPr wrap="square" lIns="0" tIns="0" rIns="0" bIns="0" rtlCol="0" anchor="ctr">
+            <a:normAutofit/>
+          </a:bodyPr>
+          <a:lstStyle/>
+          <a:p>
+            <a:pPr algn="ctr" indent="0" marL="0">
+              <a:buNone/>
+            </a:pPr>
+            <a:r>
+              <a:rPr lang="en-US" sz="1900" b="1" dirty="0">
+                <a:solidFill>
+                  <a:srgbClr val="16324F"/>
+                </a:solidFill>
+                <a:latin typeface="Consolas" pitchFamily="34" charset="0"/>
+                <a:ea typeface="Consolas" pitchFamily="34" charset="-122"/>
+                <a:cs typeface="Consolas" pitchFamily="34" charset="-120"/>
+              </a:rPr>
+              <a:t>"A+"</a:t>
+            </a:r>
+            <a:endParaRPr lang="en-US" sz="1900" dirty="0"/>
+          </a:p>
+        </p:txBody>
+      </p:sp>
+      <p:sp>
+        <p:nvSpPr>
+          <p:cNvPr id="25" name="Text 23"/>
+          <p:cNvSpPr/>
+          <p:nvPr/>
+        </p:nvSpPr>
+        <p:spPr>
+          <a:xfrm>
+            <a:off x="6428232" y="4901184"/>
+            <a:ext cx="4572000" cy="502920"/>
+          </a:xfrm>
+          <a:prstGeom prst="rect">
+            <a:avLst/>
+          </a:prstGeom>
+          <a:noFill/>
+          <a:ln/>
+        </p:spPr>
+        <p:txBody>
+          <a:bodyPr wrap="square" lIns="0" tIns="0" rIns="0" bIns="0" rtlCol="0" anchor="ctr">
+            <a:normAutofit/>
+          </a:bodyPr>
+          <a:lstStyle/>
+          <a:p>
+            <a:pPr algn="ctr" indent="0" marL="0">
+              <a:buNone/>
+            </a:pPr>
+            <a:r>
+              <a:rPr lang="en-US" sz="1650" dirty="0">
                 <a:solidFill>
                   <a:srgbClr val="5E6B78"/>
                 </a:solidFill>
@@ -16939,9 +17790,26 @@
                 <a:ea typeface="Aptos" pitchFamily="34" charset="-122"/>
                 <a:cs typeface="Aptos" pitchFamily="34" charset="-120"/>
               </a:rPr>
-              <a:t>list, dict and set are mutable. str, tuple, int and float are immutable.</a:t>
-            </a:r>
-            <a:endParaRPr lang="en-US" sz="2100" dirty="0"/>
+              <a:t>str, tuple, int, float</a:t>
+            </a:r>
+            <a:endParaRPr lang="en-US" sz="1650" dirty="0"/>
+          </a:p>
+          <a:p>
+            <a:pPr algn="ctr" indent="0" marL="0">
+              <a:buNone/>
+            </a:pPr>
+            <a:r>
+              <a:rPr lang="en-US" sz="1650" dirty="0">
+                <a:solidFill>
+                  <a:srgbClr val="5E6B78"/>
+                </a:solidFill>
+                <a:latin typeface="Aptos" pitchFamily="34" charset="0"/>
+                <a:ea typeface="Aptos" pitchFamily="34" charset="-122"/>
+                <a:cs typeface="Aptos" pitchFamily="34" charset="-120"/>
+              </a:rPr>
+              <a:t>a new object is created</a:t>
+            </a:r>
+            <a:endParaRPr lang="en-US" sz="1650" dirty="0"/>
           </a:p>
         </p:txBody>
       </p:sp>
@@ -17165,7 +18033,7 @@
                 <a:ea typeface="Consolas" pitchFamily="34" charset="-122"/>
                 <a:cs typeface="Consolas" pitchFamily="34" charset="-120"/>
               </a:rPr>
-              <a:t>08 / 27</a:t>
+              <a:t>08 / 26</a:t>
             </a:r>
             <a:endParaRPr lang="en-US" sz="780" dirty="0"/>
           </a:p>
@@ -17716,7 +18584,7 @@
                 <a:ea typeface="Consolas" pitchFamily="34" charset="-122"/>
                 <a:cs typeface="Consolas" pitchFamily="34" charset="-120"/>
               </a:rPr>
-              <a:t>09 / 27</a:t>
+              <a:t>09 / 26</a:t>
             </a:r>
             <a:endParaRPr lang="en-US" sz="780" dirty="0"/>
           </a:p>
